--- a/Apresentacao Final.pptx
+++ b/Apresentacao Final.pptx
@@ -5,28 +5,28 @@
     <p:sldMasterId id="2147483648" r:id="rId1"/>
   </p:sldMasterIdLst>
   <p:sldIdLst>
-    <p:sldId id="256" r:id="rId7"/>
-    <p:sldId id="257" r:id="rId8"/>
-    <p:sldId id="258" r:id="rId9"/>
-    <p:sldId id="259" r:id="rId10"/>
-    <p:sldId id="260" r:id="rId11"/>
-    <p:sldId id="261" r:id="rId12"/>
-    <p:sldId id="262" r:id="rId13"/>
-    <p:sldId id="263" r:id="rId14"/>
-    <p:sldId id="264" r:id="rId15"/>
-    <p:sldId id="265" r:id="rId16"/>
-    <p:sldId id="266" r:id="rId17"/>
-    <p:sldId id="267" r:id="rId18"/>
-    <p:sldId id="268" r:id="rId19"/>
-    <p:sldId id="269" r:id="rId20"/>
-    <p:sldId id="270" r:id="rId21"/>
-    <p:sldId id="271" r:id="rId22"/>
-    <p:sldId id="272" r:id="rId23"/>
-    <p:sldId id="273" r:id="rId24"/>
-    <p:sldId id="274" r:id="rId25"/>
-    <p:sldId id="275" r:id="rId26"/>
+    <p:sldId id="256" r:id="rId2"/>
+    <p:sldId id="257" r:id="rId3"/>
+    <p:sldId id="258" r:id="rId4"/>
+    <p:sldId id="259" r:id="rId5"/>
+    <p:sldId id="260" r:id="rId6"/>
+    <p:sldId id="261" r:id="rId7"/>
+    <p:sldId id="262" r:id="rId8"/>
+    <p:sldId id="263" r:id="rId9"/>
+    <p:sldId id="264" r:id="rId10"/>
+    <p:sldId id="265" r:id="rId11"/>
+    <p:sldId id="266" r:id="rId12"/>
+    <p:sldId id="267" r:id="rId13"/>
+    <p:sldId id="268" r:id="rId14"/>
+    <p:sldId id="269" r:id="rId15"/>
+    <p:sldId id="270" r:id="rId16"/>
+    <p:sldId id="271" r:id="rId17"/>
+    <p:sldId id="272" r:id="rId18"/>
+    <p:sldId id="273" r:id="rId19"/>
+    <p:sldId id="274" r:id="rId20"/>
+    <p:sldId id="275" r:id="rId21"/>
   </p:sldIdLst>
-  <p:sldSz cx="12191969" cy="6858000" type="screen4x3"/>
+  <p:sldSz cx="12192000" cy="6858000"/>
   <p:notesSz cx="6858000" cy="9144000"/>
   <p:defaultTextStyle>
     <a:defPPr>
@@ -123,6 +123,22 @@
       </a:defRPr>
     </a:lvl9pPr>
   </p:defaultTextStyle>
+  <p:extLst>
+    <p:ext uri="{EFAFB233-063F-42B5-8137-9DF3F51BA10A}">
+      <p15:sldGuideLst xmlns:p15="http://schemas.microsoft.com/office/powerpoint/2012/main">
+        <p15:guide id="1" orient="horz" pos="2160">
+          <p15:clr>
+            <a:srgbClr val="A4A3A4"/>
+          </p15:clr>
+        </p15:guide>
+        <p15:guide id="2" pos="2880">
+          <p15:clr>
+            <a:srgbClr val="A4A3A4"/>
+          </p15:clr>
+        </p15:guide>
+      </p15:sldGuideLst>
+    </p:ext>
+  </p:extLst>
 </p:presentation>
 </file>
 
@@ -164,10 +180,9 @@
           <a:lstStyle/>
           <a:p>
             <a:r>
-              <a:rPr lang="en-US" smtClean="0"/>
+              <a:rPr lang="en-US"/>
               <a:t>Click to edit Master title style</a:t>
             </a:r>
-            <a:endParaRPr lang="en-US"/>
           </a:p>
         </p:txBody>
       </p:sp>
@@ -283,10 +298,9 @@
           </a:lstStyle>
           <a:p>
             <a:r>
-              <a:rPr lang="en-US" smtClean="0"/>
+              <a:rPr lang="en-US"/>
               <a:t>Click to edit Master subtitle style</a:t>
             </a:r>
-            <a:endParaRPr lang="en-US"/>
           </a:p>
         </p:txBody>
       </p:sp>
@@ -307,7 +321,7 @@
           <a:p>
             <a:fld id="{5BCAD085-E8A6-8845-BD4E-CB4CCA059FC4}" type="datetimeFigureOut">
               <a:rPr lang="en-US" smtClean="0"/>
-              <a:t>1/27/13</a:t>
+              <a:t>9/15/26</a:t>
             </a:fld>
             <a:endParaRPr lang="en-US"/>
           </a:p>
@@ -401,10 +415,9 @@
           <a:lstStyle/>
           <a:p>
             <a:r>
-              <a:rPr lang="en-US" smtClean="0"/>
+              <a:rPr lang="en-US"/>
               <a:t>Click to edit Master title style</a:t>
             </a:r>
-            <a:endParaRPr lang="en-US"/>
           </a:p>
         </p:txBody>
       </p:sp>
@@ -425,38 +438,37 @@
           <a:p>
             <a:pPr lvl="0"/>
             <a:r>
-              <a:rPr lang="en-US" smtClean="0"/>
+              <a:rPr lang="en-US"/>
               <a:t>Click to edit Master text styles</a:t>
             </a:r>
           </a:p>
           <a:p>
             <a:pPr lvl="1"/>
             <a:r>
-              <a:rPr lang="en-US" smtClean="0"/>
+              <a:rPr lang="en-US"/>
               <a:t>Second level</a:t>
             </a:r>
           </a:p>
           <a:p>
             <a:pPr lvl="2"/>
             <a:r>
-              <a:rPr lang="en-US" smtClean="0"/>
+              <a:rPr lang="en-US"/>
               <a:t>Third level</a:t>
             </a:r>
           </a:p>
           <a:p>
             <a:pPr lvl="3"/>
             <a:r>
-              <a:rPr lang="en-US" smtClean="0"/>
+              <a:rPr lang="en-US"/>
               <a:t>Fourth level</a:t>
             </a:r>
           </a:p>
           <a:p>
             <a:pPr lvl="4"/>
             <a:r>
-              <a:rPr lang="en-US" smtClean="0"/>
+              <a:rPr lang="en-US"/>
               <a:t>Fifth level</a:t>
             </a:r>
-            <a:endParaRPr lang="en-US"/>
           </a:p>
         </p:txBody>
       </p:sp>
@@ -477,7 +489,7 @@
           <a:p>
             <a:fld id="{5BCAD085-E8A6-8845-BD4E-CB4CCA059FC4}" type="datetimeFigureOut">
               <a:rPr lang="en-US" smtClean="0"/>
-              <a:t>1/27/13</a:t>
+              <a:t>9/15/26</a:t>
             </a:fld>
             <a:endParaRPr lang="en-US"/>
           </a:p>
@@ -576,10 +588,9 @@
           <a:lstStyle/>
           <a:p>
             <a:r>
-              <a:rPr lang="en-US" smtClean="0"/>
+              <a:rPr lang="en-US"/>
               <a:t>Click to edit Master title style</a:t>
             </a:r>
-            <a:endParaRPr lang="en-US"/>
           </a:p>
         </p:txBody>
       </p:sp>
@@ -605,38 +616,37 @@
           <a:p>
             <a:pPr lvl="0"/>
             <a:r>
-              <a:rPr lang="en-US" smtClean="0"/>
+              <a:rPr lang="en-US"/>
               <a:t>Click to edit Master text styles</a:t>
             </a:r>
           </a:p>
           <a:p>
             <a:pPr lvl="1"/>
             <a:r>
-              <a:rPr lang="en-US" smtClean="0"/>
+              <a:rPr lang="en-US"/>
               <a:t>Second level</a:t>
             </a:r>
           </a:p>
           <a:p>
             <a:pPr lvl="2"/>
             <a:r>
-              <a:rPr lang="en-US" smtClean="0"/>
+              <a:rPr lang="en-US"/>
               <a:t>Third level</a:t>
             </a:r>
           </a:p>
           <a:p>
             <a:pPr lvl="3"/>
             <a:r>
-              <a:rPr lang="en-US" smtClean="0"/>
+              <a:rPr lang="en-US"/>
               <a:t>Fourth level</a:t>
             </a:r>
           </a:p>
           <a:p>
             <a:pPr lvl="4"/>
             <a:r>
-              <a:rPr lang="en-US" smtClean="0"/>
+              <a:rPr lang="en-US"/>
               <a:t>Fifth level</a:t>
             </a:r>
-            <a:endParaRPr lang="en-US"/>
           </a:p>
         </p:txBody>
       </p:sp>
@@ -657,7 +667,7 @@
           <a:p>
             <a:fld id="{5BCAD085-E8A6-8845-BD4E-CB4CCA059FC4}" type="datetimeFigureOut">
               <a:rPr lang="en-US" smtClean="0"/>
-              <a:t>1/27/13</a:t>
+              <a:t>9/15/26</a:t>
             </a:fld>
             <a:endParaRPr lang="en-US"/>
           </a:p>
@@ -751,10 +761,9 @@
           <a:lstStyle/>
           <a:p>
             <a:r>
-              <a:rPr lang="en-US" smtClean="0"/>
+              <a:rPr lang="en-US"/>
               <a:t>Click to edit Master title style</a:t>
             </a:r>
-            <a:endParaRPr lang="en-US"/>
           </a:p>
         </p:txBody>
       </p:sp>
@@ -775,38 +784,37 @@
           <a:p>
             <a:pPr lvl="0"/>
             <a:r>
-              <a:rPr lang="en-US" smtClean="0"/>
+              <a:rPr lang="en-US"/>
               <a:t>Click to edit Master text styles</a:t>
             </a:r>
           </a:p>
           <a:p>
             <a:pPr lvl="1"/>
             <a:r>
-              <a:rPr lang="en-US" smtClean="0"/>
+              <a:rPr lang="en-US"/>
               <a:t>Second level</a:t>
             </a:r>
           </a:p>
           <a:p>
             <a:pPr lvl="2"/>
             <a:r>
-              <a:rPr lang="en-US" smtClean="0"/>
+              <a:rPr lang="en-US"/>
               <a:t>Third level</a:t>
             </a:r>
           </a:p>
           <a:p>
             <a:pPr lvl="3"/>
             <a:r>
-              <a:rPr lang="en-US" smtClean="0"/>
+              <a:rPr lang="en-US"/>
               <a:t>Fourth level</a:t>
             </a:r>
           </a:p>
           <a:p>
             <a:pPr lvl="4"/>
             <a:r>
-              <a:rPr lang="en-US" smtClean="0"/>
+              <a:rPr lang="en-US"/>
               <a:t>Fifth level</a:t>
             </a:r>
-            <a:endParaRPr lang="en-US"/>
           </a:p>
         </p:txBody>
       </p:sp>
@@ -827,7 +835,7 @@
           <a:p>
             <a:fld id="{5BCAD085-E8A6-8845-BD4E-CB4CCA059FC4}" type="datetimeFigureOut">
               <a:rPr lang="en-US" smtClean="0"/>
-              <a:t>1/27/13</a:t>
+              <a:t>9/15/26</a:t>
             </a:fld>
             <a:endParaRPr lang="en-US"/>
           </a:p>
@@ -930,10 +938,9 @@
           </a:lstStyle>
           <a:p>
             <a:r>
-              <a:rPr lang="en-US" smtClean="0"/>
+              <a:rPr lang="en-US"/>
               <a:t>Click to edit Master title style</a:t>
             </a:r>
-            <a:endParaRPr lang="en-US"/>
           </a:p>
         </p:txBody>
       </p:sp>
@@ -1050,7 +1057,7 @@
           <a:p>
             <a:pPr lvl="0"/>
             <a:r>
-              <a:rPr lang="en-US" smtClean="0"/>
+              <a:rPr lang="en-US"/>
               <a:t>Click to edit Master text styles</a:t>
             </a:r>
           </a:p>
@@ -1073,7 +1080,7 @@
           <a:p>
             <a:fld id="{5BCAD085-E8A6-8845-BD4E-CB4CCA059FC4}" type="datetimeFigureOut">
               <a:rPr lang="en-US" smtClean="0"/>
-              <a:t>1/27/13</a:t>
+              <a:t>9/15/26</a:t>
             </a:fld>
             <a:endParaRPr lang="en-US"/>
           </a:p>
@@ -1167,10 +1174,9 @@
           <a:lstStyle/>
           <a:p>
             <a:r>
-              <a:rPr lang="en-US" smtClean="0"/>
+              <a:rPr lang="en-US"/>
               <a:t>Click to edit Master title style</a:t>
             </a:r>
-            <a:endParaRPr lang="en-US"/>
           </a:p>
         </p:txBody>
       </p:sp>
@@ -1224,38 +1230,37 @@
           <a:p>
             <a:pPr lvl="0"/>
             <a:r>
-              <a:rPr lang="en-US" smtClean="0"/>
+              <a:rPr lang="en-US"/>
               <a:t>Click to edit Master text styles</a:t>
             </a:r>
           </a:p>
           <a:p>
             <a:pPr lvl="1"/>
             <a:r>
-              <a:rPr lang="en-US" smtClean="0"/>
+              <a:rPr lang="en-US"/>
               <a:t>Second level</a:t>
             </a:r>
           </a:p>
           <a:p>
             <a:pPr lvl="2"/>
             <a:r>
-              <a:rPr lang="en-US" smtClean="0"/>
+              <a:rPr lang="en-US"/>
               <a:t>Third level</a:t>
             </a:r>
           </a:p>
           <a:p>
             <a:pPr lvl="3"/>
             <a:r>
-              <a:rPr lang="en-US" smtClean="0"/>
+              <a:rPr lang="en-US"/>
               <a:t>Fourth level</a:t>
             </a:r>
           </a:p>
           <a:p>
             <a:pPr lvl="4"/>
             <a:r>
-              <a:rPr lang="en-US" smtClean="0"/>
+              <a:rPr lang="en-US"/>
               <a:t>Fifth level</a:t>
             </a:r>
-            <a:endParaRPr lang="en-US"/>
           </a:p>
         </p:txBody>
       </p:sp>
@@ -1309,38 +1314,37 @@
           <a:p>
             <a:pPr lvl="0"/>
             <a:r>
-              <a:rPr lang="en-US" smtClean="0"/>
+              <a:rPr lang="en-US"/>
               <a:t>Click to edit Master text styles</a:t>
             </a:r>
           </a:p>
           <a:p>
             <a:pPr lvl="1"/>
             <a:r>
-              <a:rPr lang="en-US" smtClean="0"/>
+              <a:rPr lang="en-US"/>
               <a:t>Second level</a:t>
             </a:r>
           </a:p>
           <a:p>
             <a:pPr lvl="2"/>
             <a:r>
-              <a:rPr lang="en-US" smtClean="0"/>
+              <a:rPr lang="en-US"/>
               <a:t>Third level</a:t>
             </a:r>
           </a:p>
           <a:p>
             <a:pPr lvl="3"/>
             <a:r>
-              <a:rPr lang="en-US" smtClean="0"/>
+              <a:rPr lang="en-US"/>
               <a:t>Fourth level</a:t>
             </a:r>
           </a:p>
           <a:p>
             <a:pPr lvl="4"/>
             <a:r>
-              <a:rPr lang="en-US" smtClean="0"/>
+              <a:rPr lang="en-US"/>
               <a:t>Fifth level</a:t>
             </a:r>
-            <a:endParaRPr lang="en-US"/>
           </a:p>
         </p:txBody>
       </p:sp>
@@ -1361,7 +1365,7 @@
           <a:p>
             <a:fld id="{5BCAD085-E8A6-8845-BD4E-CB4CCA059FC4}" type="datetimeFigureOut">
               <a:rPr lang="en-US" smtClean="0"/>
-              <a:t>1/27/13</a:t>
+              <a:t>9/15/26</a:t>
             </a:fld>
             <a:endParaRPr lang="en-US"/>
           </a:p>
@@ -1459,10 +1463,9 @@
           </a:lstStyle>
           <a:p>
             <a:r>
-              <a:rPr lang="en-US" smtClean="0"/>
+              <a:rPr lang="en-US"/>
               <a:t>Click to edit Master title style</a:t>
             </a:r>
-            <a:endParaRPr lang="en-US"/>
           </a:p>
         </p:txBody>
       </p:sp>
@@ -1525,7 +1528,7 @@
           <a:p>
             <a:pPr lvl="0"/>
             <a:r>
-              <a:rPr lang="en-US" smtClean="0"/>
+              <a:rPr lang="en-US"/>
               <a:t>Click to edit Master text styles</a:t>
             </a:r>
           </a:p>
@@ -1581,38 +1584,37 @@
           <a:p>
             <a:pPr lvl="0"/>
             <a:r>
-              <a:rPr lang="en-US" smtClean="0"/>
+              <a:rPr lang="en-US"/>
               <a:t>Click to edit Master text styles</a:t>
             </a:r>
           </a:p>
           <a:p>
             <a:pPr lvl="1"/>
             <a:r>
-              <a:rPr lang="en-US" smtClean="0"/>
+              <a:rPr lang="en-US"/>
               <a:t>Second level</a:t>
             </a:r>
           </a:p>
           <a:p>
             <a:pPr lvl="2"/>
             <a:r>
-              <a:rPr lang="en-US" smtClean="0"/>
+              <a:rPr lang="en-US"/>
               <a:t>Third level</a:t>
             </a:r>
           </a:p>
           <a:p>
             <a:pPr lvl="3"/>
             <a:r>
-              <a:rPr lang="en-US" smtClean="0"/>
+              <a:rPr lang="en-US"/>
               <a:t>Fourth level</a:t>
             </a:r>
           </a:p>
           <a:p>
             <a:pPr lvl="4"/>
             <a:r>
-              <a:rPr lang="en-US" smtClean="0"/>
+              <a:rPr lang="en-US"/>
               <a:t>Fifth level</a:t>
             </a:r>
-            <a:endParaRPr lang="en-US"/>
           </a:p>
         </p:txBody>
       </p:sp>
@@ -1675,7 +1677,7 @@
           <a:p>
             <a:pPr lvl="0"/>
             <a:r>
-              <a:rPr lang="en-US" smtClean="0"/>
+              <a:rPr lang="en-US"/>
               <a:t>Click to edit Master text styles</a:t>
             </a:r>
           </a:p>
@@ -1731,38 +1733,37 @@
           <a:p>
             <a:pPr lvl="0"/>
             <a:r>
-              <a:rPr lang="en-US" smtClean="0"/>
+              <a:rPr lang="en-US"/>
               <a:t>Click to edit Master text styles</a:t>
             </a:r>
           </a:p>
           <a:p>
             <a:pPr lvl="1"/>
             <a:r>
-              <a:rPr lang="en-US" smtClean="0"/>
+              <a:rPr lang="en-US"/>
               <a:t>Second level</a:t>
             </a:r>
           </a:p>
           <a:p>
             <a:pPr lvl="2"/>
             <a:r>
-              <a:rPr lang="en-US" smtClean="0"/>
+              <a:rPr lang="en-US"/>
               <a:t>Third level</a:t>
             </a:r>
           </a:p>
           <a:p>
             <a:pPr lvl="3"/>
             <a:r>
-              <a:rPr lang="en-US" smtClean="0"/>
+              <a:rPr lang="en-US"/>
               <a:t>Fourth level</a:t>
             </a:r>
           </a:p>
           <a:p>
             <a:pPr lvl="4"/>
             <a:r>
-              <a:rPr lang="en-US" smtClean="0"/>
+              <a:rPr lang="en-US"/>
               <a:t>Fifth level</a:t>
             </a:r>
-            <a:endParaRPr lang="en-US"/>
           </a:p>
         </p:txBody>
       </p:sp>
@@ -1783,7 +1784,7 @@
           <a:p>
             <a:fld id="{5BCAD085-E8A6-8845-BD4E-CB4CCA059FC4}" type="datetimeFigureOut">
               <a:rPr lang="en-US" smtClean="0"/>
-              <a:t>1/27/13</a:t>
+              <a:t>9/15/26</a:t>
             </a:fld>
             <a:endParaRPr lang="en-US"/>
           </a:p>
@@ -1877,10 +1878,9 @@
           <a:lstStyle/>
           <a:p>
             <a:r>
-              <a:rPr lang="en-US" smtClean="0"/>
+              <a:rPr lang="en-US"/>
               <a:t>Click to edit Master title style</a:t>
             </a:r>
-            <a:endParaRPr lang="en-US"/>
           </a:p>
         </p:txBody>
       </p:sp>
@@ -1901,7 +1901,7 @@
           <a:p>
             <a:fld id="{5BCAD085-E8A6-8845-BD4E-CB4CCA059FC4}" type="datetimeFigureOut">
               <a:rPr lang="en-US" smtClean="0"/>
-              <a:t>1/27/13</a:t>
+              <a:t>9/15/26</a:t>
             </a:fld>
             <a:endParaRPr lang="en-US"/>
           </a:p>
@@ -1996,7 +1996,7 @@
           <a:p>
             <a:fld id="{5BCAD085-E8A6-8845-BD4E-CB4CCA059FC4}" type="datetimeFigureOut">
               <a:rPr lang="en-US" smtClean="0"/>
-              <a:t>1/27/13</a:t>
+              <a:t>9/15/26</a:t>
             </a:fld>
             <a:endParaRPr lang="en-US"/>
           </a:p>
@@ -2099,10 +2099,9 @@
           </a:lstStyle>
           <a:p>
             <a:r>
-              <a:rPr lang="en-US" smtClean="0"/>
+              <a:rPr lang="en-US"/>
               <a:t>Click to edit Master title style</a:t>
             </a:r>
-            <a:endParaRPr lang="en-US"/>
           </a:p>
         </p:txBody>
       </p:sp>
@@ -2156,38 +2155,37 @@
           <a:p>
             <a:pPr lvl="0"/>
             <a:r>
-              <a:rPr lang="en-US" smtClean="0"/>
+              <a:rPr lang="en-US"/>
               <a:t>Click to edit Master text styles</a:t>
             </a:r>
           </a:p>
           <a:p>
             <a:pPr lvl="1"/>
             <a:r>
-              <a:rPr lang="en-US" smtClean="0"/>
+              <a:rPr lang="en-US"/>
               <a:t>Second level</a:t>
             </a:r>
           </a:p>
           <a:p>
             <a:pPr lvl="2"/>
             <a:r>
-              <a:rPr lang="en-US" smtClean="0"/>
+              <a:rPr lang="en-US"/>
               <a:t>Third level</a:t>
             </a:r>
           </a:p>
           <a:p>
             <a:pPr lvl="3"/>
             <a:r>
-              <a:rPr lang="en-US" smtClean="0"/>
+              <a:rPr lang="en-US"/>
               <a:t>Fourth level</a:t>
             </a:r>
           </a:p>
           <a:p>
             <a:pPr lvl="4"/>
             <a:r>
-              <a:rPr lang="en-US" smtClean="0"/>
+              <a:rPr lang="en-US"/>
               <a:t>Fifth level</a:t>
             </a:r>
-            <a:endParaRPr lang="en-US"/>
           </a:p>
         </p:txBody>
       </p:sp>
@@ -2250,7 +2248,7 @@
           <a:p>
             <a:pPr lvl="0"/>
             <a:r>
-              <a:rPr lang="en-US" smtClean="0"/>
+              <a:rPr lang="en-US"/>
               <a:t>Click to edit Master text styles</a:t>
             </a:r>
           </a:p>
@@ -2273,7 +2271,7 @@
           <a:p>
             <a:fld id="{5BCAD085-E8A6-8845-BD4E-CB4CCA059FC4}" type="datetimeFigureOut">
               <a:rPr lang="en-US" smtClean="0"/>
-              <a:t>1/27/13</a:t>
+              <a:t>9/15/26</a:t>
             </a:fld>
             <a:endParaRPr lang="en-US"/>
           </a:p>
@@ -2376,10 +2374,9 @@
           </a:lstStyle>
           <a:p>
             <a:r>
-              <a:rPr lang="en-US" smtClean="0"/>
+              <a:rPr lang="en-US"/>
               <a:t>Click to edit Master title style</a:t>
             </a:r>
-            <a:endParaRPr lang="en-US"/>
           </a:p>
         </p:txBody>
       </p:sp>
@@ -2503,7 +2500,7 @@
           <a:p>
             <a:pPr lvl="0"/>
             <a:r>
-              <a:rPr lang="en-US" smtClean="0"/>
+              <a:rPr lang="en-US"/>
               <a:t>Click to edit Master text styles</a:t>
             </a:r>
           </a:p>
@@ -2526,7 +2523,7 @@
           <a:p>
             <a:fld id="{5BCAD085-E8A6-8845-BD4E-CB4CCA059FC4}" type="datetimeFigureOut">
               <a:rPr lang="en-US" smtClean="0"/>
-              <a:t>1/27/13</a:t>
+              <a:t>9/15/26</a:t>
             </a:fld>
             <a:endParaRPr lang="en-US"/>
           </a:p>
@@ -2635,10 +2632,9 @@
           <a:lstStyle/>
           <a:p>
             <a:r>
-              <a:rPr lang="en-US" smtClean="0"/>
+              <a:rPr lang="en-US"/>
               <a:t>Click to edit Master title style</a:t>
             </a:r>
-            <a:endParaRPr lang="en-US"/>
           </a:p>
         </p:txBody>
       </p:sp>
@@ -2669,38 +2665,37 @@
           <a:p>
             <a:pPr lvl="0"/>
             <a:r>
-              <a:rPr lang="en-US" smtClean="0"/>
+              <a:rPr lang="en-US"/>
               <a:t>Click to edit Master text styles</a:t>
             </a:r>
           </a:p>
           <a:p>
             <a:pPr lvl="1"/>
             <a:r>
-              <a:rPr lang="en-US" smtClean="0"/>
+              <a:rPr lang="en-US"/>
               <a:t>Second level</a:t>
             </a:r>
           </a:p>
           <a:p>
             <a:pPr lvl="2"/>
             <a:r>
-              <a:rPr lang="en-US" smtClean="0"/>
+              <a:rPr lang="en-US"/>
               <a:t>Third level</a:t>
             </a:r>
           </a:p>
           <a:p>
             <a:pPr lvl="3"/>
             <a:r>
-              <a:rPr lang="en-US" smtClean="0"/>
+              <a:rPr lang="en-US"/>
               <a:t>Fourth level</a:t>
             </a:r>
           </a:p>
           <a:p>
             <a:pPr lvl="4"/>
             <a:r>
-              <a:rPr lang="en-US" smtClean="0"/>
+              <a:rPr lang="en-US"/>
               <a:t>Fifth level</a:t>
             </a:r>
-            <a:endParaRPr lang="en-US"/>
           </a:p>
         </p:txBody>
       </p:sp>
@@ -2739,7 +2734,7 @@
           <a:p>
             <a:fld id="{5BCAD085-E8A6-8845-BD4E-CB4CCA059FC4}" type="datetimeFigureOut">
               <a:rPr lang="en-US" smtClean="0"/>
-              <a:t>1/27/13</a:t>
+              <a:t>9/15/26</a:t>
             </a:fld>
             <a:endParaRPr lang="en-US"/>
           </a:p>
@@ -3098,7 +3093,7 @@
 </file>
 
 <file path=ppt/slides/slide1.xml><?xml version="1.0" encoding="utf-8"?>
-<p:sld xmlns:a="http://schemas.openxmlformats.org/drawingml/2006/main" xmlns:p="http://schemas.openxmlformats.org/presentationml/2006/main" xmlns:r="http://schemas.openxmlformats.org/officeDocument/2006/relationships">
+<p:sld xmlns:a="http://schemas.openxmlformats.org/drawingml/2006/main" xmlns:r="http://schemas.openxmlformats.org/officeDocument/2006/relationships" xmlns:p="http://schemas.openxmlformats.org/presentationml/2006/main">
   <p:cSld>
     <p:spTree>
       <p:nvGrpSpPr>
@@ -3106,7 +3101,14 @@
         <p:cNvGrpSpPr/>
         <p:nvPr/>
       </p:nvGrpSpPr>
-      <p:grpSpPr/>
+      <p:grpSpPr>
+        <a:xfrm>
+          <a:off x="0" y="0"/>
+          <a:ext cx="0" cy="0"/>
+          <a:chOff x="0" y="0"/>
+          <a:chExt cx="0" cy="0"/>
+        </a:xfrm>
+      </p:grpSpPr>
       <p:sp>
         <p:nvSpPr>
           <p:cNvPr id="2" name="Rectangle 1"/>
@@ -3144,12 +3146,13 @@
           </a:fontRef>
         </p:style>
         <p:txBody>
-          <a:bodyPr rtlCol="0" anchor="ctr" wrap="square">
+          <a:bodyPr wrap="square" rtlCol="0" anchor="ctr">
             <a:noAutofit/>
           </a:bodyPr>
           <a:lstStyle/>
           <a:p>
             <a:pPr algn="ctr"/>
+            <a:endParaRPr/>
           </a:p>
         </p:txBody>
       </p:sp>
@@ -3190,12 +3193,13 @@
           </a:fontRef>
         </p:style>
         <p:txBody>
-          <a:bodyPr rtlCol="0" anchor="ctr" wrap="square">
+          <a:bodyPr wrap="square" rtlCol="0" anchor="ctr">
             <a:noAutofit/>
           </a:bodyPr>
           <a:lstStyle/>
           <a:p>
             <a:pPr algn="ctr"/>
+            <a:endParaRPr/>
           </a:p>
         </p:txBody>
       </p:sp>
@@ -3216,7 +3220,7 @@
           <a:noFill/>
         </p:spPr>
         <p:txBody>
-          <a:bodyPr wrap="square" lIns="0" rIns="0" tIns="0" bIns="0" anchor="ctr">
+          <a:bodyPr wrap="square" lIns="0" tIns="0" rIns="0" bIns="0" anchor="ctr">
             <a:noAutofit/>
           </a:bodyPr>
           <a:lstStyle/>
@@ -3263,7 +3267,7 @@
           <a:noFill/>
         </p:spPr>
         <p:txBody>
-          <a:bodyPr wrap="square" lIns="0" rIns="0" tIns="0" bIns="0" anchor="ctr">
+          <a:bodyPr wrap="square" lIns="0" tIns="0" rIns="0" bIns="0" anchor="ctr">
             <a:noAutofit/>
           </a:bodyPr>
           <a:lstStyle/>
@@ -3334,7 +3338,7 @@
           <a:noFill/>
         </p:spPr>
         <p:txBody>
-          <a:bodyPr wrap="square" lIns="0" rIns="0" tIns="0" bIns="0" anchor="t">
+          <a:bodyPr wrap="square" lIns="0" tIns="0" rIns="0" bIns="0" anchor="t">
             <a:noAutofit/>
           </a:bodyPr>
           <a:lstStyle/>
@@ -3381,7 +3385,7 @@
           <a:noFill/>
         </p:spPr>
         <p:txBody>
-          <a:bodyPr wrap="square" lIns="0" rIns="0" tIns="0" bIns="0" anchor="t">
+          <a:bodyPr wrap="square" lIns="0" tIns="0" rIns="0" bIns="0" anchor="t">
             <a:noAutofit/>
           </a:bodyPr>
           <a:lstStyle/>
@@ -3487,7 +3491,7 @@
           <a:noFill/>
         </p:spPr>
         <p:txBody>
-          <a:bodyPr wrap="square" lIns="0" rIns="0" tIns="0" bIns="0" anchor="t">
+          <a:bodyPr wrap="square" lIns="0" tIns="0" rIns="0" bIns="0" anchor="t">
             <a:noAutofit/>
           </a:bodyPr>
           <a:lstStyle/>
@@ -3534,7 +3538,7 @@
           <a:noFill/>
         </p:spPr>
         <p:txBody>
-          <a:bodyPr wrap="square" lIns="0" rIns="0" tIns="0" bIns="0" anchor="t">
+          <a:bodyPr wrap="square" lIns="0" tIns="0" rIns="0" bIns="0" anchor="t">
             <a:noAutofit/>
           </a:bodyPr>
           <a:lstStyle/>
@@ -3573,7 +3577,7 @@
 </file>
 
 <file path=ppt/slides/slide10.xml><?xml version="1.0" encoding="utf-8"?>
-<p:sld xmlns:a="http://schemas.openxmlformats.org/drawingml/2006/main" xmlns:p="http://schemas.openxmlformats.org/presentationml/2006/main" xmlns:r="http://schemas.openxmlformats.org/officeDocument/2006/relationships">
+<p:sld xmlns:a="http://schemas.openxmlformats.org/drawingml/2006/main" xmlns:r="http://schemas.openxmlformats.org/officeDocument/2006/relationships" xmlns:p="http://schemas.openxmlformats.org/presentationml/2006/main">
   <p:cSld>
     <p:spTree>
       <p:nvGrpSpPr>
@@ -3581,7 +3585,14 @@
         <p:cNvGrpSpPr/>
         <p:nvPr/>
       </p:nvGrpSpPr>
-      <p:grpSpPr/>
+      <p:grpSpPr>
+        <a:xfrm>
+          <a:off x="0" y="0"/>
+          <a:ext cx="0" cy="0"/>
+          <a:chOff x="0" y="0"/>
+          <a:chExt cx="0" cy="0"/>
+        </a:xfrm>
+      </p:grpSpPr>
       <p:sp>
         <p:nvSpPr>
           <p:cNvPr id="2" name="Rectangle 1"/>
@@ -3619,12 +3630,13 @@
           </a:fontRef>
         </p:style>
         <p:txBody>
-          <a:bodyPr rtlCol="0" anchor="ctr" wrap="square">
+          <a:bodyPr wrap="square" rtlCol="0" anchor="ctr">
             <a:noAutofit/>
           </a:bodyPr>
           <a:lstStyle/>
           <a:p>
             <a:pPr algn="ctr"/>
+            <a:endParaRPr/>
           </a:p>
         </p:txBody>
       </p:sp>
@@ -3665,12 +3677,13 @@
           </a:fontRef>
         </p:style>
         <p:txBody>
-          <a:bodyPr rtlCol="0" anchor="ctr" wrap="square">
+          <a:bodyPr wrap="square" rtlCol="0" anchor="ctr">
             <a:noAutofit/>
           </a:bodyPr>
           <a:lstStyle/>
           <a:p>
             <a:pPr algn="ctr"/>
+            <a:endParaRPr/>
           </a:p>
         </p:txBody>
       </p:sp>
@@ -3691,7 +3704,7 @@
           <a:noFill/>
         </p:spPr>
         <p:txBody>
-          <a:bodyPr wrap="square" lIns="0" rIns="0" tIns="0" bIns="0" anchor="ctr">
+          <a:bodyPr wrap="square" lIns="0" tIns="0" rIns="0" bIns="0" anchor="ctr">
             <a:noAutofit/>
           </a:bodyPr>
           <a:lstStyle/>
@@ -3738,7 +3751,7 @@
           <a:noFill/>
         </p:spPr>
         <p:txBody>
-          <a:bodyPr wrap="square" lIns="0" rIns="0" tIns="0" bIns="0" anchor="ctr">
+          <a:bodyPr wrap="square" lIns="0" tIns="0" rIns="0" bIns="0" anchor="ctr">
             <a:noAutofit/>
           </a:bodyPr>
           <a:lstStyle/>
@@ -3809,7 +3822,7 @@
           <a:noFill/>
         </p:spPr>
         <p:txBody>
-          <a:bodyPr wrap="square" lIns="0" rIns="0" tIns="0" bIns="0" anchor="t">
+          <a:bodyPr wrap="square" lIns="0" tIns="0" rIns="0" bIns="0" anchor="t">
             <a:noAutofit/>
           </a:bodyPr>
           <a:lstStyle/>
@@ -3856,7 +3869,7 @@
           <a:noFill/>
         </p:spPr>
         <p:txBody>
-          <a:bodyPr wrap="square" lIns="0" rIns="0" tIns="0" bIns="0" anchor="t">
+          <a:bodyPr wrap="square" lIns="0" tIns="0" rIns="0" bIns="0" anchor="t">
             <a:noAutofit/>
           </a:bodyPr>
           <a:lstStyle/>
@@ -3938,7 +3951,7 @@
           <a:noFill/>
         </p:spPr>
         <p:txBody>
-          <a:bodyPr wrap="square" lIns="0" rIns="0" tIns="0" bIns="0" anchor="t">
+          <a:bodyPr wrap="square" lIns="0" tIns="0" rIns="0" bIns="0" anchor="t">
             <a:noAutofit/>
           </a:bodyPr>
           <a:lstStyle/>
@@ -3977,7 +3990,7 @@
 </file>
 
 <file path=ppt/slides/slide11.xml><?xml version="1.0" encoding="utf-8"?>
-<p:sld xmlns:a="http://schemas.openxmlformats.org/drawingml/2006/main" xmlns:p="http://schemas.openxmlformats.org/presentationml/2006/main" xmlns:r="http://schemas.openxmlformats.org/officeDocument/2006/relationships">
+<p:sld xmlns:a="http://schemas.openxmlformats.org/drawingml/2006/main" xmlns:r="http://schemas.openxmlformats.org/officeDocument/2006/relationships" xmlns:p="http://schemas.openxmlformats.org/presentationml/2006/main">
   <p:cSld>
     <p:spTree>
       <p:nvGrpSpPr>
@@ -3985,7 +3998,14 @@
         <p:cNvGrpSpPr/>
         <p:nvPr/>
       </p:nvGrpSpPr>
-      <p:grpSpPr/>
+      <p:grpSpPr>
+        <a:xfrm>
+          <a:off x="0" y="0"/>
+          <a:ext cx="0" cy="0"/>
+          <a:chOff x="0" y="0"/>
+          <a:chExt cx="0" cy="0"/>
+        </a:xfrm>
+      </p:grpSpPr>
       <p:cxnSp>
         <p:nvCxnSpPr>
           <p:cNvPr id="2" name="Connector 1"/>
@@ -4058,12 +4078,13 @@
           </a:fontRef>
         </p:style>
         <p:txBody>
-          <a:bodyPr rtlCol="0" anchor="ctr" wrap="square">
+          <a:bodyPr wrap="square" rtlCol="0" anchor="ctr">
             <a:noAutofit/>
           </a:bodyPr>
           <a:lstStyle/>
           <a:p>
             <a:pPr algn="ctr"/>
+            <a:endParaRPr/>
           </a:p>
         </p:txBody>
       </p:sp>
@@ -4084,7 +4105,7 @@
           <a:noFill/>
         </p:spPr>
         <p:txBody>
-          <a:bodyPr wrap="square" lIns="0" rIns="0" tIns="0" bIns="0" anchor="t">
+          <a:bodyPr wrap="square" lIns="0" tIns="0" rIns="0" bIns="0" anchor="t">
             <a:noAutofit/>
           </a:bodyPr>
           <a:lstStyle/>
@@ -4142,7 +4163,7 @@
           <a:noFill/>
         </p:spPr>
         <p:txBody>
-          <a:bodyPr wrap="square" lIns="0" rIns="0" tIns="0" bIns="0" anchor="t">
+          <a:bodyPr wrap="square" lIns="0" tIns="0" rIns="0" bIns="0" anchor="t">
             <a:noAutofit/>
           </a:bodyPr>
           <a:lstStyle/>
@@ -4189,7 +4210,7 @@
           <a:noFill/>
         </p:spPr>
         <p:txBody>
-          <a:bodyPr wrap="square" lIns="0" rIns="0" tIns="0" bIns="0" anchor="t">
+          <a:bodyPr wrap="square" lIns="0" tIns="0" rIns="0" bIns="0" anchor="t">
             <a:noAutofit/>
           </a:bodyPr>
           <a:lstStyle/>
@@ -4236,7 +4257,7 @@
           <a:noFill/>
         </p:spPr>
         <p:txBody>
-          <a:bodyPr wrap="square" lIns="0" rIns="0" tIns="0" bIns="0" anchor="t">
+          <a:bodyPr wrap="square" lIns="0" tIns="0" rIns="0" bIns="0" anchor="t">
             <a:noAutofit/>
           </a:bodyPr>
           <a:lstStyle/>
@@ -4303,7 +4324,7 @@
           </a:fontRef>
         </p:style>
         <p:txBody>
-          <a:bodyPr rtlCol="0" anchor="ctr" wrap="square" tIns="0" bIns="0">
+          <a:bodyPr wrap="square" tIns="0" bIns="0" rtlCol="0" anchor="ctr">
             <a:noAutofit/>
           </a:bodyPr>
           <a:lstStyle/>
@@ -4372,12 +4393,13 @@
           </a:fontRef>
         </p:style>
         <p:txBody>
-          <a:bodyPr rtlCol="0" anchor="ctr" wrap="square">
+          <a:bodyPr wrap="square" rtlCol="0" anchor="ctr">
             <a:noAutofit/>
           </a:bodyPr>
           <a:lstStyle/>
           <a:p>
             <a:pPr algn="ctr"/>
+            <a:endParaRPr/>
           </a:p>
         </p:txBody>
       </p:sp>
@@ -4418,12 +4440,13 @@
           </a:fontRef>
         </p:style>
         <p:txBody>
-          <a:bodyPr rtlCol="0" anchor="ctr" wrap="square">
+          <a:bodyPr wrap="square" rtlCol="0" anchor="ctr">
             <a:noAutofit/>
           </a:bodyPr>
           <a:lstStyle/>
           <a:p>
             <a:pPr algn="ctr"/>
+            <a:endParaRPr/>
           </a:p>
         </p:txBody>
       </p:sp>
@@ -4444,7 +4467,7 @@
           <a:noFill/>
         </p:spPr>
         <p:txBody>
-          <a:bodyPr wrap="square" lIns="0" rIns="0" tIns="0" bIns="0" anchor="t">
+          <a:bodyPr wrap="square" lIns="0" tIns="0" rIns="0" bIns="0" anchor="t">
             <a:noAutofit/>
           </a:bodyPr>
           <a:lstStyle/>
@@ -4491,7 +4514,7 @@
           <a:noFill/>
         </p:spPr>
         <p:txBody>
-          <a:bodyPr wrap="square" lIns="0" rIns="0" tIns="0" bIns="0" anchor="t">
+          <a:bodyPr wrap="square" lIns="0" tIns="0" rIns="0" bIns="0" anchor="t">
             <a:noAutofit/>
           </a:bodyPr>
           <a:lstStyle/>
@@ -4538,7 +4561,7 @@
           <a:noFill/>
         </p:spPr>
         <p:txBody>
-          <a:bodyPr wrap="square" lIns="0" rIns="0" tIns="0" bIns="0" anchor="t">
+          <a:bodyPr wrap="square" lIns="0" tIns="0" rIns="0" bIns="0" anchor="t">
             <a:noAutofit/>
           </a:bodyPr>
           <a:lstStyle/>
@@ -4643,12 +4666,13 @@
           </a:fontRef>
         </p:style>
         <p:txBody>
-          <a:bodyPr rtlCol="0" anchor="ctr" wrap="square">
+          <a:bodyPr wrap="square" rtlCol="0" anchor="ctr">
             <a:noAutofit/>
           </a:bodyPr>
           <a:lstStyle/>
           <a:p>
             <a:pPr algn="ctr"/>
+            <a:endParaRPr/>
           </a:p>
         </p:txBody>
       </p:sp>
@@ -4689,12 +4713,13 @@
           </a:fontRef>
         </p:style>
         <p:txBody>
-          <a:bodyPr rtlCol="0" anchor="ctr" wrap="square">
+          <a:bodyPr wrap="square" rtlCol="0" anchor="ctr">
             <a:noAutofit/>
           </a:bodyPr>
           <a:lstStyle/>
           <a:p>
             <a:pPr algn="ctr"/>
+            <a:endParaRPr/>
           </a:p>
         </p:txBody>
       </p:sp>
@@ -4715,7 +4740,7 @@
           <a:noFill/>
         </p:spPr>
         <p:txBody>
-          <a:bodyPr wrap="square" lIns="0" rIns="0" tIns="0" bIns="0" anchor="t">
+          <a:bodyPr wrap="square" lIns="0" tIns="0" rIns="0" bIns="0" anchor="t">
             <a:noAutofit/>
           </a:bodyPr>
           <a:lstStyle/>
@@ -4762,7 +4787,7 @@
           <a:noFill/>
         </p:spPr>
         <p:txBody>
-          <a:bodyPr wrap="square" lIns="0" rIns="0" tIns="0" bIns="0" anchor="t">
+          <a:bodyPr wrap="square" lIns="0" tIns="0" rIns="0" bIns="0" anchor="t">
             <a:noAutofit/>
           </a:bodyPr>
           <a:lstStyle/>
@@ -4809,7 +4834,7 @@
           <a:noFill/>
         </p:spPr>
         <p:txBody>
-          <a:bodyPr wrap="square" lIns="0" rIns="0" tIns="0" bIns="0" anchor="t">
+          <a:bodyPr wrap="square" lIns="0" tIns="0" rIns="0" bIns="0" anchor="t">
             <a:noAutofit/>
           </a:bodyPr>
           <a:lstStyle/>
@@ -4914,12 +4939,13 @@
           </a:fontRef>
         </p:style>
         <p:txBody>
-          <a:bodyPr rtlCol="0" anchor="ctr" wrap="square">
+          <a:bodyPr wrap="square" rtlCol="0" anchor="ctr">
             <a:noAutofit/>
           </a:bodyPr>
           <a:lstStyle/>
           <a:p>
             <a:pPr algn="ctr"/>
+            <a:endParaRPr/>
           </a:p>
         </p:txBody>
       </p:sp>
@@ -4960,12 +4986,13 @@
           </a:fontRef>
         </p:style>
         <p:txBody>
-          <a:bodyPr rtlCol="0" anchor="ctr" wrap="square">
+          <a:bodyPr wrap="square" rtlCol="0" anchor="ctr">
             <a:noAutofit/>
           </a:bodyPr>
           <a:lstStyle/>
           <a:p>
             <a:pPr algn="ctr"/>
+            <a:endParaRPr/>
           </a:p>
         </p:txBody>
       </p:sp>
@@ -4986,7 +5013,7 @@
           <a:noFill/>
         </p:spPr>
         <p:txBody>
-          <a:bodyPr wrap="square" lIns="0" rIns="0" tIns="0" bIns="0" anchor="t">
+          <a:bodyPr wrap="square" lIns="0" tIns="0" rIns="0" bIns="0" anchor="t">
             <a:noAutofit/>
           </a:bodyPr>
           <a:lstStyle/>
@@ -5033,7 +5060,7 @@
           <a:noFill/>
         </p:spPr>
         <p:txBody>
-          <a:bodyPr wrap="square" lIns="0" rIns="0" tIns="0" bIns="0" anchor="t">
+          <a:bodyPr wrap="square" lIns="0" tIns="0" rIns="0" bIns="0" anchor="t">
             <a:noAutofit/>
           </a:bodyPr>
           <a:lstStyle/>
@@ -5080,7 +5107,7 @@
           <a:noFill/>
         </p:spPr>
         <p:txBody>
-          <a:bodyPr wrap="square" lIns="0" rIns="0" tIns="0" bIns="0" anchor="t">
+          <a:bodyPr wrap="square" lIns="0" tIns="0" rIns="0" bIns="0" anchor="t">
             <a:noAutofit/>
           </a:bodyPr>
           <a:lstStyle/>
@@ -5162,7 +5189,7 @@
           <a:noFill/>
         </p:spPr>
         <p:txBody>
-          <a:bodyPr wrap="square" lIns="0" rIns="0" tIns="0" bIns="0" anchor="t">
+          <a:bodyPr wrap="square" lIns="0" tIns="0" rIns="0" bIns="0" anchor="t">
             <a:noAutofit/>
           </a:bodyPr>
           <a:lstStyle/>
@@ -5242,12 +5269,13 @@
           </a:fontRef>
         </p:style>
         <p:txBody>
-          <a:bodyPr rtlCol="0" anchor="ctr" wrap="square">
+          <a:bodyPr wrap="square" rtlCol="0" anchor="ctr">
             <a:noAutofit/>
           </a:bodyPr>
           <a:lstStyle/>
           <a:p>
             <a:pPr algn="ctr"/>
+            <a:endParaRPr/>
           </a:p>
         </p:txBody>
       </p:sp>
@@ -5288,12 +5316,13 @@
           </a:fontRef>
         </p:style>
         <p:txBody>
-          <a:bodyPr rtlCol="0" anchor="ctr" wrap="square">
+          <a:bodyPr wrap="square" rtlCol="0" anchor="ctr">
             <a:noAutofit/>
           </a:bodyPr>
           <a:lstStyle/>
           <a:p>
             <a:pPr algn="ctr"/>
+            <a:endParaRPr/>
           </a:p>
         </p:txBody>
       </p:sp>
@@ -5314,7 +5343,7 @@
           <a:noFill/>
         </p:spPr>
         <p:txBody>
-          <a:bodyPr wrap="square" lIns="0" rIns="0" tIns="0" bIns="0" anchor="t">
+          <a:bodyPr wrap="square" lIns="0" tIns="0" rIns="0" bIns="0" anchor="t">
             <a:noAutofit/>
           </a:bodyPr>
           <a:lstStyle/>
@@ -5361,7 +5390,7 @@
           <a:noFill/>
         </p:spPr>
         <p:txBody>
-          <a:bodyPr wrap="square" lIns="0" rIns="0" tIns="0" bIns="0" anchor="t">
+          <a:bodyPr wrap="square" lIns="0" tIns="0" rIns="0" bIns="0" anchor="t">
             <a:noAutofit/>
           </a:bodyPr>
           <a:lstStyle/>
@@ -5408,7 +5437,7 @@
           <a:noFill/>
         </p:spPr>
         <p:txBody>
-          <a:bodyPr wrap="square" lIns="0" rIns="0" tIns="0" bIns="0" anchor="t">
+          <a:bodyPr wrap="square" lIns="0" tIns="0" rIns="0" bIns="0" anchor="t">
             <a:noAutofit/>
           </a:bodyPr>
           <a:lstStyle/>
@@ -5477,7 +5506,7 @@
           </a:fontRef>
         </p:style>
         <p:txBody>
-          <a:bodyPr rtlCol="0" anchor="ctr" wrap="square" lIns="54864" rIns="54864" tIns="0" bIns="0">
+          <a:bodyPr wrap="square" lIns="54864" tIns="0" rIns="54864" bIns="0" rtlCol="0" anchor="ctr">
             <a:noAutofit/>
           </a:bodyPr>
           <a:lstStyle/>
@@ -5582,7 +5611,7 @@
           </a:fontRef>
         </p:style>
         <p:txBody>
-          <a:bodyPr rtlCol="0" anchor="ctr" wrap="square" lIns="54864" rIns="54864" tIns="0" bIns="0">
+          <a:bodyPr wrap="square" lIns="54864" tIns="0" rIns="54864" bIns="0" rtlCol="0" anchor="ctr">
             <a:noAutofit/>
           </a:bodyPr>
           <a:lstStyle/>
@@ -5687,7 +5716,7 @@
           </a:fontRef>
         </p:style>
         <p:txBody>
-          <a:bodyPr rtlCol="0" anchor="ctr" wrap="square" lIns="54864" rIns="54864" tIns="0" bIns="0">
+          <a:bodyPr wrap="square" lIns="54864" tIns="0" rIns="54864" bIns="0" rtlCol="0" anchor="ctr">
             <a:noAutofit/>
           </a:bodyPr>
           <a:lstStyle/>
@@ -5792,7 +5821,7 @@
           </a:fontRef>
         </p:style>
         <p:txBody>
-          <a:bodyPr rtlCol="0" anchor="ctr" wrap="square" lIns="54864" rIns="54864" tIns="0" bIns="0">
+          <a:bodyPr wrap="square" lIns="54864" tIns="0" rIns="54864" bIns="0" rtlCol="0" anchor="ctr">
             <a:noAutofit/>
           </a:bodyPr>
           <a:lstStyle/>
@@ -5839,7 +5868,7 @@
           <a:noFill/>
         </p:spPr>
         <p:txBody>
-          <a:bodyPr wrap="square" lIns="0" rIns="0" tIns="0" bIns="0" anchor="t">
+          <a:bodyPr wrap="square" lIns="0" tIns="0" rIns="0" bIns="0" anchor="t">
             <a:noAutofit/>
           </a:bodyPr>
           <a:lstStyle/>
@@ -5878,7 +5907,7 @@
 </file>
 
 <file path=ppt/slides/slide12.xml><?xml version="1.0" encoding="utf-8"?>
-<p:sld xmlns:a="http://schemas.openxmlformats.org/drawingml/2006/main" xmlns:p="http://schemas.openxmlformats.org/presentationml/2006/main" xmlns:r="http://schemas.openxmlformats.org/officeDocument/2006/relationships">
+<p:sld xmlns:a="http://schemas.openxmlformats.org/drawingml/2006/main" xmlns:r="http://schemas.openxmlformats.org/officeDocument/2006/relationships" xmlns:p="http://schemas.openxmlformats.org/presentationml/2006/main">
   <p:cSld>
     <p:spTree>
       <p:nvGrpSpPr>
@@ -5886,7 +5915,14 @@
         <p:cNvGrpSpPr/>
         <p:nvPr/>
       </p:nvGrpSpPr>
-      <p:grpSpPr/>
+      <p:grpSpPr>
+        <a:xfrm>
+          <a:off x="0" y="0"/>
+          <a:ext cx="0" cy="0"/>
+          <a:chOff x="0" y="0"/>
+          <a:chExt cx="0" cy="0"/>
+        </a:xfrm>
+      </p:grpSpPr>
       <p:cxnSp>
         <p:nvCxnSpPr>
           <p:cNvPr id="2" name="Connector 1"/>
@@ -5959,12 +5995,13 @@
           </a:fontRef>
         </p:style>
         <p:txBody>
-          <a:bodyPr rtlCol="0" anchor="ctr" wrap="square">
+          <a:bodyPr wrap="square" rtlCol="0" anchor="ctr">
             <a:noAutofit/>
           </a:bodyPr>
           <a:lstStyle/>
           <a:p>
             <a:pPr algn="ctr"/>
+            <a:endParaRPr/>
           </a:p>
         </p:txBody>
       </p:sp>
@@ -5985,7 +6022,7 @@
           <a:noFill/>
         </p:spPr>
         <p:txBody>
-          <a:bodyPr wrap="square" lIns="0" rIns="0" tIns="0" bIns="0" anchor="t">
+          <a:bodyPr wrap="square" lIns="0" tIns="0" rIns="0" bIns="0" anchor="t">
             <a:noAutofit/>
           </a:bodyPr>
           <a:lstStyle/>
@@ -6043,7 +6080,7 @@
           <a:noFill/>
         </p:spPr>
         <p:txBody>
-          <a:bodyPr wrap="square" lIns="0" rIns="0" tIns="0" bIns="0" anchor="t">
+          <a:bodyPr wrap="square" lIns="0" tIns="0" rIns="0" bIns="0" anchor="t">
             <a:noAutofit/>
           </a:bodyPr>
           <a:lstStyle/>
@@ -6090,7 +6127,7 @@
           <a:noFill/>
         </p:spPr>
         <p:txBody>
-          <a:bodyPr wrap="square" lIns="0" rIns="0" tIns="0" bIns="0" anchor="t">
+          <a:bodyPr wrap="square" lIns="0" tIns="0" rIns="0" bIns="0" anchor="t">
             <a:noAutofit/>
           </a:bodyPr>
           <a:lstStyle/>
@@ -6137,7 +6174,7 @@
           <a:noFill/>
         </p:spPr>
         <p:txBody>
-          <a:bodyPr wrap="square" lIns="0" rIns="0" tIns="0" bIns="0" anchor="t">
+          <a:bodyPr wrap="square" lIns="0" tIns="0" rIns="0" bIns="0" anchor="t">
             <a:noAutofit/>
           </a:bodyPr>
           <a:lstStyle/>
@@ -6184,7 +6221,7 @@
           <a:noFill/>
         </p:spPr>
         <p:txBody>
-          <a:bodyPr wrap="square" lIns="0" rIns="0" tIns="0" bIns="0" anchor="t">
+          <a:bodyPr wrap="square" lIns="0" tIns="0" rIns="0" bIns="0" anchor="t">
             <a:noAutofit/>
           </a:bodyPr>
           <a:lstStyle/>
@@ -6266,7 +6303,7 @@
           <a:noFill/>
         </p:spPr>
         <p:txBody>
-          <a:bodyPr wrap="square" lIns="0" rIns="0" tIns="0" bIns="0" anchor="t">
+          <a:bodyPr wrap="square" lIns="0" tIns="0" rIns="0" bIns="0" anchor="t">
             <a:noAutofit/>
           </a:bodyPr>
           <a:lstStyle/>
@@ -6313,7 +6350,7 @@
           <a:noFill/>
         </p:spPr>
         <p:txBody>
-          <a:bodyPr wrap="square" lIns="0" rIns="0" tIns="0" bIns="0" anchor="t">
+          <a:bodyPr wrap="square" lIns="0" tIns="0" rIns="0" bIns="0" anchor="t">
             <a:noAutofit/>
           </a:bodyPr>
           <a:lstStyle/>
@@ -6360,7 +6397,7 @@
           <a:noFill/>
         </p:spPr>
         <p:txBody>
-          <a:bodyPr wrap="square" lIns="0" rIns="0" tIns="0" bIns="0" anchor="t">
+          <a:bodyPr wrap="square" lIns="0" tIns="0" rIns="0" bIns="0" anchor="t">
             <a:noAutofit/>
           </a:bodyPr>
           <a:lstStyle/>
@@ -6407,7 +6444,7 @@
           <a:noFill/>
         </p:spPr>
         <p:txBody>
-          <a:bodyPr wrap="square" lIns="0" rIns="0" tIns="0" bIns="0" anchor="t">
+          <a:bodyPr wrap="square" lIns="0" tIns="0" rIns="0" bIns="0" anchor="t">
             <a:noAutofit/>
           </a:bodyPr>
           <a:lstStyle/>
@@ -6454,7 +6491,7 @@
           <a:noFill/>
         </p:spPr>
         <p:txBody>
-          <a:bodyPr wrap="square" lIns="0" rIns="0" tIns="0" bIns="0" anchor="t">
+          <a:bodyPr wrap="square" lIns="0" tIns="0" rIns="0" bIns="0" anchor="t">
             <a:noAutofit/>
           </a:bodyPr>
           <a:lstStyle/>
@@ -6501,7 +6538,7 @@
           <a:noFill/>
         </p:spPr>
         <p:txBody>
-          <a:bodyPr wrap="square" lIns="0" rIns="0" tIns="0" bIns="0" anchor="t">
+          <a:bodyPr wrap="square" lIns="0" tIns="0" rIns="0" bIns="0" anchor="t">
             <a:noAutofit/>
           </a:bodyPr>
           <a:lstStyle/>
@@ -6548,7 +6585,7 @@
           <a:noFill/>
         </p:spPr>
         <p:txBody>
-          <a:bodyPr wrap="square" lIns="0" rIns="0" tIns="0" bIns="0" anchor="t">
+          <a:bodyPr wrap="square" lIns="0" tIns="0" rIns="0" bIns="0" anchor="t">
             <a:noAutofit/>
           </a:bodyPr>
           <a:lstStyle/>
@@ -6595,7 +6632,7 @@
           <a:noFill/>
         </p:spPr>
         <p:txBody>
-          <a:bodyPr wrap="square" lIns="0" rIns="0" tIns="0" bIns="0" anchor="t">
+          <a:bodyPr wrap="square" lIns="0" tIns="0" rIns="0" bIns="0" anchor="t">
             <a:noAutofit/>
           </a:bodyPr>
           <a:lstStyle/>
@@ -6677,7 +6714,7 @@
           <a:noFill/>
         </p:spPr>
         <p:txBody>
-          <a:bodyPr wrap="square" lIns="0" rIns="0" tIns="0" bIns="0" anchor="t">
+          <a:bodyPr wrap="square" lIns="0" tIns="0" rIns="0" bIns="0" anchor="t">
             <a:noAutofit/>
           </a:bodyPr>
           <a:lstStyle/>
@@ -6724,7 +6761,7 @@
           <a:noFill/>
         </p:spPr>
         <p:txBody>
-          <a:bodyPr wrap="square" lIns="0" rIns="0" tIns="0" bIns="0" anchor="t">
+          <a:bodyPr wrap="square" lIns="0" tIns="0" rIns="0" bIns="0" anchor="t">
             <a:noAutofit/>
           </a:bodyPr>
           <a:lstStyle/>
@@ -6771,7 +6808,7 @@
           <a:noFill/>
         </p:spPr>
         <p:txBody>
-          <a:bodyPr wrap="square" lIns="0" rIns="0" tIns="0" bIns="0" anchor="t">
+          <a:bodyPr wrap="square" lIns="0" tIns="0" rIns="0" bIns="0" anchor="t">
             <a:noAutofit/>
           </a:bodyPr>
           <a:lstStyle/>
@@ -6818,7 +6855,7 @@
           <a:noFill/>
         </p:spPr>
         <p:txBody>
-          <a:bodyPr wrap="square" lIns="0" rIns="0" tIns="0" bIns="0" anchor="t">
+          <a:bodyPr wrap="square" lIns="0" tIns="0" rIns="0" bIns="0" anchor="t">
             <a:noAutofit/>
           </a:bodyPr>
           <a:lstStyle/>
@@ -6865,7 +6902,7 @@
           <a:noFill/>
         </p:spPr>
         <p:txBody>
-          <a:bodyPr wrap="square" lIns="0" rIns="0" tIns="0" bIns="0" anchor="t">
+          <a:bodyPr wrap="square" lIns="0" tIns="0" rIns="0" bIns="0" anchor="t">
             <a:noAutofit/>
           </a:bodyPr>
           <a:lstStyle/>
@@ -6912,7 +6949,7 @@
           <a:noFill/>
         </p:spPr>
         <p:txBody>
-          <a:bodyPr wrap="square" lIns="0" rIns="0" tIns="0" bIns="0" anchor="t">
+          <a:bodyPr wrap="square" lIns="0" tIns="0" rIns="0" bIns="0" anchor="t">
             <a:noAutofit/>
           </a:bodyPr>
           <a:lstStyle/>
@@ -6959,7 +6996,7 @@
           <a:noFill/>
         </p:spPr>
         <p:txBody>
-          <a:bodyPr wrap="square" lIns="0" rIns="0" tIns="0" bIns="0" anchor="t">
+          <a:bodyPr wrap="square" lIns="0" tIns="0" rIns="0" bIns="0" anchor="t">
             <a:noAutofit/>
           </a:bodyPr>
           <a:lstStyle/>
@@ -7006,7 +7043,7 @@
           <a:noFill/>
         </p:spPr>
         <p:txBody>
-          <a:bodyPr wrap="square" lIns="0" rIns="0" tIns="0" bIns="0" anchor="t">
+          <a:bodyPr wrap="square" lIns="0" tIns="0" rIns="0" bIns="0" anchor="t">
             <a:noAutofit/>
           </a:bodyPr>
           <a:lstStyle/>
@@ -7088,7 +7125,7 @@
           <a:noFill/>
         </p:spPr>
         <p:txBody>
-          <a:bodyPr wrap="square" lIns="0" rIns="0" tIns="0" bIns="0" anchor="t">
+          <a:bodyPr wrap="square" lIns="0" tIns="0" rIns="0" bIns="0" anchor="t">
             <a:noAutofit/>
           </a:bodyPr>
           <a:lstStyle/>
@@ -7135,7 +7172,7 @@
           <a:noFill/>
         </p:spPr>
         <p:txBody>
-          <a:bodyPr wrap="square" lIns="0" rIns="0" tIns="0" bIns="0" anchor="t">
+          <a:bodyPr wrap="square" lIns="0" tIns="0" rIns="0" bIns="0" anchor="t">
             <a:noAutofit/>
           </a:bodyPr>
           <a:lstStyle/>
@@ -7182,7 +7219,7 @@
           <a:noFill/>
         </p:spPr>
         <p:txBody>
-          <a:bodyPr wrap="square" lIns="0" rIns="0" tIns="0" bIns="0" anchor="t">
+          <a:bodyPr wrap="square" lIns="0" tIns="0" rIns="0" bIns="0" anchor="t">
             <a:noAutofit/>
           </a:bodyPr>
           <a:lstStyle/>
@@ -7229,7 +7266,7 @@
           <a:noFill/>
         </p:spPr>
         <p:txBody>
-          <a:bodyPr wrap="square" lIns="0" rIns="0" tIns="0" bIns="0" anchor="t">
+          <a:bodyPr wrap="square" lIns="0" tIns="0" rIns="0" bIns="0" anchor="t">
             <a:noAutofit/>
           </a:bodyPr>
           <a:lstStyle/>
@@ -7276,7 +7313,7 @@
           <a:noFill/>
         </p:spPr>
         <p:txBody>
-          <a:bodyPr wrap="square" lIns="0" rIns="0" tIns="0" bIns="0" anchor="t">
+          <a:bodyPr wrap="square" lIns="0" tIns="0" rIns="0" bIns="0" anchor="t">
             <a:noAutofit/>
           </a:bodyPr>
           <a:lstStyle/>
@@ -7323,7 +7360,7 @@
           <a:noFill/>
         </p:spPr>
         <p:txBody>
-          <a:bodyPr wrap="square" lIns="0" rIns="0" tIns="0" bIns="0" anchor="t">
+          <a:bodyPr wrap="square" lIns="0" tIns="0" rIns="0" bIns="0" anchor="t">
             <a:noAutofit/>
           </a:bodyPr>
           <a:lstStyle/>
@@ -7370,7 +7407,7 @@
           <a:noFill/>
         </p:spPr>
         <p:txBody>
-          <a:bodyPr wrap="square" lIns="0" rIns="0" tIns="0" bIns="0" anchor="t">
+          <a:bodyPr wrap="square" lIns="0" tIns="0" rIns="0" bIns="0" anchor="t">
             <a:noAutofit/>
           </a:bodyPr>
           <a:lstStyle/>
@@ -7417,7 +7454,7 @@
           <a:noFill/>
         </p:spPr>
         <p:txBody>
-          <a:bodyPr wrap="square" lIns="0" rIns="0" tIns="0" bIns="0" anchor="t">
+          <a:bodyPr wrap="square" lIns="0" tIns="0" rIns="0" bIns="0" anchor="t">
             <a:noAutofit/>
           </a:bodyPr>
           <a:lstStyle/>
@@ -7484,7 +7521,7 @@
           </a:fontRef>
         </p:style>
         <p:txBody>
-          <a:bodyPr rtlCol="0" anchor="ctr" wrap="square" tIns="0" bIns="0">
+          <a:bodyPr wrap="square" tIns="0" bIns="0" rtlCol="0" anchor="ctr">
             <a:noAutofit/>
           </a:bodyPr>
           <a:lstStyle/>
@@ -7523,7 +7560,7 @@
 </file>
 
 <file path=ppt/slides/slide13.xml><?xml version="1.0" encoding="utf-8"?>
-<p:sld xmlns:a="http://schemas.openxmlformats.org/drawingml/2006/main" xmlns:p="http://schemas.openxmlformats.org/presentationml/2006/main" xmlns:r="http://schemas.openxmlformats.org/officeDocument/2006/relationships">
+<p:sld xmlns:a="http://schemas.openxmlformats.org/drawingml/2006/main" xmlns:r="http://schemas.openxmlformats.org/officeDocument/2006/relationships" xmlns:p="http://schemas.openxmlformats.org/presentationml/2006/main">
   <p:cSld>
     <p:spTree>
       <p:nvGrpSpPr>
@@ -7531,7 +7568,14 @@
         <p:cNvGrpSpPr/>
         <p:nvPr/>
       </p:nvGrpSpPr>
-      <p:grpSpPr/>
+      <p:grpSpPr>
+        <a:xfrm>
+          <a:off x="0" y="0"/>
+          <a:ext cx="0" cy="0"/>
+          <a:chOff x="0" y="0"/>
+          <a:chExt cx="0" cy="0"/>
+        </a:xfrm>
+      </p:grpSpPr>
       <p:cxnSp>
         <p:nvCxnSpPr>
           <p:cNvPr id="2" name="Connector 1"/>
@@ -7604,12 +7648,13 @@
           </a:fontRef>
         </p:style>
         <p:txBody>
-          <a:bodyPr rtlCol="0" anchor="ctr" wrap="square">
+          <a:bodyPr wrap="square" rtlCol="0" anchor="ctr">
             <a:noAutofit/>
           </a:bodyPr>
           <a:lstStyle/>
           <a:p>
             <a:pPr algn="ctr"/>
+            <a:endParaRPr/>
           </a:p>
         </p:txBody>
       </p:sp>
@@ -7630,7 +7675,7 @@
           <a:noFill/>
         </p:spPr>
         <p:txBody>
-          <a:bodyPr wrap="square" lIns="0" rIns="0" tIns="0" bIns="0" anchor="t">
+          <a:bodyPr wrap="square" lIns="0" tIns="0" rIns="0" bIns="0" anchor="t">
             <a:noAutofit/>
           </a:bodyPr>
           <a:lstStyle/>
@@ -7688,7 +7733,7 @@
           <a:noFill/>
         </p:spPr>
         <p:txBody>
-          <a:bodyPr wrap="square" lIns="0" rIns="0" tIns="0" bIns="0" anchor="t">
+          <a:bodyPr wrap="square" lIns="0" tIns="0" rIns="0" bIns="0" anchor="t">
             <a:noAutofit/>
           </a:bodyPr>
           <a:lstStyle/>
@@ -7735,7 +7780,7 @@
           <a:noFill/>
         </p:spPr>
         <p:txBody>
-          <a:bodyPr wrap="square" lIns="0" rIns="0" tIns="0" bIns="0" anchor="t">
+          <a:bodyPr wrap="square" lIns="0" tIns="0" rIns="0" bIns="0" anchor="t">
             <a:noAutofit/>
           </a:bodyPr>
           <a:lstStyle/>
@@ -7782,7 +7827,7 @@
           <a:noFill/>
         </p:spPr>
         <p:txBody>
-          <a:bodyPr wrap="square" lIns="0" rIns="0" tIns="0" bIns="0" anchor="t">
+          <a:bodyPr wrap="square" lIns="0" tIns="0" rIns="0" bIns="0" anchor="t">
             <a:noAutofit/>
           </a:bodyPr>
           <a:lstStyle/>
@@ -7829,7 +7874,7 @@
           <a:noFill/>
         </p:spPr>
         <p:txBody>
-          <a:bodyPr wrap="square" lIns="0" rIns="0" tIns="0" bIns="0" anchor="t">
+          <a:bodyPr wrap="square" lIns="0" tIns="0" rIns="0" bIns="0" anchor="t">
             <a:noAutofit/>
           </a:bodyPr>
           <a:lstStyle/>
@@ -7876,7 +7921,7 @@
           <a:noFill/>
         </p:spPr>
         <p:txBody>
-          <a:bodyPr wrap="square" lIns="0" rIns="0" tIns="0" bIns="0" anchor="t">
+          <a:bodyPr wrap="square" lIns="0" tIns="0" rIns="0" bIns="0" anchor="t">
             <a:noAutofit/>
           </a:bodyPr>
           <a:lstStyle/>
@@ -7923,7 +7968,7 @@
           <a:noFill/>
         </p:spPr>
         <p:txBody>
-          <a:bodyPr wrap="square" lIns="0" rIns="0" tIns="0" bIns="0" anchor="t">
+          <a:bodyPr wrap="square" lIns="0" tIns="0" rIns="0" bIns="0" anchor="t">
             <a:noAutofit/>
           </a:bodyPr>
           <a:lstStyle/>
@@ -7970,7 +8015,7 @@
           <a:noFill/>
         </p:spPr>
         <p:txBody>
-          <a:bodyPr wrap="square" lIns="0" rIns="0" tIns="0" bIns="0" anchor="t">
+          <a:bodyPr wrap="square" lIns="0" tIns="0" rIns="0" bIns="0" anchor="t">
             <a:noAutofit/>
           </a:bodyPr>
           <a:lstStyle/>
@@ -8052,7 +8097,7 @@
           <a:noFill/>
         </p:spPr>
         <p:txBody>
-          <a:bodyPr wrap="square" lIns="0" rIns="0" tIns="0" bIns="0" anchor="t">
+          <a:bodyPr wrap="square" lIns="0" tIns="0" rIns="0" bIns="0" anchor="t">
             <a:noAutofit/>
           </a:bodyPr>
           <a:lstStyle/>
@@ -8099,7 +8144,7 @@
           <a:noFill/>
         </p:spPr>
         <p:txBody>
-          <a:bodyPr wrap="square" lIns="0" rIns="0" tIns="0" bIns="0" anchor="t">
+          <a:bodyPr wrap="square" lIns="0" tIns="0" rIns="0" bIns="0" anchor="t">
             <a:noAutofit/>
           </a:bodyPr>
           <a:lstStyle/>
@@ -8146,7 +8191,7 @@
           <a:noFill/>
         </p:spPr>
         <p:txBody>
-          <a:bodyPr wrap="square" lIns="0" rIns="0" tIns="0" bIns="0" anchor="t">
+          <a:bodyPr wrap="square" lIns="0" tIns="0" rIns="0" bIns="0" anchor="t">
             <a:noAutofit/>
           </a:bodyPr>
           <a:lstStyle/>
@@ -8228,7 +8273,7 @@
           <a:noFill/>
         </p:spPr>
         <p:txBody>
-          <a:bodyPr wrap="square" lIns="0" rIns="0" tIns="0" bIns="0" anchor="t">
+          <a:bodyPr wrap="square" lIns="0" tIns="0" rIns="0" bIns="0" anchor="t">
             <a:noAutofit/>
           </a:bodyPr>
           <a:lstStyle/>
@@ -8275,7 +8320,7 @@
           <a:noFill/>
         </p:spPr>
         <p:txBody>
-          <a:bodyPr wrap="square" lIns="0" rIns="0" tIns="0" bIns="0" anchor="t">
+          <a:bodyPr wrap="square" lIns="0" tIns="0" rIns="0" bIns="0" anchor="t">
             <a:noAutofit/>
           </a:bodyPr>
           <a:lstStyle/>
@@ -8322,7 +8367,7 @@
           <a:noFill/>
         </p:spPr>
         <p:txBody>
-          <a:bodyPr wrap="square" lIns="0" rIns="0" tIns="0" bIns="0" anchor="t">
+          <a:bodyPr wrap="square" lIns="0" tIns="0" rIns="0" bIns="0" anchor="t">
             <a:noAutofit/>
           </a:bodyPr>
           <a:lstStyle/>
@@ -8404,7 +8449,7 @@
           <a:noFill/>
         </p:spPr>
         <p:txBody>
-          <a:bodyPr wrap="square" lIns="0" rIns="0" tIns="0" bIns="0" anchor="t">
+          <a:bodyPr wrap="square" lIns="0" tIns="0" rIns="0" bIns="0" anchor="t">
             <a:noAutofit/>
           </a:bodyPr>
           <a:lstStyle/>
@@ -8451,7 +8496,7 @@
           <a:noFill/>
         </p:spPr>
         <p:txBody>
-          <a:bodyPr wrap="square" lIns="0" rIns="0" tIns="0" bIns="0" anchor="t">
+          <a:bodyPr wrap="square" lIns="0" tIns="0" rIns="0" bIns="0" anchor="t">
             <a:noAutofit/>
           </a:bodyPr>
           <a:lstStyle/>
@@ -8498,7 +8543,7 @@
           <a:noFill/>
         </p:spPr>
         <p:txBody>
-          <a:bodyPr wrap="square" lIns="0" rIns="0" tIns="0" bIns="0" anchor="t">
+          <a:bodyPr wrap="square" lIns="0" tIns="0" rIns="0" bIns="0" anchor="t">
             <a:noAutofit/>
           </a:bodyPr>
           <a:lstStyle/>
@@ -8615,7 +8660,7 @@
           <a:noFill/>
         </p:spPr>
         <p:txBody>
-          <a:bodyPr wrap="square" lIns="0" rIns="0" tIns="0" bIns="0" anchor="t">
+          <a:bodyPr wrap="square" lIns="0" tIns="0" rIns="0" bIns="0" anchor="t">
             <a:noAutofit/>
           </a:bodyPr>
           <a:lstStyle/>
@@ -8665,7 +8710,7 @@
 </file>
 
 <file path=ppt/slides/slide14.xml><?xml version="1.0" encoding="utf-8"?>
-<p:sld xmlns:a="http://schemas.openxmlformats.org/drawingml/2006/main" xmlns:p="http://schemas.openxmlformats.org/presentationml/2006/main" xmlns:r="http://schemas.openxmlformats.org/officeDocument/2006/relationships">
+<p:sld xmlns:a="http://schemas.openxmlformats.org/drawingml/2006/main" xmlns:r="http://schemas.openxmlformats.org/officeDocument/2006/relationships" xmlns:p="http://schemas.openxmlformats.org/presentationml/2006/main">
   <p:cSld>
     <p:spTree>
       <p:nvGrpSpPr>
@@ -8673,7 +8718,14 @@
         <p:cNvGrpSpPr/>
         <p:nvPr/>
       </p:nvGrpSpPr>
-      <p:grpSpPr/>
+      <p:grpSpPr>
+        <a:xfrm>
+          <a:off x="0" y="0"/>
+          <a:ext cx="0" cy="0"/>
+          <a:chOff x="0" y="0"/>
+          <a:chExt cx="0" cy="0"/>
+        </a:xfrm>
+      </p:grpSpPr>
       <p:cxnSp>
         <p:nvCxnSpPr>
           <p:cNvPr id="2" name="Connector 1"/>
@@ -8746,12 +8798,13 @@
           </a:fontRef>
         </p:style>
         <p:txBody>
-          <a:bodyPr rtlCol="0" anchor="ctr" wrap="square">
+          <a:bodyPr wrap="square" rtlCol="0" anchor="ctr">
             <a:noAutofit/>
           </a:bodyPr>
           <a:lstStyle/>
           <a:p>
             <a:pPr algn="ctr"/>
+            <a:endParaRPr/>
           </a:p>
         </p:txBody>
       </p:sp>
@@ -8772,7 +8825,7 @@
           <a:noFill/>
         </p:spPr>
         <p:txBody>
-          <a:bodyPr wrap="square" lIns="0" rIns="0" tIns="0" bIns="0" anchor="t">
+          <a:bodyPr wrap="square" lIns="0" tIns="0" rIns="0" bIns="0" anchor="t">
             <a:noAutofit/>
           </a:bodyPr>
           <a:lstStyle/>
@@ -8830,7 +8883,7 @@
           <a:noFill/>
         </p:spPr>
         <p:txBody>
-          <a:bodyPr wrap="square" lIns="0" rIns="0" tIns="0" bIns="0" anchor="t">
+          <a:bodyPr wrap="square" lIns="0" tIns="0" rIns="0" bIns="0" anchor="t">
             <a:noAutofit/>
           </a:bodyPr>
           <a:lstStyle/>
@@ -8877,7 +8930,7 @@
           <a:noFill/>
         </p:spPr>
         <p:txBody>
-          <a:bodyPr wrap="square" lIns="0" rIns="0" tIns="0" bIns="0" anchor="t">
+          <a:bodyPr wrap="square" lIns="0" tIns="0" rIns="0" bIns="0" anchor="t">
             <a:noAutofit/>
           </a:bodyPr>
           <a:lstStyle/>
@@ -8924,7 +8977,7 @@
           <a:noFill/>
         </p:spPr>
         <p:txBody>
-          <a:bodyPr wrap="square" lIns="0" rIns="0" tIns="0" bIns="0" anchor="t">
+          <a:bodyPr wrap="square" lIns="0" tIns="0" rIns="0" bIns="0" anchor="t">
             <a:noAutofit/>
           </a:bodyPr>
           <a:lstStyle/>
@@ -8971,7 +9024,7 @@
           <a:noFill/>
         </p:spPr>
         <p:txBody>
-          <a:bodyPr wrap="square" lIns="0" rIns="0" tIns="0" bIns="0" anchor="t">
+          <a:bodyPr wrap="square" lIns="0" tIns="0" rIns="0" bIns="0" anchor="t">
             <a:noAutofit/>
           </a:bodyPr>
           <a:lstStyle/>
@@ -9038,7 +9091,7 @@
           </a:fontRef>
         </p:style>
         <p:txBody>
-          <a:bodyPr rtlCol="0" anchor="ctr" wrap="square" lIns="64008" rIns="64008" tIns="0" bIns="0">
+          <a:bodyPr wrap="square" lIns="64008" tIns="0" rIns="64008" bIns="0" rtlCol="0" anchor="ctr">
             <a:noAutofit/>
           </a:bodyPr>
           <a:lstStyle/>
@@ -9085,7 +9138,7 @@
           <a:noFill/>
         </p:spPr>
         <p:txBody>
-          <a:bodyPr wrap="square" lIns="0" rIns="0" tIns="0" bIns="0" anchor="ctr">
+          <a:bodyPr wrap="square" lIns="0" tIns="0" rIns="0" bIns="0" anchor="ctr">
             <a:noAutofit/>
           </a:bodyPr>
           <a:lstStyle/>
@@ -9187,7 +9240,7 @@
           </a:fontRef>
         </p:style>
         <p:txBody>
-          <a:bodyPr rtlCol="0" anchor="ctr" wrap="square" lIns="64008" rIns="64008" tIns="0" bIns="0">
+          <a:bodyPr wrap="square" lIns="64008" tIns="0" rIns="64008" bIns="0" rtlCol="0" anchor="ctr">
             <a:noAutofit/>
           </a:bodyPr>
           <a:lstStyle/>
@@ -9234,7 +9287,7 @@
           <a:noFill/>
         </p:spPr>
         <p:txBody>
-          <a:bodyPr wrap="square" lIns="0" rIns="0" tIns="0" bIns="0" anchor="ctr">
+          <a:bodyPr wrap="square" lIns="0" tIns="0" rIns="0" bIns="0" anchor="ctr">
             <a:noAutofit/>
           </a:bodyPr>
           <a:lstStyle/>
@@ -9336,7 +9389,7 @@
           </a:fontRef>
         </p:style>
         <p:txBody>
-          <a:bodyPr rtlCol="0" anchor="ctr" wrap="square" lIns="64008" rIns="64008" tIns="0" bIns="0">
+          <a:bodyPr wrap="square" lIns="64008" tIns="0" rIns="64008" bIns="0" rtlCol="0" anchor="ctr">
             <a:noAutofit/>
           </a:bodyPr>
           <a:lstStyle/>
@@ -9383,7 +9436,7 @@
           <a:noFill/>
         </p:spPr>
         <p:txBody>
-          <a:bodyPr wrap="square" lIns="0" rIns="0" tIns="0" bIns="0" anchor="ctr">
+          <a:bodyPr wrap="square" lIns="0" tIns="0" rIns="0" bIns="0" anchor="ctr">
             <a:noAutofit/>
           </a:bodyPr>
           <a:lstStyle/>
@@ -9485,7 +9538,7 @@
           </a:fontRef>
         </p:style>
         <p:txBody>
-          <a:bodyPr rtlCol="0" anchor="ctr" wrap="square" lIns="64008" rIns="64008" tIns="0" bIns="0">
+          <a:bodyPr wrap="square" lIns="64008" tIns="0" rIns="64008" bIns="0" rtlCol="0" anchor="ctr">
             <a:noAutofit/>
           </a:bodyPr>
           <a:lstStyle/>
@@ -9532,7 +9585,7 @@
           <a:noFill/>
         </p:spPr>
         <p:txBody>
-          <a:bodyPr wrap="square" lIns="0" rIns="0" tIns="0" bIns="0" anchor="ctr">
+          <a:bodyPr wrap="square" lIns="0" tIns="0" rIns="0" bIns="0" anchor="ctr">
             <a:noAutofit/>
           </a:bodyPr>
           <a:lstStyle/>
@@ -9634,7 +9687,7 @@
           </a:fontRef>
         </p:style>
         <p:txBody>
-          <a:bodyPr rtlCol="0" anchor="ctr" wrap="square" lIns="64008" rIns="64008" tIns="0" bIns="0">
+          <a:bodyPr wrap="square" lIns="64008" tIns="0" rIns="64008" bIns="0" rtlCol="0" anchor="ctr">
             <a:noAutofit/>
           </a:bodyPr>
           <a:lstStyle/>
@@ -9681,7 +9734,7 @@
           <a:noFill/>
         </p:spPr>
         <p:txBody>
-          <a:bodyPr wrap="square" lIns="0" rIns="0" tIns="0" bIns="0" anchor="ctr">
+          <a:bodyPr wrap="square" lIns="0" tIns="0" rIns="0" bIns="0" anchor="ctr">
             <a:noAutofit/>
           </a:bodyPr>
           <a:lstStyle/>
@@ -9785,12 +9838,13 @@
           </a:fontRef>
         </p:style>
         <p:txBody>
-          <a:bodyPr rtlCol="0" anchor="ctr" wrap="square">
+          <a:bodyPr wrap="square" rtlCol="0" anchor="ctr">
             <a:noAutofit/>
           </a:bodyPr>
           <a:lstStyle/>
           <a:p>
             <a:pPr algn="ctr"/>
+            <a:endParaRPr/>
           </a:p>
         </p:txBody>
       </p:sp>
@@ -9811,7 +9865,7 @@
           <a:noFill/>
         </p:spPr>
         <p:txBody>
-          <a:bodyPr wrap="square" lIns="0" rIns="0" tIns="0" bIns="0" anchor="t">
+          <a:bodyPr wrap="square" lIns="0" tIns="0" rIns="0" bIns="0" anchor="t">
             <a:noAutofit/>
           </a:bodyPr>
           <a:lstStyle/>
@@ -9880,12 +9934,13 @@
           </a:fontRef>
         </p:style>
         <p:txBody>
-          <a:bodyPr rtlCol="0" anchor="ctr" wrap="square">
+          <a:bodyPr wrap="square" rtlCol="0" anchor="ctr">
             <a:noAutofit/>
           </a:bodyPr>
           <a:lstStyle/>
           <a:p>
             <a:pPr algn="ctr"/>
+            <a:endParaRPr/>
           </a:p>
         </p:txBody>
       </p:sp>
@@ -9926,12 +9981,13 @@
           </a:fontRef>
         </p:style>
         <p:txBody>
-          <a:bodyPr rtlCol="0" anchor="ctr" wrap="square">
+          <a:bodyPr wrap="square" rtlCol="0" anchor="ctr">
             <a:noAutofit/>
           </a:bodyPr>
           <a:lstStyle/>
           <a:p>
             <a:pPr algn="ctr"/>
+            <a:endParaRPr/>
           </a:p>
         </p:txBody>
       </p:sp>
@@ -9952,7 +10008,7 @@
           <a:noFill/>
         </p:spPr>
         <p:txBody>
-          <a:bodyPr wrap="square" lIns="0" rIns="0" tIns="0" bIns="0" anchor="t">
+          <a:bodyPr wrap="square" lIns="0" tIns="0" rIns="0" bIns="0" anchor="t">
             <a:noAutofit/>
           </a:bodyPr>
           <a:lstStyle/>
@@ -9999,7 +10055,7 @@
           <a:noFill/>
         </p:spPr>
         <p:txBody>
-          <a:bodyPr wrap="square" lIns="0" rIns="0" tIns="0" bIns="0" anchor="t">
+          <a:bodyPr wrap="square" lIns="0" tIns="0" rIns="0" bIns="0" anchor="t">
             <a:noAutofit/>
           </a:bodyPr>
           <a:lstStyle/>
@@ -10104,12 +10160,13 @@
           </a:fontRef>
         </p:style>
         <p:txBody>
-          <a:bodyPr rtlCol="0" anchor="ctr" wrap="square">
+          <a:bodyPr wrap="square" rtlCol="0" anchor="ctr">
             <a:noAutofit/>
           </a:bodyPr>
           <a:lstStyle/>
           <a:p>
             <a:pPr algn="ctr"/>
+            <a:endParaRPr/>
           </a:p>
         </p:txBody>
       </p:sp>
@@ -10150,12 +10207,13 @@
           </a:fontRef>
         </p:style>
         <p:txBody>
-          <a:bodyPr rtlCol="0" anchor="ctr" wrap="square">
+          <a:bodyPr wrap="square" rtlCol="0" anchor="ctr">
             <a:noAutofit/>
           </a:bodyPr>
           <a:lstStyle/>
           <a:p>
             <a:pPr algn="ctr"/>
+            <a:endParaRPr/>
           </a:p>
         </p:txBody>
       </p:sp>
@@ -10176,7 +10234,7 @@
           <a:noFill/>
         </p:spPr>
         <p:txBody>
-          <a:bodyPr wrap="square" lIns="0" rIns="0" tIns="0" bIns="0" anchor="t">
+          <a:bodyPr wrap="square" lIns="0" tIns="0" rIns="0" bIns="0" anchor="t">
             <a:noAutofit/>
           </a:bodyPr>
           <a:lstStyle/>
@@ -10223,7 +10281,7 @@
           <a:noFill/>
         </p:spPr>
         <p:txBody>
-          <a:bodyPr wrap="square" lIns="0" rIns="0" tIns="0" bIns="0" anchor="t">
+          <a:bodyPr wrap="square" lIns="0" tIns="0" rIns="0" bIns="0" anchor="t">
             <a:noAutofit/>
           </a:bodyPr>
           <a:lstStyle/>
@@ -10328,12 +10386,13 @@
           </a:fontRef>
         </p:style>
         <p:txBody>
-          <a:bodyPr rtlCol="0" anchor="ctr" wrap="square">
+          <a:bodyPr wrap="square" rtlCol="0" anchor="ctr">
             <a:noAutofit/>
           </a:bodyPr>
           <a:lstStyle/>
           <a:p>
             <a:pPr algn="ctr"/>
+            <a:endParaRPr/>
           </a:p>
         </p:txBody>
       </p:sp>
@@ -10374,12 +10433,13 @@
           </a:fontRef>
         </p:style>
         <p:txBody>
-          <a:bodyPr rtlCol="0" anchor="ctr" wrap="square">
+          <a:bodyPr wrap="square" rtlCol="0" anchor="ctr">
             <a:noAutofit/>
           </a:bodyPr>
           <a:lstStyle/>
           <a:p>
             <a:pPr algn="ctr"/>
+            <a:endParaRPr/>
           </a:p>
         </p:txBody>
       </p:sp>
@@ -10400,7 +10460,7 @@
           <a:noFill/>
         </p:spPr>
         <p:txBody>
-          <a:bodyPr wrap="square" lIns="0" rIns="0" tIns="0" bIns="0" anchor="t">
+          <a:bodyPr wrap="square" lIns="0" tIns="0" rIns="0" bIns="0" anchor="t">
             <a:noAutofit/>
           </a:bodyPr>
           <a:lstStyle/>
@@ -10447,7 +10507,7 @@
           <a:noFill/>
         </p:spPr>
         <p:txBody>
-          <a:bodyPr wrap="square" lIns="0" rIns="0" tIns="0" bIns="0" anchor="t">
+          <a:bodyPr wrap="square" lIns="0" tIns="0" rIns="0" bIns="0" anchor="t">
             <a:noAutofit/>
           </a:bodyPr>
           <a:lstStyle/>
@@ -10494,7 +10554,7 @@
           <a:noFill/>
         </p:spPr>
         <p:txBody>
-          <a:bodyPr wrap="square" lIns="0" rIns="0" tIns="0" bIns="0" anchor="t">
+          <a:bodyPr wrap="square" lIns="0" tIns="0" rIns="0" bIns="0" anchor="t">
             <a:noAutofit/>
           </a:bodyPr>
           <a:lstStyle/>
@@ -10541,7 +10601,7 @@
           <a:noFill/>
         </p:spPr>
         <p:txBody>
-          <a:bodyPr wrap="square" lIns="0" rIns="0" tIns="0" bIns="0" anchor="t">
+          <a:bodyPr wrap="square" lIns="0" tIns="0" rIns="0" bIns="0" anchor="t">
             <a:noAutofit/>
           </a:bodyPr>
           <a:lstStyle/>
@@ -10591,7 +10651,7 @@
 </file>
 
 <file path=ppt/slides/slide15.xml><?xml version="1.0" encoding="utf-8"?>
-<p:sld xmlns:a="http://schemas.openxmlformats.org/drawingml/2006/main" xmlns:p="http://schemas.openxmlformats.org/presentationml/2006/main" xmlns:r="http://schemas.openxmlformats.org/officeDocument/2006/relationships">
+<p:sld xmlns:a="http://schemas.openxmlformats.org/drawingml/2006/main" xmlns:r="http://schemas.openxmlformats.org/officeDocument/2006/relationships" xmlns:p="http://schemas.openxmlformats.org/presentationml/2006/main">
   <p:cSld>
     <p:spTree>
       <p:nvGrpSpPr>
@@ -10599,7 +10659,14 @@
         <p:cNvGrpSpPr/>
         <p:nvPr/>
       </p:nvGrpSpPr>
-      <p:grpSpPr/>
+      <p:grpSpPr>
+        <a:xfrm>
+          <a:off x="0" y="0"/>
+          <a:ext cx="0" cy="0"/>
+          <a:chOff x="0" y="0"/>
+          <a:chExt cx="0" cy="0"/>
+        </a:xfrm>
+      </p:grpSpPr>
       <p:cxnSp>
         <p:nvCxnSpPr>
           <p:cNvPr id="2" name="Connector 1"/>
@@ -10672,12 +10739,13 @@
           </a:fontRef>
         </p:style>
         <p:txBody>
-          <a:bodyPr rtlCol="0" anchor="ctr" wrap="square">
+          <a:bodyPr wrap="square" rtlCol="0" anchor="ctr">
             <a:noAutofit/>
           </a:bodyPr>
           <a:lstStyle/>
           <a:p>
             <a:pPr algn="ctr"/>
+            <a:endParaRPr/>
           </a:p>
         </p:txBody>
       </p:sp>
@@ -10698,7 +10766,7 @@
           <a:noFill/>
         </p:spPr>
         <p:txBody>
-          <a:bodyPr wrap="square" lIns="0" rIns="0" tIns="0" bIns="0" anchor="t">
+          <a:bodyPr wrap="square" lIns="0" tIns="0" rIns="0" bIns="0" anchor="t">
             <a:noAutofit/>
           </a:bodyPr>
           <a:lstStyle/>
@@ -10756,7 +10824,7 @@
           <a:noFill/>
         </p:spPr>
         <p:txBody>
-          <a:bodyPr wrap="square" lIns="0" rIns="0" tIns="0" bIns="0" anchor="t">
+          <a:bodyPr wrap="square" lIns="0" tIns="0" rIns="0" bIns="0" anchor="t">
             <a:noAutofit/>
           </a:bodyPr>
           <a:lstStyle/>
@@ -10803,7 +10871,7 @@
           <a:noFill/>
         </p:spPr>
         <p:txBody>
-          <a:bodyPr wrap="square" lIns="0" rIns="0" tIns="0" bIns="0" anchor="t">
+          <a:bodyPr wrap="square" lIns="0" tIns="0" rIns="0" bIns="0" anchor="t">
             <a:noAutofit/>
           </a:bodyPr>
           <a:lstStyle/>
@@ -10850,7 +10918,7 @@
           <a:noFill/>
         </p:spPr>
         <p:txBody>
-          <a:bodyPr wrap="square" lIns="0" rIns="0" tIns="0" bIns="0" anchor="t">
+          <a:bodyPr wrap="square" lIns="0" tIns="0" rIns="0" bIns="0" anchor="t">
             <a:noAutofit/>
           </a:bodyPr>
           <a:lstStyle/>
@@ -10897,7 +10965,7 @@
           <a:noFill/>
         </p:spPr>
         <p:txBody>
-          <a:bodyPr wrap="square" lIns="0" rIns="0" tIns="0" bIns="0" anchor="t">
+          <a:bodyPr wrap="square" lIns="0" tIns="0" rIns="0" bIns="0" anchor="t">
             <a:noAutofit/>
           </a:bodyPr>
           <a:lstStyle/>
@@ -10966,12 +11034,13 @@
           </a:fontRef>
         </p:style>
         <p:txBody>
-          <a:bodyPr rtlCol="0" anchor="ctr" wrap="square">
+          <a:bodyPr wrap="square" rtlCol="0" anchor="ctr">
             <a:noAutofit/>
           </a:bodyPr>
           <a:lstStyle/>
           <a:p>
             <a:pPr algn="ctr"/>
+            <a:endParaRPr/>
           </a:p>
         </p:txBody>
       </p:sp>
@@ -11012,12 +11081,13 @@
           </a:fontRef>
         </p:style>
         <p:txBody>
-          <a:bodyPr rtlCol="0" anchor="ctr" wrap="square">
+          <a:bodyPr wrap="square" rtlCol="0" anchor="ctr">
             <a:noAutofit/>
           </a:bodyPr>
           <a:lstStyle/>
           <a:p>
             <a:pPr algn="ctr"/>
+            <a:endParaRPr/>
           </a:p>
         </p:txBody>
       </p:sp>
@@ -11038,7 +11108,7 @@
           <a:noFill/>
         </p:spPr>
         <p:txBody>
-          <a:bodyPr wrap="square" lIns="0" rIns="0" tIns="0" bIns="0" anchor="t">
+          <a:bodyPr wrap="square" lIns="0" tIns="0" rIns="0" bIns="0" anchor="t">
             <a:noAutofit/>
           </a:bodyPr>
           <a:lstStyle/>
@@ -11086,7 +11156,7 @@
             <a:cxnLst/>
             <a:rect l="0" t="0" r="r" b="b"/>
             <a:pathLst>
-              <a:path w="21600" h="21600" fill="none" stroke="1">
+              <a:path w="21600" h="21600" fill="none">
                 <a:moveTo>
                   <a:pt x="10800" y="3060"/>
                 </a:moveTo>
@@ -11151,6 +11221,7 @@
           <a:lstStyle/>
           <a:p>
             <a:pPr algn="ctr"/>
+            <a:endParaRPr/>
           </a:p>
         </p:txBody>
       </p:sp>
@@ -11171,7 +11242,7 @@
           <a:noFill/>
         </p:spPr>
         <p:txBody>
-          <a:bodyPr wrap="square" lIns="0" rIns="0" tIns="0" bIns="0" anchor="t">
+          <a:bodyPr wrap="square" lIns="0" tIns="0" rIns="0" bIns="0" anchor="t">
             <a:noAutofit/>
           </a:bodyPr>
           <a:lstStyle/>
@@ -11218,7 +11289,7 @@
           <a:noFill/>
         </p:spPr>
         <p:txBody>
-          <a:bodyPr wrap="square" lIns="0" rIns="0" tIns="0" bIns="0" anchor="t">
+          <a:bodyPr wrap="square" lIns="0" tIns="0" rIns="0" bIns="0" anchor="t">
             <a:noAutofit/>
           </a:bodyPr>
           <a:lstStyle/>
@@ -11302,7 +11373,7 @@
             <a:cxnLst/>
             <a:rect l="0" t="0" r="r" b="b"/>
             <a:pathLst>
-              <a:path w="21600" h="21600" fill="none" stroke="1">
+              <a:path w="21600" h="21600" fill="none">
                 <a:moveTo>
                   <a:pt x="4860" y="2520"/>
                 </a:moveTo>
@@ -11356,6 +11427,7 @@
           <a:lstStyle/>
           <a:p>
             <a:pPr algn="ctr"/>
+            <a:endParaRPr/>
           </a:p>
         </p:txBody>
       </p:sp>
@@ -11376,7 +11448,7 @@
           <a:noFill/>
         </p:spPr>
         <p:txBody>
-          <a:bodyPr wrap="square" lIns="0" rIns="0" tIns="0" bIns="0" anchor="t">
+          <a:bodyPr wrap="square" lIns="0" tIns="0" rIns="0" bIns="0" anchor="t">
             <a:noAutofit/>
           </a:bodyPr>
           <a:lstStyle/>
@@ -11423,7 +11495,7 @@
           <a:noFill/>
         </p:spPr>
         <p:txBody>
-          <a:bodyPr wrap="square" lIns="0" rIns="0" tIns="0" bIns="0" anchor="t">
+          <a:bodyPr wrap="square" lIns="0" tIns="0" rIns="0" bIns="0" anchor="t">
             <a:noAutofit/>
           </a:bodyPr>
           <a:lstStyle/>
@@ -11507,7 +11579,7 @@
             <a:cxnLst/>
             <a:rect l="0" t="0" r="r" b="b"/>
             <a:pathLst>
-              <a:path w="21600" h="21600" fill="none" stroke="1">
+              <a:path w="21600" h="21600" fill="none">
                 <a:moveTo>
                   <a:pt x="4140" y="3960"/>
                 </a:moveTo>
@@ -11590,6 +11662,7 @@
           <a:lstStyle/>
           <a:p>
             <a:pPr algn="ctr"/>
+            <a:endParaRPr/>
           </a:p>
         </p:txBody>
       </p:sp>
@@ -11610,7 +11683,7 @@
           <a:noFill/>
         </p:spPr>
         <p:txBody>
-          <a:bodyPr wrap="square" lIns="0" rIns="0" tIns="0" bIns="0" anchor="t">
+          <a:bodyPr wrap="square" lIns="0" tIns="0" rIns="0" bIns="0" anchor="t">
             <a:noAutofit/>
           </a:bodyPr>
           <a:lstStyle/>
@@ -11657,7 +11730,7 @@
           <a:noFill/>
         </p:spPr>
         <p:txBody>
-          <a:bodyPr wrap="square" lIns="0" rIns="0" tIns="0" bIns="0" anchor="t">
+          <a:bodyPr wrap="square" lIns="0" tIns="0" rIns="0" bIns="0" anchor="t">
             <a:noAutofit/>
           </a:bodyPr>
           <a:lstStyle/>
@@ -11762,12 +11835,13 @@
           </a:fontRef>
         </p:style>
         <p:txBody>
-          <a:bodyPr rtlCol="0" anchor="ctr" wrap="square">
+          <a:bodyPr wrap="square" rtlCol="0" anchor="ctr">
             <a:noAutofit/>
           </a:bodyPr>
           <a:lstStyle/>
           <a:p>
             <a:pPr algn="ctr"/>
+            <a:endParaRPr/>
           </a:p>
         </p:txBody>
       </p:sp>
@@ -11808,12 +11882,13 @@
           </a:fontRef>
         </p:style>
         <p:txBody>
-          <a:bodyPr rtlCol="0" anchor="ctr" wrap="square">
+          <a:bodyPr wrap="square" rtlCol="0" anchor="ctr">
             <a:noAutofit/>
           </a:bodyPr>
           <a:lstStyle/>
           <a:p>
             <a:pPr algn="ctr"/>
+            <a:endParaRPr/>
           </a:p>
         </p:txBody>
       </p:sp>
@@ -11835,7 +11910,7 @@
             <a:cxnLst/>
             <a:rect l="0" t="0" r="r" b="b"/>
             <a:pathLst>
-              <a:path w="21600" h="21600" fill="none" stroke="1">
+              <a:path w="21600" h="21600" fill="none">
                 <a:moveTo>
                   <a:pt x="7200" y="5760"/>
                 </a:moveTo>
@@ -11987,6 +12062,7 @@
           <a:lstStyle/>
           <a:p>
             <a:pPr algn="ctr"/>
+            <a:endParaRPr/>
           </a:p>
         </p:txBody>
       </p:sp>
@@ -12007,7 +12083,7 @@
           <a:noFill/>
         </p:spPr>
         <p:txBody>
-          <a:bodyPr wrap="square" lIns="0" rIns="0" tIns="0" bIns="0" anchor="t">
+          <a:bodyPr wrap="square" lIns="0" tIns="0" rIns="0" bIns="0" anchor="t">
             <a:noAutofit/>
           </a:bodyPr>
           <a:lstStyle/>
@@ -12054,7 +12130,7 @@
           <a:noFill/>
         </p:spPr>
         <p:txBody>
-          <a:bodyPr wrap="square" lIns="0" rIns="0" tIns="0" bIns="0" anchor="t">
+          <a:bodyPr wrap="square" lIns="0" tIns="0" rIns="0" bIns="0" anchor="t">
             <a:noAutofit/>
           </a:bodyPr>
           <a:lstStyle/>
@@ -12121,12 +12197,13 @@
           </a:fontRef>
         </p:style>
         <p:txBody>
-          <a:bodyPr rtlCol="0" anchor="ctr" wrap="square">
+          <a:bodyPr wrap="square" rtlCol="0" anchor="ctr">
             <a:noAutofit/>
           </a:bodyPr>
           <a:lstStyle/>
           <a:p>
             <a:pPr algn="ctr"/>
+            <a:endParaRPr/>
           </a:p>
         </p:txBody>
       </p:sp>
@@ -12147,7 +12224,7 @@
           <a:noFill/>
         </p:spPr>
         <p:txBody>
-          <a:bodyPr wrap="square" lIns="0" rIns="0" tIns="0" bIns="0" anchor="t">
+          <a:bodyPr wrap="square" lIns="0" tIns="0" rIns="0" bIns="0" anchor="t">
             <a:noAutofit/>
           </a:bodyPr>
           <a:lstStyle/>
@@ -12214,12 +12291,13 @@
           </a:fontRef>
         </p:style>
         <p:txBody>
-          <a:bodyPr rtlCol="0" anchor="ctr" wrap="square">
+          <a:bodyPr wrap="square" rtlCol="0" anchor="ctr">
             <a:noAutofit/>
           </a:bodyPr>
           <a:lstStyle/>
           <a:p>
             <a:pPr algn="ctr"/>
+            <a:endParaRPr/>
           </a:p>
         </p:txBody>
       </p:sp>
@@ -12240,7 +12318,7 @@
           <a:noFill/>
         </p:spPr>
         <p:txBody>
-          <a:bodyPr wrap="square" lIns="0" rIns="0" tIns="0" bIns="0" anchor="t">
+          <a:bodyPr wrap="square" lIns="0" tIns="0" rIns="0" bIns="0" anchor="t">
             <a:noAutofit/>
           </a:bodyPr>
           <a:lstStyle/>
@@ -12307,12 +12385,13 @@
           </a:fontRef>
         </p:style>
         <p:txBody>
-          <a:bodyPr rtlCol="0" anchor="ctr" wrap="square">
+          <a:bodyPr wrap="square" rtlCol="0" anchor="ctr">
             <a:noAutofit/>
           </a:bodyPr>
           <a:lstStyle/>
           <a:p>
             <a:pPr algn="ctr"/>
+            <a:endParaRPr/>
           </a:p>
         </p:txBody>
       </p:sp>
@@ -12333,7 +12412,7 @@
           <a:noFill/>
         </p:spPr>
         <p:txBody>
-          <a:bodyPr wrap="square" lIns="0" rIns="0" tIns="0" bIns="0" anchor="t">
+          <a:bodyPr wrap="square" lIns="0" tIns="0" rIns="0" bIns="0" anchor="t">
             <a:noAutofit/>
           </a:bodyPr>
           <a:lstStyle/>
@@ -12402,12 +12481,13 @@
           </a:fontRef>
         </p:style>
         <p:txBody>
-          <a:bodyPr rtlCol="0" anchor="ctr" wrap="square">
+          <a:bodyPr wrap="square" rtlCol="0" anchor="ctr">
             <a:noAutofit/>
           </a:bodyPr>
           <a:lstStyle/>
           <a:p>
             <a:pPr algn="ctr"/>
+            <a:endParaRPr/>
           </a:p>
         </p:txBody>
       </p:sp>
@@ -12448,12 +12528,13 @@
           </a:fontRef>
         </p:style>
         <p:txBody>
-          <a:bodyPr rtlCol="0" anchor="ctr" wrap="square">
+          <a:bodyPr wrap="square" rtlCol="0" anchor="ctr">
             <a:noAutofit/>
           </a:bodyPr>
           <a:lstStyle/>
           <a:p>
             <a:pPr algn="ctr"/>
+            <a:endParaRPr/>
           </a:p>
         </p:txBody>
       </p:sp>
@@ -12475,7 +12556,7 @@
             <a:cxnLst/>
             <a:rect l="0" t="0" r="r" b="b"/>
             <a:pathLst>
-              <a:path w="21600" h="21600" fill="none" stroke="1">
+              <a:path w="21600" h="21600" fill="none">
                 <a:moveTo>
                   <a:pt x="4140" y="8640"/>
                 </a:moveTo>
@@ -12591,6 +12672,7 @@
           <a:lstStyle/>
           <a:p>
             <a:pPr algn="ctr"/>
+            <a:endParaRPr/>
           </a:p>
         </p:txBody>
       </p:sp>
@@ -12611,7 +12693,7 @@
           <a:noFill/>
         </p:spPr>
         <p:txBody>
-          <a:bodyPr wrap="square" lIns="0" rIns="0" tIns="0" bIns="0" anchor="t">
+          <a:bodyPr wrap="square" lIns="0" tIns="0" rIns="0" bIns="0" anchor="t">
             <a:noAutofit/>
           </a:bodyPr>
           <a:lstStyle/>
@@ -12658,7 +12740,7 @@
           <a:noFill/>
         </p:spPr>
         <p:txBody>
-          <a:bodyPr wrap="square" lIns="0" rIns="0" tIns="0" bIns="0" anchor="t">
+          <a:bodyPr wrap="square" lIns="0" tIns="0" rIns="0" bIns="0" anchor="t">
             <a:noAutofit/>
           </a:bodyPr>
           <a:lstStyle/>
@@ -12725,12 +12807,13 @@
           </a:fontRef>
         </p:style>
         <p:txBody>
-          <a:bodyPr rtlCol="0" anchor="ctr" wrap="square">
+          <a:bodyPr wrap="square" rtlCol="0" anchor="ctr">
             <a:noAutofit/>
           </a:bodyPr>
           <a:lstStyle/>
           <a:p>
             <a:pPr algn="ctr"/>
+            <a:endParaRPr/>
           </a:p>
         </p:txBody>
       </p:sp>
@@ -12751,7 +12834,7 @@
           <a:noFill/>
         </p:spPr>
         <p:txBody>
-          <a:bodyPr wrap="square" lIns="0" rIns="0" tIns="0" bIns="0" anchor="t">
+          <a:bodyPr wrap="square" lIns="0" tIns="0" rIns="0" bIns="0" anchor="t">
             <a:noAutofit/>
           </a:bodyPr>
           <a:lstStyle/>
@@ -12798,7 +12881,7 @@
           <a:noFill/>
         </p:spPr>
         <p:txBody>
-          <a:bodyPr wrap="square" lIns="0" rIns="0" tIns="0" bIns="0" anchor="t">
+          <a:bodyPr wrap="square" lIns="0" tIns="0" rIns="0" bIns="0" anchor="t">
             <a:noAutofit/>
           </a:bodyPr>
           <a:lstStyle/>
@@ -12900,12 +12983,13 @@
           </a:fontRef>
         </p:style>
         <p:txBody>
-          <a:bodyPr rtlCol="0" anchor="ctr" wrap="square">
+          <a:bodyPr wrap="square" rtlCol="0" anchor="ctr">
             <a:noAutofit/>
           </a:bodyPr>
           <a:lstStyle/>
           <a:p>
             <a:pPr algn="ctr"/>
+            <a:endParaRPr/>
           </a:p>
         </p:txBody>
       </p:sp>
@@ -12926,7 +13010,7 @@
           <a:noFill/>
         </p:spPr>
         <p:txBody>
-          <a:bodyPr wrap="square" lIns="0" rIns="0" tIns="0" bIns="0" anchor="t">
+          <a:bodyPr wrap="square" lIns="0" tIns="0" rIns="0" bIns="0" anchor="t">
             <a:noAutofit/>
           </a:bodyPr>
           <a:lstStyle/>
@@ -12973,7 +13057,7 @@
           <a:noFill/>
         </p:spPr>
         <p:txBody>
-          <a:bodyPr wrap="square" lIns="0" rIns="0" tIns="0" bIns="0" anchor="t">
+          <a:bodyPr wrap="square" lIns="0" tIns="0" rIns="0" bIns="0" anchor="t">
             <a:noAutofit/>
           </a:bodyPr>
           <a:lstStyle/>
@@ -13075,12 +13159,13 @@
           </a:fontRef>
         </p:style>
         <p:txBody>
-          <a:bodyPr rtlCol="0" anchor="ctr" wrap="square">
+          <a:bodyPr wrap="square" rtlCol="0" anchor="ctr">
             <a:noAutofit/>
           </a:bodyPr>
           <a:lstStyle/>
           <a:p>
             <a:pPr algn="ctr"/>
+            <a:endParaRPr/>
           </a:p>
         </p:txBody>
       </p:sp>
@@ -13101,7 +13186,7 @@
           <a:noFill/>
         </p:spPr>
         <p:txBody>
-          <a:bodyPr wrap="square" lIns="0" rIns="0" tIns="0" bIns="0" anchor="t">
+          <a:bodyPr wrap="square" lIns="0" tIns="0" rIns="0" bIns="0" anchor="t">
             <a:noAutofit/>
           </a:bodyPr>
           <a:lstStyle/>
@@ -13148,7 +13233,7 @@
           <a:noFill/>
         </p:spPr>
         <p:txBody>
-          <a:bodyPr wrap="square" lIns="0" rIns="0" tIns="0" bIns="0" anchor="t">
+          <a:bodyPr wrap="square" lIns="0" tIns="0" rIns="0" bIns="0" anchor="t">
             <a:noAutofit/>
           </a:bodyPr>
           <a:lstStyle/>
@@ -13252,12 +13337,13 @@
           </a:fontRef>
         </p:style>
         <p:txBody>
-          <a:bodyPr rtlCol="0" anchor="ctr" wrap="square">
+          <a:bodyPr wrap="square" rtlCol="0" anchor="ctr">
             <a:noAutofit/>
           </a:bodyPr>
           <a:lstStyle/>
           <a:p>
             <a:pPr algn="ctr"/>
+            <a:endParaRPr/>
           </a:p>
         </p:txBody>
       </p:sp>
@@ -13298,12 +13384,13 @@
           </a:fontRef>
         </p:style>
         <p:txBody>
-          <a:bodyPr rtlCol="0" anchor="ctr" wrap="square">
+          <a:bodyPr wrap="square" rtlCol="0" anchor="ctr">
             <a:noAutofit/>
           </a:bodyPr>
           <a:lstStyle/>
           <a:p>
             <a:pPr algn="ctr"/>
+            <a:endParaRPr/>
           </a:p>
         </p:txBody>
       </p:sp>
@@ -13325,7 +13412,7 @@
             <a:cxnLst/>
             <a:rect l="0" t="0" r="r" b="b"/>
             <a:pathLst>
-              <a:path w="21600" h="21600" fill="none" stroke="1">
+              <a:path w="21600" h="21600" fill="none">
                 <a:moveTo>
                   <a:pt x="10800" y="2700"/>
                 </a:moveTo>
@@ -13413,6 +13500,7 @@
           <a:lstStyle/>
           <a:p>
             <a:pPr algn="ctr"/>
+            <a:endParaRPr/>
           </a:p>
         </p:txBody>
       </p:sp>
@@ -13433,7 +13521,7 @@
           <a:noFill/>
         </p:spPr>
         <p:txBody>
-          <a:bodyPr wrap="square" lIns="0" rIns="0" tIns="0" bIns="0" anchor="t">
+          <a:bodyPr wrap="square" lIns="0" tIns="0" rIns="0" bIns="0" anchor="t">
             <a:noAutofit/>
           </a:bodyPr>
           <a:lstStyle/>
@@ -13480,7 +13568,7 @@
           <a:noFill/>
         </p:spPr>
         <p:txBody>
-          <a:bodyPr wrap="square" lIns="0" rIns="0" tIns="0" bIns="0" anchor="t">
+          <a:bodyPr wrap="square" lIns="0" tIns="0" rIns="0" bIns="0" anchor="t">
             <a:noAutofit/>
           </a:bodyPr>
           <a:lstStyle/>
@@ -13527,7 +13615,7 @@
           <a:noFill/>
         </p:spPr>
         <p:txBody>
-          <a:bodyPr wrap="square" lIns="0" rIns="0" tIns="0" bIns="0" anchor="t">
+          <a:bodyPr wrap="square" lIns="0" tIns="0" rIns="0" bIns="0" anchor="t">
             <a:noAutofit/>
           </a:bodyPr>
           <a:lstStyle/>
@@ -13596,12 +13684,13 @@
           </a:fontRef>
         </p:style>
         <p:txBody>
-          <a:bodyPr rtlCol="0" anchor="ctr" wrap="square">
+          <a:bodyPr wrap="square" rtlCol="0" anchor="ctr">
             <a:noAutofit/>
           </a:bodyPr>
           <a:lstStyle/>
           <a:p>
             <a:pPr algn="ctr"/>
+            <a:endParaRPr/>
           </a:p>
         </p:txBody>
       </p:sp>
@@ -13642,12 +13731,13 @@
           </a:fontRef>
         </p:style>
         <p:txBody>
-          <a:bodyPr rtlCol="0" anchor="ctr" wrap="square">
+          <a:bodyPr wrap="square" rtlCol="0" anchor="ctr">
             <a:noAutofit/>
           </a:bodyPr>
           <a:lstStyle/>
           <a:p>
             <a:pPr algn="ctr"/>
+            <a:endParaRPr/>
           </a:p>
         </p:txBody>
       </p:sp>
@@ -13669,7 +13759,7 @@
             <a:cxnLst/>
             <a:rect l="0" t="0" r="r" b="b"/>
             <a:pathLst>
-              <a:path w="21600" h="21600" fill="none" stroke="1">
+              <a:path w="21600" h="21600" fill="none">
                 <a:moveTo>
                   <a:pt x="3060" y="3060"/>
                 </a:moveTo>
@@ -13765,6 +13855,7 @@
           <a:lstStyle/>
           <a:p>
             <a:pPr algn="ctr"/>
+            <a:endParaRPr/>
           </a:p>
         </p:txBody>
       </p:sp>
@@ -13785,7 +13876,7 @@
           <a:noFill/>
         </p:spPr>
         <p:txBody>
-          <a:bodyPr wrap="square" lIns="0" rIns="0" tIns="0" bIns="0" anchor="t">
+          <a:bodyPr wrap="square" lIns="0" tIns="0" rIns="0" bIns="0" anchor="t">
             <a:noAutofit/>
           </a:bodyPr>
           <a:lstStyle/>
@@ -13832,7 +13923,7 @@
           <a:noFill/>
         </p:spPr>
         <p:txBody>
-          <a:bodyPr wrap="square" lIns="0" rIns="0" tIns="0" bIns="0" anchor="t">
+          <a:bodyPr wrap="square" lIns="0" tIns="0" rIns="0" bIns="0" anchor="t">
             <a:noAutofit/>
           </a:bodyPr>
           <a:lstStyle/>
@@ -13879,7 +13970,7 @@
           <a:noFill/>
         </p:spPr>
         <p:txBody>
-          <a:bodyPr wrap="square" lIns="0" rIns="0" tIns="0" bIns="0" anchor="t">
+          <a:bodyPr wrap="square" lIns="0" tIns="0" rIns="0" bIns="0" anchor="t">
             <a:noAutofit/>
           </a:bodyPr>
           <a:lstStyle/>
@@ -13948,12 +14039,13 @@
           </a:fontRef>
         </p:style>
         <p:txBody>
-          <a:bodyPr rtlCol="0" anchor="ctr" wrap="square">
+          <a:bodyPr wrap="square" rtlCol="0" anchor="ctr">
             <a:noAutofit/>
           </a:bodyPr>
           <a:lstStyle/>
           <a:p>
             <a:pPr algn="ctr"/>
+            <a:endParaRPr/>
           </a:p>
         </p:txBody>
       </p:sp>
@@ -13994,12 +14086,13 @@
           </a:fontRef>
         </p:style>
         <p:txBody>
-          <a:bodyPr rtlCol="0" anchor="ctr" wrap="square">
+          <a:bodyPr wrap="square" rtlCol="0" anchor="ctr">
             <a:noAutofit/>
           </a:bodyPr>
           <a:lstStyle/>
           <a:p>
             <a:pPr algn="ctr"/>
+            <a:endParaRPr/>
           </a:p>
         </p:txBody>
       </p:sp>
@@ -14021,7 +14114,7 @@
             <a:cxnLst/>
             <a:rect l="0" t="0" r="r" b="b"/>
             <a:pathLst>
-              <a:path w="21600" h="21600" fill="none" stroke="1">
+              <a:path w="21600" h="21600" fill="none">
                 <a:moveTo>
                   <a:pt x="6840" y="7380"/>
                 </a:moveTo>
@@ -14095,6 +14188,7 @@
           <a:lstStyle/>
           <a:p>
             <a:pPr algn="ctr"/>
+            <a:endParaRPr/>
           </a:p>
         </p:txBody>
       </p:sp>
@@ -14115,7 +14209,7 @@
           <a:noFill/>
         </p:spPr>
         <p:txBody>
-          <a:bodyPr wrap="square" lIns="0" rIns="0" tIns="0" bIns="0" anchor="t">
+          <a:bodyPr wrap="square" lIns="0" tIns="0" rIns="0" bIns="0" anchor="t">
             <a:noAutofit/>
           </a:bodyPr>
           <a:lstStyle/>
@@ -14162,7 +14256,7 @@
           <a:noFill/>
         </p:spPr>
         <p:txBody>
-          <a:bodyPr wrap="square" lIns="0" rIns="0" tIns="0" bIns="0" anchor="t">
+          <a:bodyPr wrap="square" lIns="0" tIns="0" rIns="0" bIns="0" anchor="t">
             <a:noAutofit/>
           </a:bodyPr>
           <a:lstStyle/>
@@ -14209,7 +14303,7 @@
           <a:noFill/>
         </p:spPr>
         <p:txBody>
-          <a:bodyPr wrap="square" lIns="0" rIns="0" tIns="0" bIns="0" anchor="t">
+          <a:bodyPr wrap="square" lIns="0" tIns="0" rIns="0" bIns="0" anchor="t">
             <a:noAutofit/>
           </a:bodyPr>
           <a:lstStyle/>
@@ -14453,12 +14547,13 @@
           </a:fontRef>
         </p:style>
         <p:txBody>
-          <a:bodyPr rtlCol="0" anchor="ctr" wrap="square">
+          <a:bodyPr wrap="square" rtlCol="0" anchor="ctr">
             <a:noAutofit/>
           </a:bodyPr>
           <a:lstStyle/>
           <a:p>
             <a:pPr algn="ctr"/>
+            <a:endParaRPr/>
           </a:p>
         </p:txBody>
       </p:sp>
@@ -14479,7 +14574,7 @@
           <a:noFill/>
         </p:spPr>
         <p:txBody>
-          <a:bodyPr wrap="square" lIns="0" rIns="0" tIns="0" bIns="0" anchor="t">
+          <a:bodyPr wrap="square" lIns="0" tIns="0" rIns="0" bIns="0" anchor="t">
             <a:noAutofit/>
           </a:bodyPr>
           <a:lstStyle/>
@@ -14527,7 +14622,7 @@
             <a:cxnLst/>
             <a:rect l="0" t="0" r="r" b="b"/>
             <a:pathLst>
-              <a:path w="21600" h="21600" fill="none" stroke="1">
+              <a:path w="21600" h="21600" fill="none">
                 <a:moveTo>
                   <a:pt x="10800" y="2520"/>
                 </a:moveTo>
@@ -14577,6 +14672,7 @@
           <a:lstStyle/>
           <a:p>
             <a:pPr algn="ctr"/>
+            <a:endParaRPr/>
           </a:p>
         </p:txBody>
       </p:sp>
@@ -14597,7 +14693,7 @@
           <a:noFill/>
         </p:spPr>
         <p:txBody>
-          <a:bodyPr wrap="square" lIns="0" rIns="0" tIns="0" bIns="0" anchor="t">
+          <a:bodyPr wrap="square" lIns="0" tIns="0" rIns="0" bIns="0" anchor="t">
             <a:noAutofit/>
           </a:bodyPr>
           <a:lstStyle/>
@@ -14644,7 +14740,7 @@
           <a:noFill/>
         </p:spPr>
         <p:txBody>
-          <a:bodyPr wrap="square" lIns="0" rIns="0" tIns="0" bIns="0" anchor="t">
+          <a:bodyPr wrap="square" lIns="0" tIns="0" rIns="0" bIns="0" anchor="t">
             <a:noAutofit/>
           </a:bodyPr>
           <a:lstStyle/>
@@ -14692,7 +14788,7 @@
             <a:cxnLst/>
             <a:rect l="0" t="0" r="r" b="b"/>
             <a:pathLst>
-              <a:path w="21600" h="21600" fill="none" stroke="1">
+              <a:path w="21600" h="21600" fill="none">
                 <a:moveTo>
                   <a:pt x="10800" y="2880"/>
                 </a:moveTo>
@@ -14784,6 +14880,7 @@
           <a:lstStyle/>
           <a:p>
             <a:pPr algn="ctr"/>
+            <a:endParaRPr/>
           </a:p>
         </p:txBody>
       </p:sp>
@@ -14804,7 +14901,7 @@
           <a:noFill/>
         </p:spPr>
         <p:txBody>
-          <a:bodyPr wrap="square" lIns="0" rIns="0" tIns="0" bIns="0" anchor="t">
+          <a:bodyPr wrap="square" lIns="0" tIns="0" rIns="0" bIns="0" anchor="t">
             <a:noAutofit/>
           </a:bodyPr>
           <a:lstStyle/>
@@ -14851,7 +14948,7 @@
           <a:noFill/>
         </p:spPr>
         <p:txBody>
-          <a:bodyPr wrap="square" lIns="0" rIns="0" tIns="0" bIns="0" anchor="t">
+          <a:bodyPr wrap="square" lIns="0" tIns="0" rIns="0" bIns="0" anchor="t">
             <a:noAutofit/>
           </a:bodyPr>
           <a:lstStyle/>
@@ -14918,12 +15015,13 @@
           </a:fontRef>
         </p:style>
         <p:txBody>
-          <a:bodyPr rtlCol="0" anchor="ctr" wrap="square">
+          <a:bodyPr wrap="square" rtlCol="0" anchor="ctr">
             <a:noAutofit/>
           </a:bodyPr>
           <a:lstStyle/>
           <a:p>
             <a:pPr algn="ctr"/>
+            <a:endParaRPr/>
           </a:p>
         </p:txBody>
       </p:sp>
@@ -14944,7 +15042,7 @@
           <a:noFill/>
         </p:spPr>
         <p:txBody>
-          <a:bodyPr wrap="square" lIns="0" rIns="0" tIns="0" bIns="0" anchor="ctr">
+          <a:bodyPr wrap="square" lIns="0" tIns="0" rIns="0" bIns="0" anchor="ctr">
             <a:noAutofit/>
           </a:bodyPr>
           <a:lstStyle/>
@@ -14991,7 +15089,7 @@
           <a:noFill/>
         </p:spPr>
         <p:txBody>
-          <a:bodyPr wrap="square" lIns="0" rIns="0" tIns="0" bIns="0" anchor="ctr">
+          <a:bodyPr wrap="square" lIns="0" tIns="0" rIns="0" bIns="0" anchor="ctr">
             <a:noAutofit/>
           </a:bodyPr>
           <a:lstStyle/>
@@ -15039,7 +15137,7 @@
             <a:cxnLst/>
             <a:rect l="0" t="0" r="r" b="b"/>
             <a:pathLst>
-              <a:path w="21600" h="21600" fill="none" stroke="1">
+              <a:path w="21600" h="21600" fill="none">
                 <a:moveTo>
                   <a:pt x="10800" y="2700"/>
                 </a:moveTo>
@@ -15127,6 +15225,7 @@
           <a:lstStyle/>
           <a:p>
             <a:pPr algn="ctr"/>
+            <a:endParaRPr/>
           </a:p>
         </p:txBody>
       </p:sp>
@@ -15147,7 +15246,7 @@
           <a:noFill/>
         </p:spPr>
         <p:txBody>
-          <a:bodyPr wrap="square" lIns="0" rIns="0" tIns="0" bIns="0" anchor="ctr">
+          <a:bodyPr wrap="square" lIns="0" tIns="0" rIns="0" bIns="0" anchor="ctr">
             <a:noAutofit/>
           </a:bodyPr>
           <a:lstStyle/>
@@ -15195,7 +15294,7 @@
             <a:cxnLst/>
             <a:rect l="0" t="0" r="r" b="b"/>
             <a:pathLst>
-              <a:path w="21600" h="21600" fill="none" stroke="1">
+              <a:path w="21600" h="21600" fill="none">
                 <a:moveTo>
                   <a:pt x="3060" y="3060"/>
                 </a:moveTo>
@@ -15291,6 +15390,7 @@
           <a:lstStyle/>
           <a:p>
             <a:pPr algn="ctr"/>
+            <a:endParaRPr/>
           </a:p>
         </p:txBody>
       </p:sp>
@@ -15311,7 +15411,7 @@
           <a:noFill/>
         </p:spPr>
         <p:txBody>
-          <a:bodyPr wrap="square" lIns="0" rIns="0" tIns="0" bIns="0" anchor="ctr">
+          <a:bodyPr wrap="square" lIns="0" tIns="0" rIns="0" bIns="0" anchor="ctr">
             <a:noAutofit/>
           </a:bodyPr>
           <a:lstStyle/>
@@ -15359,7 +15459,7 @@
             <a:cxnLst/>
             <a:rect l="0" t="0" r="r" b="b"/>
             <a:pathLst>
-              <a:path w="21600" h="21600" fill="none" stroke="1">
+              <a:path w="21600" h="21600" fill="none">
                 <a:moveTo>
                   <a:pt x="6840" y="7380"/>
                 </a:moveTo>
@@ -15433,6 +15533,7 @@
           <a:lstStyle/>
           <a:p>
             <a:pPr algn="ctr"/>
+            <a:endParaRPr/>
           </a:p>
         </p:txBody>
       </p:sp>
@@ -15453,7 +15554,7 @@
           <a:noFill/>
         </p:spPr>
         <p:txBody>
-          <a:bodyPr wrap="square" lIns="0" rIns="0" tIns="0" bIns="0" anchor="ctr">
+          <a:bodyPr wrap="square" lIns="0" tIns="0" rIns="0" bIns="0" anchor="ctr">
             <a:noAutofit/>
           </a:bodyPr>
           <a:lstStyle/>
@@ -15501,7 +15602,7 @@
             <a:cxnLst/>
             <a:rect l="0" t="0" r="r" b="b"/>
             <a:pathLst>
-              <a:path w="21600" h="21600" fill="none" stroke="1">
+              <a:path w="21600" h="21600" fill="none">
                 <a:moveTo>
                   <a:pt x="10800" y="2520"/>
                 </a:moveTo>
@@ -15551,6 +15652,7 @@
           <a:lstStyle/>
           <a:p>
             <a:pPr algn="ctr"/>
+            <a:endParaRPr/>
           </a:p>
         </p:txBody>
       </p:sp>
@@ -15571,7 +15673,7 @@
           <a:noFill/>
         </p:spPr>
         <p:txBody>
-          <a:bodyPr wrap="square" lIns="0" rIns="0" tIns="0" bIns="0" anchor="ctr">
+          <a:bodyPr wrap="square" lIns="0" tIns="0" rIns="0" bIns="0" anchor="ctr">
             <a:noAutofit/>
           </a:bodyPr>
           <a:lstStyle/>
@@ -15618,7 +15720,7 @@
           <a:noFill/>
         </p:spPr>
         <p:txBody>
-          <a:bodyPr wrap="square" lIns="0" rIns="0" tIns="0" bIns="0" anchor="ctr">
+          <a:bodyPr wrap="square" lIns="0" tIns="0" rIns="0" bIns="0" anchor="ctr">
             <a:noAutofit/>
           </a:bodyPr>
           <a:lstStyle/>
@@ -15665,7 +15767,7 @@
           <a:noFill/>
         </p:spPr>
         <p:txBody>
-          <a:bodyPr wrap="square" lIns="0" rIns="0" tIns="0" bIns="0" anchor="ctr">
+          <a:bodyPr wrap="square" lIns="0" tIns="0" rIns="0" bIns="0" anchor="ctr">
             <a:noAutofit/>
           </a:bodyPr>
           <a:lstStyle/>
@@ -15712,7 +15814,7 @@
           <a:noFill/>
         </p:spPr>
         <p:txBody>
-          <a:bodyPr wrap="square" lIns="0" rIns="0" tIns="0" bIns="0" anchor="ctr">
+          <a:bodyPr wrap="square" lIns="0" tIns="0" rIns="0" bIns="0" anchor="ctr">
             <a:noAutofit/>
           </a:bodyPr>
           <a:lstStyle/>
@@ -15779,12 +15881,13 @@
           </a:fontRef>
         </p:style>
         <p:txBody>
-          <a:bodyPr rtlCol="0" anchor="ctr" wrap="square">
+          <a:bodyPr wrap="square" rtlCol="0" anchor="ctr">
             <a:noAutofit/>
           </a:bodyPr>
           <a:lstStyle/>
           <a:p>
             <a:pPr algn="ctr"/>
+            <a:endParaRPr/>
           </a:p>
         </p:txBody>
       </p:sp>
@@ -15825,12 +15928,13 @@
           </a:fontRef>
         </p:style>
         <p:txBody>
-          <a:bodyPr rtlCol="0" anchor="ctr" wrap="square">
+          <a:bodyPr wrap="square" rtlCol="0" anchor="ctr">
             <a:noAutofit/>
           </a:bodyPr>
           <a:lstStyle/>
           <a:p>
             <a:pPr algn="ctr"/>
+            <a:endParaRPr/>
           </a:p>
         </p:txBody>
       </p:sp>
@@ -15871,12 +15975,13 @@
           </a:fontRef>
         </p:style>
         <p:txBody>
-          <a:bodyPr rtlCol="0" anchor="ctr" wrap="square">
+          <a:bodyPr wrap="square" rtlCol="0" anchor="ctr">
             <a:noAutofit/>
           </a:bodyPr>
           <a:lstStyle/>
           <a:p>
             <a:pPr algn="ctr"/>
+            <a:endParaRPr/>
           </a:p>
         </p:txBody>
       </p:sp>
@@ -15898,7 +16003,7 @@
             <a:cxnLst/>
             <a:rect l="0" t="0" r="r" b="b"/>
             <a:pathLst>
-              <a:path w="21600" h="21600" fill="none" stroke="1">
+              <a:path w="21600" h="21600" fill="none">
                 <a:moveTo>
                   <a:pt x="10800" y="2520"/>
                 </a:moveTo>
@@ -15948,6 +16053,7 @@
           <a:lstStyle/>
           <a:p>
             <a:pPr algn="ctr"/>
+            <a:endParaRPr/>
           </a:p>
         </p:txBody>
       </p:sp>
@@ -16003,7 +16109,7 @@
           <a:noFill/>
         </p:spPr>
         <p:txBody>
-          <a:bodyPr wrap="square" lIns="0" rIns="0" tIns="0" bIns="0" anchor="ctr">
+          <a:bodyPr wrap="square" lIns="0" tIns="0" rIns="0" bIns="0" anchor="ctr">
             <a:noAutofit/>
           </a:bodyPr>
           <a:lstStyle/>
@@ -16050,7 +16156,7 @@
           <a:noFill/>
         </p:spPr>
         <p:txBody>
-          <a:bodyPr wrap="square" lIns="0" rIns="0" tIns="0" bIns="0" anchor="ctr">
+          <a:bodyPr wrap="square" lIns="0" tIns="0" rIns="0" bIns="0" anchor="ctr">
             <a:noAutofit/>
           </a:bodyPr>
           <a:lstStyle/>
@@ -16097,7 +16203,7 @@
           <a:noFill/>
         </p:spPr>
         <p:txBody>
-          <a:bodyPr wrap="square" lIns="0" rIns="0" tIns="0" bIns="0" anchor="ctr">
+          <a:bodyPr wrap="square" lIns="0" tIns="0" rIns="0" bIns="0" anchor="ctr">
             <a:noAutofit/>
           </a:bodyPr>
           <a:lstStyle/>
@@ -16164,12 +16270,13 @@
           </a:fontRef>
         </p:style>
         <p:txBody>
-          <a:bodyPr rtlCol="0" anchor="ctr" wrap="square">
+          <a:bodyPr wrap="square" rtlCol="0" anchor="ctr">
             <a:noAutofit/>
           </a:bodyPr>
           <a:lstStyle/>
           <a:p>
             <a:pPr algn="ctr"/>
+            <a:endParaRPr/>
           </a:p>
         </p:txBody>
       </p:sp>
@@ -16261,7 +16368,7 @@
             <a:cxnLst/>
             <a:rect l="0" t="0" r="r" b="b"/>
             <a:pathLst>
-              <a:path w="21600" h="21600" fill="none" stroke="1">
+              <a:path w="21600" h="21600" fill="none">
                 <a:moveTo>
                   <a:pt x="10800" y="2520"/>
                 </a:moveTo>
@@ -16311,6 +16418,7 @@
           <a:lstStyle/>
           <a:p>
             <a:pPr algn="ctr"/>
+            <a:endParaRPr/>
           </a:p>
         </p:txBody>
       </p:sp>
@@ -16366,7 +16474,7 @@
           <a:noFill/>
         </p:spPr>
         <p:txBody>
-          <a:bodyPr wrap="square" lIns="0" rIns="0" tIns="0" bIns="0" anchor="ctr">
+          <a:bodyPr wrap="square" lIns="0" tIns="0" rIns="0" bIns="0" anchor="ctr">
             <a:noAutofit/>
           </a:bodyPr>
           <a:lstStyle/>
@@ -16413,7 +16521,7 @@
           <a:noFill/>
         </p:spPr>
         <p:txBody>
-          <a:bodyPr wrap="square" lIns="0" rIns="0" tIns="0" bIns="0" anchor="ctr">
+          <a:bodyPr wrap="square" lIns="0" tIns="0" rIns="0" bIns="0" anchor="ctr">
             <a:noAutofit/>
           </a:bodyPr>
           <a:lstStyle/>
@@ -16460,7 +16568,7 @@
           <a:noFill/>
         </p:spPr>
         <p:txBody>
-          <a:bodyPr wrap="square" lIns="0" rIns="0" tIns="0" bIns="0" anchor="ctr">
+          <a:bodyPr wrap="square" lIns="0" tIns="0" rIns="0" bIns="0" anchor="ctr">
             <a:noAutofit/>
           </a:bodyPr>
           <a:lstStyle/>
@@ -16527,12 +16635,13 @@
           </a:fontRef>
         </p:style>
         <p:txBody>
-          <a:bodyPr rtlCol="0" anchor="ctr" wrap="square">
+          <a:bodyPr wrap="square" rtlCol="0" anchor="ctr">
             <a:noAutofit/>
           </a:bodyPr>
           <a:lstStyle/>
           <a:p>
             <a:pPr algn="ctr"/>
+            <a:endParaRPr/>
           </a:p>
         </p:txBody>
       </p:sp>
@@ -16693,7 +16802,7 @@
           <a:noFill/>
         </p:spPr>
         <p:txBody>
-          <a:bodyPr wrap="square" lIns="0" rIns="0" tIns="0" bIns="0" anchor="ctr">
+          <a:bodyPr wrap="square" lIns="0" tIns="0" rIns="0" bIns="0" anchor="ctr">
             <a:noAutofit/>
           </a:bodyPr>
           <a:lstStyle/>
@@ -16740,7 +16849,7 @@
           <a:noFill/>
         </p:spPr>
         <p:txBody>
-          <a:bodyPr wrap="square" lIns="0" rIns="0" tIns="0" bIns="0" anchor="ctr">
+          <a:bodyPr wrap="square" lIns="0" tIns="0" rIns="0" bIns="0" anchor="ctr">
             <a:noAutofit/>
           </a:bodyPr>
           <a:lstStyle/>
@@ -16787,7 +16896,7 @@
           <a:noFill/>
         </p:spPr>
         <p:txBody>
-          <a:bodyPr wrap="square" lIns="0" rIns="0" tIns="0" bIns="0" anchor="ctr">
+          <a:bodyPr wrap="square" lIns="0" tIns="0" rIns="0" bIns="0" anchor="ctr">
             <a:noAutofit/>
           </a:bodyPr>
           <a:lstStyle/>
@@ -16854,12 +16963,13 @@
           </a:fontRef>
         </p:style>
         <p:txBody>
-          <a:bodyPr rtlCol="0" anchor="ctr" wrap="square">
+          <a:bodyPr wrap="square" rtlCol="0" anchor="ctr">
             <a:noAutofit/>
           </a:bodyPr>
           <a:lstStyle/>
           <a:p>
             <a:pPr algn="ctr"/>
+            <a:endParaRPr/>
           </a:p>
         </p:txBody>
       </p:sp>
@@ -16900,12 +17010,13 @@
           </a:fontRef>
         </p:style>
         <p:txBody>
-          <a:bodyPr rtlCol="0" anchor="ctr" wrap="square">
+          <a:bodyPr wrap="square" rtlCol="0" anchor="ctr">
             <a:noAutofit/>
           </a:bodyPr>
           <a:lstStyle/>
           <a:p>
             <a:pPr algn="ctr"/>
+            <a:endParaRPr/>
           </a:p>
         </p:txBody>
       </p:sp>
@@ -16962,7 +17073,7 @@
             <a:cxnLst/>
             <a:rect l="0" t="0" r="r" b="b"/>
             <a:pathLst>
-              <a:path w="21600" h="21600" fill="none" stroke="1">
+              <a:path w="21600" h="21600" fill="none">
                 <a:moveTo>
                   <a:pt x="10800" y="2520"/>
                 </a:moveTo>
@@ -17012,6 +17123,7 @@
           <a:lstStyle/>
           <a:p>
             <a:pPr algn="ctr"/>
+            <a:endParaRPr/>
           </a:p>
         </p:txBody>
       </p:sp>
@@ -17067,7 +17179,7 @@
           <a:noFill/>
         </p:spPr>
         <p:txBody>
-          <a:bodyPr wrap="square" lIns="0" rIns="0" tIns="0" bIns="0" anchor="ctr">
+          <a:bodyPr wrap="square" lIns="0" tIns="0" rIns="0" bIns="0" anchor="ctr">
             <a:noAutofit/>
           </a:bodyPr>
           <a:lstStyle/>
@@ -17114,7 +17226,7 @@
           <a:noFill/>
         </p:spPr>
         <p:txBody>
-          <a:bodyPr wrap="square" lIns="0" rIns="0" tIns="0" bIns="0" anchor="ctr">
+          <a:bodyPr wrap="square" lIns="0" tIns="0" rIns="0" bIns="0" anchor="ctr">
             <a:noAutofit/>
           </a:bodyPr>
           <a:lstStyle/>
@@ -17181,12 +17293,13 @@
           </a:fontRef>
         </p:style>
         <p:txBody>
-          <a:bodyPr rtlCol="0" anchor="ctr" wrap="square">
+          <a:bodyPr wrap="square" rtlCol="0" anchor="ctr">
             <a:noAutofit/>
           </a:bodyPr>
           <a:lstStyle/>
           <a:p>
             <a:pPr algn="ctr"/>
+            <a:endParaRPr/>
           </a:p>
         </p:txBody>
       </p:sp>
@@ -17227,12 +17340,13 @@
           </a:fontRef>
         </p:style>
         <p:txBody>
-          <a:bodyPr rtlCol="0" anchor="ctr" wrap="square">
+          <a:bodyPr wrap="square" rtlCol="0" anchor="ctr">
             <a:noAutofit/>
           </a:bodyPr>
           <a:lstStyle/>
           <a:p>
             <a:pPr algn="ctr"/>
+            <a:endParaRPr/>
           </a:p>
         </p:txBody>
       </p:sp>
@@ -17289,7 +17403,7 @@
             <a:cxnLst/>
             <a:rect l="0" t="0" r="r" b="b"/>
             <a:pathLst>
-              <a:path w="21600" h="21600" fill="none" stroke="1">
+              <a:path w="21600" h="21600" fill="none">
                 <a:moveTo>
                   <a:pt x="10800" y="2520"/>
                 </a:moveTo>
@@ -17339,6 +17453,7 @@
           <a:lstStyle/>
           <a:p>
             <a:pPr algn="ctr"/>
+            <a:endParaRPr/>
           </a:p>
         </p:txBody>
       </p:sp>
@@ -17414,12 +17529,13 @@
           </a:fontRef>
         </p:style>
         <p:txBody>
-          <a:bodyPr rtlCol="0" anchor="ctr" wrap="square">
+          <a:bodyPr wrap="square" rtlCol="0" anchor="ctr">
             <a:noAutofit/>
           </a:bodyPr>
           <a:lstStyle/>
           <a:p>
             <a:pPr algn="ctr"/>
+            <a:endParaRPr/>
           </a:p>
         </p:txBody>
       </p:sp>
@@ -17440,7 +17556,7 @@
           <a:noFill/>
         </p:spPr>
         <p:txBody>
-          <a:bodyPr wrap="square" lIns="0" rIns="0" tIns="0" bIns="0" anchor="t">
+          <a:bodyPr wrap="square" lIns="0" tIns="0" rIns="0" bIns="0" anchor="t">
             <a:noAutofit/>
           </a:bodyPr>
           <a:lstStyle/>
@@ -17507,12 +17623,13 @@
           </a:fontRef>
         </p:style>
         <p:txBody>
-          <a:bodyPr rtlCol="0" anchor="ctr" wrap="square">
+          <a:bodyPr wrap="square" rtlCol="0" anchor="ctr">
             <a:noAutofit/>
           </a:bodyPr>
           <a:lstStyle/>
           <a:p>
             <a:pPr algn="ctr"/>
+            <a:endParaRPr/>
           </a:p>
         </p:txBody>
       </p:sp>
@@ -17533,7 +17650,7 @@
           <a:noFill/>
         </p:spPr>
         <p:txBody>
-          <a:bodyPr wrap="square" lIns="0" rIns="0" tIns="0" bIns="0" anchor="t">
+          <a:bodyPr wrap="square" lIns="0" tIns="0" rIns="0" bIns="0" anchor="t">
             <a:noAutofit/>
           </a:bodyPr>
           <a:lstStyle/>
@@ -17615,7 +17732,7 @@
           <a:noFill/>
         </p:spPr>
         <p:txBody>
-          <a:bodyPr wrap="square" lIns="0" rIns="0" tIns="0" bIns="0" anchor="t">
+          <a:bodyPr wrap="square" lIns="0" tIns="0" rIns="0" bIns="0" anchor="t">
             <a:noAutofit/>
           </a:bodyPr>
           <a:lstStyle/>
@@ -17663,7 +17780,7 @@
             <a:cxnLst/>
             <a:rect l="0" t="0" r="r" b="b"/>
             <a:pathLst>
-              <a:path w="21600" h="21600" fill="none" stroke="1">
+              <a:path w="21600" h="21600" fill="none">
                 <a:moveTo>
                   <a:pt x="10800" y="2520"/>
                 </a:moveTo>
@@ -17713,6 +17830,7 @@
           <a:lstStyle/>
           <a:p>
             <a:pPr algn="ctr"/>
+            <a:endParaRPr/>
           </a:p>
         </p:txBody>
       </p:sp>
@@ -17733,7 +17851,7 @@
           <a:noFill/>
         </p:spPr>
         <p:txBody>
-          <a:bodyPr wrap="square" lIns="0" rIns="0" tIns="0" bIns="0" anchor="t">
+          <a:bodyPr wrap="square" lIns="0" tIns="0" rIns="0" bIns="0" anchor="t">
             <a:noAutofit/>
           </a:bodyPr>
           <a:lstStyle/>
@@ -17780,7 +17898,7 @@
           <a:noFill/>
         </p:spPr>
         <p:txBody>
-          <a:bodyPr wrap="square" lIns="0" rIns="0" tIns="0" bIns="0" anchor="t">
+          <a:bodyPr wrap="square" lIns="0" tIns="0" rIns="0" bIns="0" anchor="t">
             <a:noAutofit/>
           </a:bodyPr>
           <a:lstStyle/>
@@ -17830,7 +17948,7 @@
 </file>
 
 <file path=ppt/slides/slide16.xml><?xml version="1.0" encoding="utf-8"?>
-<p:sld xmlns:a="http://schemas.openxmlformats.org/drawingml/2006/main" xmlns:p="http://schemas.openxmlformats.org/presentationml/2006/main" xmlns:r="http://schemas.openxmlformats.org/officeDocument/2006/relationships">
+<p:sld xmlns:a="http://schemas.openxmlformats.org/drawingml/2006/main" xmlns:r="http://schemas.openxmlformats.org/officeDocument/2006/relationships" xmlns:p="http://schemas.openxmlformats.org/presentationml/2006/main">
   <p:cSld>
     <p:spTree>
       <p:nvGrpSpPr>
@@ -17838,7 +17956,14 @@
         <p:cNvGrpSpPr/>
         <p:nvPr/>
       </p:nvGrpSpPr>
-      <p:grpSpPr/>
+      <p:grpSpPr>
+        <a:xfrm>
+          <a:off x="0" y="0"/>
+          <a:ext cx="0" cy="0"/>
+          <a:chOff x="0" y="0"/>
+          <a:chExt cx="0" cy="0"/>
+        </a:xfrm>
+      </p:grpSpPr>
       <p:sp>
         <p:nvSpPr>
           <p:cNvPr id="2" name="Rectangle 1"/>
@@ -17876,12 +18001,13 @@
           </a:fontRef>
         </p:style>
         <p:txBody>
-          <a:bodyPr rtlCol="0" anchor="ctr" wrap="square">
+          <a:bodyPr wrap="square" rtlCol="0" anchor="ctr">
             <a:noAutofit/>
           </a:bodyPr>
           <a:lstStyle/>
           <a:p>
             <a:pPr algn="ctr"/>
+            <a:endParaRPr/>
           </a:p>
         </p:txBody>
       </p:sp>
@@ -17922,12 +18048,13 @@
           </a:fontRef>
         </p:style>
         <p:txBody>
-          <a:bodyPr rtlCol="0" anchor="ctr" wrap="square">
+          <a:bodyPr wrap="square" rtlCol="0" anchor="ctr">
             <a:noAutofit/>
           </a:bodyPr>
           <a:lstStyle/>
           <a:p>
             <a:pPr algn="ctr"/>
+            <a:endParaRPr/>
           </a:p>
         </p:txBody>
       </p:sp>
@@ -17948,7 +18075,7 @@
           <a:noFill/>
         </p:spPr>
         <p:txBody>
-          <a:bodyPr wrap="square" lIns="0" rIns="0" tIns="0" bIns="0" anchor="ctr">
+          <a:bodyPr wrap="square" lIns="0" tIns="0" rIns="0" bIns="0" anchor="ctr">
             <a:noAutofit/>
           </a:bodyPr>
           <a:lstStyle/>
@@ -17995,7 +18122,7 @@
           <a:noFill/>
         </p:spPr>
         <p:txBody>
-          <a:bodyPr wrap="square" lIns="0" rIns="0" tIns="0" bIns="0" anchor="ctr">
+          <a:bodyPr wrap="square" lIns="0" tIns="0" rIns="0" bIns="0" anchor="ctr">
             <a:noAutofit/>
           </a:bodyPr>
           <a:lstStyle/>
@@ -18066,7 +18193,7 @@
           <a:noFill/>
         </p:spPr>
         <p:txBody>
-          <a:bodyPr wrap="square" lIns="0" rIns="0" tIns="0" bIns="0" anchor="t">
+          <a:bodyPr wrap="square" lIns="0" tIns="0" rIns="0" bIns="0" anchor="t">
             <a:noAutofit/>
           </a:bodyPr>
           <a:lstStyle/>
@@ -18113,7 +18240,7 @@
           <a:noFill/>
         </p:spPr>
         <p:txBody>
-          <a:bodyPr wrap="square" lIns="0" rIns="0" tIns="0" bIns="0" anchor="t">
+          <a:bodyPr wrap="square" lIns="0" tIns="0" rIns="0" bIns="0" anchor="t">
             <a:noAutofit/>
           </a:bodyPr>
           <a:lstStyle/>
@@ -18195,7 +18322,7 @@
           <a:noFill/>
         </p:spPr>
         <p:txBody>
-          <a:bodyPr wrap="square" lIns="0" rIns="0" tIns="0" bIns="0" anchor="t">
+          <a:bodyPr wrap="square" lIns="0" tIns="0" rIns="0" bIns="0" anchor="t">
             <a:noAutofit/>
           </a:bodyPr>
           <a:lstStyle/>
@@ -18234,7 +18361,7 @@
 </file>
 
 <file path=ppt/slides/slide17.xml><?xml version="1.0" encoding="utf-8"?>
-<p:sld xmlns:a="http://schemas.openxmlformats.org/drawingml/2006/main" xmlns:p="http://schemas.openxmlformats.org/presentationml/2006/main" xmlns:r="http://schemas.openxmlformats.org/officeDocument/2006/relationships">
+<p:sld xmlns:a="http://schemas.openxmlformats.org/drawingml/2006/main" xmlns:r="http://schemas.openxmlformats.org/officeDocument/2006/relationships" xmlns:p="http://schemas.openxmlformats.org/presentationml/2006/main">
   <p:cSld>
     <p:spTree>
       <p:nvGrpSpPr>
@@ -18242,7 +18369,14 @@
         <p:cNvGrpSpPr/>
         <p:nvPr/>
       </p:nvGrpSpPr>
-      <p:grpSpPr/>
+      <p:grpSpPr>
+        <a:xfrm>
+          <a:off x="0" y="0"/>
+          <a:ext cx="0" cy="0"/>
+          <a:chOff x="0" y="0"/>
+          <a:chExt cx="0" cy="0"/>
+        </a:xfrm>
+      </p:grpSpPr>
       <p:cxnSp>
         <p:nvCxnSpPr>
           <p:cNvPr id="2" name="Connector 1"/>
@@ -18315,12 +18449,13 @@
           </a:fontRef>
         </p:style>
         <p:txBody>
-          <a:bodyPr rtlCol="0" anchor="ctr" wrap="square">
+          <a:bodyPr wrap="square" rtlCol="0" anchor="ctr">
             <a:noAutofit/>
           </a:bodyPr>
           <a:lstStyle/>
           <a:p>
             <a:pPr algn="ctr"/>
+            <a:endParaRPr/>
           </a:p>
         </p:txBody>
       </p:sp>
@@ -18341,7 +18476,7 @@
           <a:noFill/>
         </p:spPr>
         <p:txBody>
-          <a:bodyPr wrap="square" lIns="0" rIns="0" tIns="0" bIns="0" anchor="t">
+          <a:bodyPr wrap="square" lIns="0" tIns="0" rIns="0" bIns="0" anchor="t">
             <a:noAutofit/>
           </a:bodyPr>
           <a:lstStyle/>
@@ -18399,7 +18534,7 @@
           <a:noFill/>
         </p:spPr>
         <p:txBody>
-          <a:bodyPr wrap="square" lIns="0" rIns="0" tIns="0" bIns="0" anchor="t">
+          <a:bodyPr wrap="square" lIns="0" tIns="0" rIns="0" bIns="0" anchor="t">
             <a:noAutofit/>
           </a:bodyPr>
           <a:lstStyle/>
@@ -18446,7 +18581,7 @@
           <a:noFill/>
         </p:spPr>
         <p:txBody>
-          <a:bodyPr wrap="square" lIns="0" rIns="0" tIns="0" bIns="0" anchor="t">
+          <a:bodyPr wrap="square" lIns="0" tIns="0" rIns="0" bIns="0" anchor="t">
             <a:noAutofit/>
           </a:bodyPr>
           <a:lstStyle/>
@@ -18493,7 +18628,7 @@
           <a:noFill/>
         </p:spPr>
         <p:txBody>
-          <a:bodyPr wrap="square" lIns="0" rIns="0" tIns="0" bIns="0" anchor="t">
+          <a:bodyPr wrap="square" lIns="0" tIns="0" rIns="0" bIns="0" anchor="t">
             <a:noAutofit/>
           </a:bodyPr>
           <a:lstStyle/>
@@ -18540,7 +18675,7 @@
           <a:noFill/>
         </p:spPr>
         <p:txBody>
-          <a:bodyPr wrap="square" lIns="0" rIns="0" tIns="0" bIns="0" anchor="t">
+          <a:bodyPr wrap="square" lIns="0" tIns="0" rIns="0" bIns="0" anchor="t">
             <a:noAutofit/>
           </a:bodyPr>
           <a:lstStyle/>
@@ -18644,7 +18779,7 @@
           <a:noFill/>
         </p:spPr>
         <p:txBody>
-          <a:bodyPr wrap="square" lIns="0" rIns="0" tIns="0" bIns="0" anchor="t">
+          <a:bodyPr wrap="square" lIns="0" tIns="0" rIns="0" bIns="0" anchor="t">
             <a:noAutofit/>
           </a:bodyPr>
           <a:lstStyle/>
@@ -18711,12 +18846,13 @@
           </a:fontRef>
         </p:style>
         <p:txBody>
-          <a:bodyPr rtlCol="0" anchor="ctr" wrap="square">
+          <a:bodyPr wrap="square" rtlCol="0" anchor="ctr">
             <a:noAutofit/>
           </a:bodyPr>
           <a:lstStyle/>
           <a:p>
             <a:pPr algn="ctr"/>
+            <a:endParaRPr/>
           </a:p>
         </p:txBody>
       </p:sp>
@@ -18737,7 +18873,7 @@
           <a:noFill/>
         </p:spPr>
         <p:txBody>
-          <a:bodyPr wrap="square" lIns="0" rIns="0" tIns="0" bIns="0" anchor="t">
+          <a:bodyPr wrap="square" lIns="0" tIns="0" rIns="0" bIns="0" anchor="t">
             <a:noAutofit/>
           </a:bodyPr>
           <a:lstStyle/>
@@ -18804,12 +18940,13 @@
           </a:fontRef>
         </p:style>
         <p:txBody>
-          <a:bodyPr rtlCol="0" anchor="ctr" wrap="square">
+          <a:bodyPr wrap="square" rtlCol="0" anchor="ctr">
             <a:noAutofit/>
           </a:bodyPr>
           <a:lstStyle/>
           <a:p>
             <a:pPr algn="ctr"/>
+            <a:endParaRPr/>
           </a:p>
         </p:txBody>
       </p:sp>
@@ -18830,7 +18967,7 @@
           <a:noFill/>
         </p:spPr>
         <p:txBody>
-          <a:bodyPr wrap="square" lIns="0" rIns="0" tIns="0" bIns="0" anchor="t">
+          <a:bodyPr wrap="square" lIns="0" tIns="0" rIns="0" bIns="0" anchor="t">
             <a:noAutofit/>
           </a:bodyPr>
           <a:lstStyle/>
@@ -18897,12 +19034,13 @@
           </a:fontRef>
         </p:style>
         <p:txBody>
-          <a:bodyPr rtlCol="0" anchor="ctr" wrap="square">
+          <a:bodyPr wrap="square" rtlCol="0" anchor="ctr">
             <a:noAutofit/>
           </a:bodyPr>
           <a:lstStyle/>
           <a:p>
             <a:pPr algn="ctr"/>
+            <a:endParaRPr/>
           </a:p>
         </p:txBody>
       </p:sp>
@@ -18923,7 +19061,7 @@
           <a:noFill/>
         </p:spPr>
         <p:txBody>
-          <a:bodyPr wrap="square" lIns="0" rIns="0" tIns="0" bIns="0" anchor="t">
+          <a:bodyPr wrap="square" lIns="0" tIns="0" rIns="0" bIns="0" anchor="t">
             <a:noAutofit/>
           </a:bodyPr>
           <a:lstStyle/>
@@ -18990,12 +19128,13 @@
           </a:fontRef>
         </p:style>
         <p:txBody>
-          <a:bodyPr rtlCol="0" anchor="ctr" wrap="square">
+          <a:bodyPr wrap="square" rtlCol="0" anchor="ctr">
             <a:noAutofit/>
           </a:bodyPr>
           <a:lstStyle/>
           <a:p>
             <a:pPr algn="ctr"/>
+            <a:endParaRPr/>
           </a:p>
         </p:txBody>
       </p:sp>
@@ -19016,7 +19155,7 @@
           <a:noFill/>
         </p:spPr>
         <p:txBody>
-          <a:bodyPr wrap="square" lIns="0" rIns="0" tIns="0" bIns="0" anchor="t">
+          <a:bodyPr wrap="square" lIns="0" tIns="0" rIns="0" bIns="0" anchor="t">
             <a:noAutofit/>
           </a:bodyPr>
           <a:lstStyle/>
@@ -19083,12 +19222,13 @@
           </a:fontRef>
         </p:style>
         <p:txBody>
-          <a:bodyPr rtlCol="0" anchor="ctr" wrap="square">
+          <a:bodyPr wrap="square" rtlCol="0" anchor="ctr">
             <a:noAutofit/>
           </a:bodyPr>
           <a:lstStyle/>
           <a:p>
             <a:pPr algn="ctr"/>
+            <a:endParaRPr/>
           </a:p>
         </p:txBody>
       </p:sp>
@@ -19109,7 +19249,7 @@
           <a:noFill/>
         </p:spPr>
         <p:txBody>
-          <a:bodyPr wrap="square" lIns="0" rIns="0" tIns="0" bIns="0" anchor="t">
+          <a:bodyPr wrap="square" lIns="0" tIns="0" rIns="0" bIns="0" anchor="t">
             <a:noAutofit/>
           </a:bodyPr>
           <a:lstStyle/>
@@ -19191,7 +19331,7 @@
           <a:noFill/>
         </p:spPr>
         <p:txBody>
-          <a:bodyPr wrap="square" lIns="0" rIns="0" tIns="0" bIns="0" anchor="t">
+          <a:bodyPr wrap="square" lIns="0" tIns="0" rIns="0" bIns="0" anchor="t">
             <a:noAutofit/>
           </a:bodyPr>
           <a:lstStyle/>
@@ -19258,12 +19398,13 @@
           </a:fontRef>
         </p:style>
         <p:txBody>
-          <a:bodyPr rtlCol="0" anchor="ctr" wrap="square">
+          <a:bodyPr wrap="square" rtlCol="0" anchor="ctr">
             <a:noAutofit/>
           </a:bodyPr>
           <a:lstStyle/>
           <a:p>
             <a:pPr algn="ctr"/>
+            <a:endParaRPr/>
           </a:p>
         </p:txBody>
       </p:sp>
@@ -19284,7 +19425,7 @@
           <a:noFill/>
         </p:spPr>
         <p:txBody>
-          <a:bodyPr wrap="square" lIns="0" rIns="0" tIns="0" bIns="0" anchor="t">
+          <a:bodyPr wrap="square" lIns="0" tIns="0" rIns="0" bIns="0" anchor="t">
             <a:noAutofit/>
           </a:bodyPr>
           <a:lstStyle/>
@@ -19351,12 +19492,13 @@
           </a:fontRef>
         </p:style>
         <p:txBody>
-          <a:bodyPr rtlCol="0" anchor="ctr" wrap="square">
+          <a:bodyPr wrap="square" rtlCol="0" anchor="ctr">
             <a:noAutofit/>
           </a:bodyPr>
           <a:lstStyle/>
           <a:p>
             <a:pPr algn="ctr"/>
+            <a:endParaRPr/>
           </a:p>
         </p:txBody>
       </p:sp>
@@ -19377,7 +19519,7 @@
           <a:noFill/>
         </p:spPr>
         <p:txBody>
-          <a:bodyPr wrap="square" lIns="0" rIns="0" tIns="0" bIns="0" anchor="t">
+          <a:bodyPr wrap="square" lIns="0" tIns="0" rIns="0" bIns="0" anchor="t">
             <a:noAutofit/>
           </a:bodyPr>
           <a:lstStyle/>
@@ -19444,12 +19586,13 @@
           </a:fontRef>
         </p:style>
         <p:txBody>
-          <a:bodyPr rtlCol="0" anchor="ctr" wrap="square">
+          <a:bodyPr wrap="square" rtlCol="0" anchor="ctr">
             <a:noAutofit/>
           </a:bodyPr>
           <a:lstStyle/>
           <a:p>
             <a:pPr algn="ctr"/>
+            <a:endParaRPr/>
           </a:p>
         </p:txBody>
       </p:sp>
@@ -19470,7 +19613,7 @@
           <a:noFill/>
         </p:spPr>
         <p:txBody>
-          <a:bodyPr wrap="square" lIns="0" rIns="0" tIns="0" bIns="0" anchor="t">
+          <a:bodyPr wrap="square" lIns="0" tIns="0" rIns="0" bIns="0" anchor="t">
             <a:noAutofit/>
           </a:bodyPr>
           <a:lstStyle/>
@@ -19552,7 +19695,7 @@
           <a:noFill/>
         </p:spPr>
         <p:txBody>
-          <a:bodyPr wrap="square" lIns="0" rIns="0" tIns="0" bIns="0" anchor="t">
+          <a:bodyPr wrap="square" lIns="0" tIns="0" rIns="0" bIns="0" anchor="t">
             <a:noAutofit/>
           </a:bodyPr>
           <a:lstStyle/>
@@ -19599,7 +19742,7 @@
           <a:noFill/>
         </p:spPr>
         <p:txBody>
-          <a:bodyPr wrap="square" lIns="0" rIns="0" tIns="0" bIns="0" anchor="t">
+          <a:bodyPr wrap="square" lIns="0" tIns="0" rIns="0" bIns="0" anchor="t">
             <a:noAutofit/>
           </a:bodyPr>
           <a:lstStyle/>
@@ -19638,7 +19781,7 @@
 </file>
 
 <file path=ppt/slides/slide18.xml><?xml version="1.0" encoding="utf-8"?>
-<p:sld xmlns:a="http://schemas.openxmlformats.org/drawingml/2006/main" xmlns:p="http://schemas.openxmlformats.org/presentationml/2006/main" xmlns:r="http://schemas.openxmlformats.org/officeDocument/2006/relationships">
+<p:sld xmlns:a="http://schemas.openxmlformats.org/drawingml/2006/main" xmlns:r="http://schemas.openxmlformats.org/officeDocument/2006/relationships" xmlns:p="http://schemas.openxmlformats.org/presentationml/2006/main">
   <p:cSld>
     <p:spTree>
       <p:nvGrpSpPr>
@@ -19646,7 +19789,14 @@
         <p:cNvGrpSpPr/>
         <p:nvPr/>
       </p:nvGrpSpPr>
-      <p:grpSpPr/>
+      <p:grpSpPr>
+        <a:xfrm>
+          <a:off x="0" y="0"/>
+          <a:ext cx="0" cy="0"/>
+          <a:chOff x="0" y="0"/>
+          <a:chExt cx="0" cy="0"/>
+        </a:xfrm>
+      </p:grpSpPr>
       <p:cxnSp>
         <p:nvCxnSpPr>
           <p:cNvPr id="2" name="Connector 1"/>
@@ -19719,12 +19869,13 @@
           </a:fontRef>
         </p:style>
         <p:txBody>
-          <a:bodyPr rtlCol="0" anchor="ctr" wrap="square">
+          <a:bodyPr wrap="square" rtlCol="0" anchor="ctr">
             <a:noAutofit/>
           </a:bodyPr>
           <a:lstStyle/>
           <a:p>
             <a:pPr algn="ctr"/>
+            <a:endParaRPr/>
           </a:p>
         </p:txBody>
       </p:sp>
@@ -19745,7 +19896,7 @@
           <a:noFill/>
         </p:spPr>
         <p:txBody>
-          <a:bodyPr wrap="square" lIns="0" rIns="0" tIns="0" bIns="0" anchor="t">
+          <a:bodyPr wrap="square" lIns="0" tIns="0" rIns="0" bIns="0" anchor="t">
             <a:noAutofit/>
           </a:bodyPr>
           <a:lstStyle/>
@@ -19803,7 +19954,7 @@
           <a:noFill/>
         </p:spPr>
         <p:txBody>
-          <a:bodyPr wrap="square" lIns="0" rIns="0" tIns="0" bIns="0" anchor="t">
+          <a:bodyPr wrap="square" lIns="0" tIns="0" rIns="0" bIns="0" anchor="t">
             <a:noAutofit/>
           </a:bodyPr>
           <a:lstStyle/>
@@ -19850,7 +20001,7 @@
           <a:noFill/>
         </p:spPr>
         <p:txBody>
-          <a:bodyPr wrap="square" lIns="0" rIns="0" tIns="0" bIns="0" anchor="t">
+          <a:bodyPr wrap="square" lIns="0" tIns="0" rIns="0" bIns="0" anchor="t">
             <a:noAutofit/>
           </a:bodyPr>
           <a:lstStyle/>
@@ -19897,7 +20048,7 @@
           <a:noFill/>
         </p:spPr>
         <p:txBody>
-          <a:bodyPr wrap="square" lIns="0" rIns="0" tIns="0" bIns="0" anchor="t">
+          <a:bodyPr wrap="square" lIns="0" tIns="0" rIns="0" bIns="0" anchor="t">
             <a:noAutofit/>
           </a:bodyPr>
           <a:lstStyle/>
@@ -19944,7 +20095,7 @@
           <a:noFill/>
         </p:spPr>
         <p:txBody>
-          <a:bodyPr wrap="square" lIns="0" rIns="0" tIns="0" bIns="0" anchor="t">
+          <a:bodyPr wrap="square" lIns="0" tIns="0" rIns="0" bIns="0" anchor="t">
             <a:noAutofit/>
           </a:bodyPr>
           <a:lstStyle/>
@@ -19991,7 +20142,7 @@
           <a:noFill/>
         </p:spPr>
         <p:txBody>
-          <a:bodyPr wrap="square" lIns="0" rIns="0" tIns="0" bIns="0" anchor="t">
+          <a:bodyPr wrap="square" lIns="0" tIns="0" rIns="0" bIns="0" anchor="t">
             <a:noAutofit/>
           </a:bodyPr>
           <a:lstStyle/>
@@ -20038,7 +20189,7 @@
           <a:noFill/>
         </p:spPr>
         <p:txBody>
-          <a:bodyPr wrap="square" lIns="0" rIns="0" tIns="0" bIns="0" anchor="t">
+          <a:bodyPr wrap="square" lIns="0" tIns="0" rIns="0" bIns="0" anchor="t">
             <a:noAutofit/>
           </a:bodyPr>
           <a:lstStyle/>
@@ -20105,12 +20256,13 @@
           </a:fontRef>
         </p:style>
         <p:txBody>
-          <a:bodyPr rtlCol="0" anchor="ctr" wrap="square">
+          <a:bodyPr wrap="square" rtlCol="0" anchor="ctr">
             <a:noAutofit/>
           </a:bodyPr>
           <a:lstStyle/>
           <a:p>
             <a:pPr algn="ctr"/>
+            <a:endParaRPr/>
           </a:p>
         </p:txBody>
       </p:sp>
@@ -20131,7 +20283,7 @@
           <a:noFill/>
         </p:spPr>
         <p:txBody>
-          <a:bodyPr wrap="square" lIns="0" rIns="0" tIns="0" bIns="0" anchor="t">
+          <a:bodyPr wrap="square" lIns="0" tIns="0" rIns="0" bIns="0" anchor="t">
             <a:noAutofit/>
           </a:bodyPr>
           <a:lstStyle/>
@@ -20198,12 +20350,13 @@
           </a:fontRef>
         </p:style>
         <p:txBody>
-          <a:bodyPr rtlCol="0" anchor="ctr" wrap="square">
+          <a:bodyPr wrap="square" rtlCol="0" anchor="ctr">
             <a:noAutofit/>
           </a:bodyPr>
           <a:lstStyle/>
           <a:p>
             <a:pPr algn="ctr"/>
+            <a:endParaRPr/>
           </a:p>
         </p:txBody>
       </p:sp>
@@ -20224,7 +20377,7 @@
           <a:noFill/>
         </p:spPr>
         <p:txBody>
-          <a:bodyPr wrap="square" lIns="0" rIns="0" tIns="0" bIns="0" anchor="t">
+          <a:bodyPr wrap="square" lIns="0" tIns="0" rIns="0" bIns="0" anchor="t">
             <a:noAutofit/>
           </a:bodyPr>
           <a:lstStyle/>
@@ -20306,7 +20459,7 @@
           <a:noFill/>
         </p:spPr>
         <p:txBody>
-          <a:bodyPr wrap="square" lIns="0" rIns="0" tIns="0" bIns="0" anchor="t">
+          <a:bodyPr wrap="square" lIns="0" tIns="0" rIns="0" bIns="0" anchor="t">
             <a:noAutofit/>
           </a:bodyPr>
           <a:lstStyle/>
@@ -20353,7 +20506,7 @@
           <a:noFill/>
         </p:spPr>
         <p:txBody>
-          <a:bodyPr wrap="square" lIns="0" rIns="0" tIns="0" bIns="0" anchor="t">
+          <a:bodyPr wrap="square" lIns="0" tIns="0" rIns="0" bIns="0" anchor="t">
             <a:noAutofit/>
           </a:bodyPr>
           <a:lstStyle/>
@@ -20420,12 +20573,13 @@
           </a:fontRef>
         </p:style>
         <p:txBody>
-          <a:bodyPr rtlCol="0" anchor="ctr" wrap="square">
+          <a:bodyPr wrap="square" rtlCol="0" anchor="ctr">
             <a:noAutofit/>
           </a:bodyPr>
           <a:lstStyle/>
           <a:p>
             <a:pPr algn="ctr"/>
+            <a:endParaRPr/>
           </a:p>
         </p:txBody>
       </p:sp>
@@ -20446,7 +20600,7 @@
           <a:noFill/>
         </p:spPr>
         <p:txBody>
-          <a:bodyPr wrap="square" lIns="0" rIns="0" tIns="0" bIns="0" anchor="t">
+          <a:bodyPr wrap="square" lIns="0" tIns="0" rIns="0" bIns="0" anchor="t">
             <a:noAutofit/>
           </a:bodyPr>
           <a:lstStyle/>
@@ -20513,12 +20667,13 @@
           </a:fontRef>
         </p:style>
         <p:txBody>
-          <a:bodyPr rtlCol="0" anchor="ctr" wrap="square">
+          <a:bodyPr wrap="square" rtlCol="0" anchor="ctr">
             <a:noAutofit/>
           </a:bodyPr>
           <a:lstStyle/>
           <a:p>
             <a:pPr algn="ctr"/>
+            <a:endParaRPr/>
           </a:p>
         </p:txBody>
       </p:sp>
@@ -20539,7 +20694,7 @@
           <a:noFill/>
         </p:spPr>
         <p:txBody>
-          <a:bodyPr wrap="square" lIns="0" rIns="0" tIns="0" bIns="0" anchor="t">
+          <a:bodyPr wrap="square" lIns="0" tIns="0" rIns="0" bIns="0" anchor="t">
             <a:noAutofit/>
           </a:bodyPr>
           <a:lstStyle/>
@@ -20621,7 +20776,7 @@
           <a:noFill/>
         </p:spPr>
         <p:txBody>
-          <a:bodyPr wrap="square" lIns="0" rIns="0" tIns="0" bIns="0" anchor="t">
+          <a:bodyPr wrap="square" lIns="0" tIns="0" rIns="0" bIns="0" anchor="t">
             <a:noAutofit/>
           </a:bodyPr>
           <a:lstStyle/>
@@ -20668,7 +20823,7 @@
           <a:noFill/>
         </p:spPr>
         <p:txBody>
-          <a:bodyPr wrap="square" lIns="0" rIns="0" tIns="0" bIns="0" anchor="t">
+          <a:bodyPr wrap="square" lIns="0" tIns="0" rIns="0" bIns="0" anchor="t">
             <a:noAutofit/>
           </a:bodyPr>
           <a:lstStyle/>
@@ -20735,12 +20890,13 @@
           </a:fontRef>
         </p:style>
         <p:txBody>
-          <a:bodyPr rtlCol="0" anchor="ctr" wrap="square">
+          <a:bodyPr wrap="square" rtlCol="0" anchor="ctr">
             <a:noAutofit/>
           </a:bodyPr>
           <a:lstStyle/>
           <a:p>
             <a:pPr algn="ctr"/>
+            <a:endParaRPr/>
           </a:p>
         </p:txBody>
       </p:sp>
@@ -20761,7 +20917,7 @@
           <a:noFill/>
         </p:spPr>
         <p:txBody>
-          <a:bodyPr wrap="square" lIns="0" rIns="0" tIns="0" bIns="0" anchor="t">
+          <a:bodyPr wrap="square" lIns="0" tIns="0" rIns="0" bIns="0" anchor="t">
             <a:noAutofit/>
           </a:bodyPr>
           <a:lstStyle/>
@@ -20828,12 +20984,13 @@
           </a:fontRef>
         </p:style>
         <p:txBody>
-          <a:bodyPr rtlCol="0" anchor="ctr" wrap="square">
+          <a:bodyPr wrap="square" rtlCol="0" anchor="ctr">
             <a:noAutofit/>
           </a:bodyPr>
           <a:lstStyle/>
           <a:p>
             <a:pPr algn="ctr"/>
+            <a:endParaRPr/>
           </a:p>
         </p:txBody>
       </p:sp>
@@ -20854,7 +21011,7 @@
           <a:noFill/>
         </p:spPr>
         <p:txBody>
-          <a:bodyPr wrap="square" lIns="0" rIns="0" tIns="0" bIns="0" anchor="t">
+          <a:bodyPr wrap="square" lIns="0" tIns="0" rIns="0" bIns="0" anchor="t">
             <a:noAutofit/>
           </a:bodyPr>
           <a:lstStyle/>
@@ -20901,7 +21058,7 @@
           <a:noFill/>
         </p:spPr>
         <p:txBody>
-          <a:bodyPr wrap="square" lIns="0" rIns="0" tIns="0" bIns="0" anchor="t">
+          <a:bodyPr wrap="square" lIns="0" tIns="0" rIns="0" bIns="0" anchor="t">
             <a:noAutofit/>
           </a:bodyPr>
           <a:lstStyle/>
@@ -20951,7 +21108,7 @@
 </file>
 
 <file path=ppt/slides/slide19.xml><?xml version="1.0" encoding="utf-8"?>
-<p:sld xmlns:a="http://schemas.openxmlformats.org/drawingml/2006/main" xmlns:p="http://schemas.openxmlformats.org/presentationml/2006/main" xmlns:r="http://schemas.openxmlformats.org/officeDocument/2006/relationships">
+<p:sld xmlns:a="http://schemas.openxmlformats.org/drawingml/2006/main" xmlns:r="http://schemas.openxmlformats.org/officeDocument/2006/relationships" xmlns:p="http://schemas.openxmlformats.org/presentationml/2006/main">
   <p:cSld>
     <p:spTree>
       <p:nvGrpSpPr>
@@ -20959,7 +21116,14 @@
         <p:cNvGrpSpPr/>
         <p:nvPr/>
       </p:nvGrpSpPr>
-      <p:grpSpPr/>
+      <p:grpSpPr>
+        <a:xfrm>
+          <a:off x="0" y="0"/>
+          <a:ext cx="0" cy="0"/>
+          <a:chOff x="0" y="0"/>
+          <a:chExt cx="0" cy="0"/>
+        </a:xfrm>
+      </p:grpSpPr>
       <p:cxnSp>
         <p:nvCxnSpPr>
           <p:cNvPr id="2" name="Connector 1"/>
@@ -21032,12 +21196,13 @@
           </a:fontRef>
         </p:style>
         <p:txBody>
-          <a:bodyPr rtlCol="0" anchor="ctr" wrap="square">
+          <a:bodyPr wrap="square" rtlCol="0" anchor="ctr">
             <a:noAutofit/>
           </a:bodyPr>
           <a:lstStyle/>
           <a:p>
             <a:pPr algn="ctr"/>
+            <a:endParaRPr/>
           </a:p>
         </p:txBody>
       </p:sp>
@@ -21058,7 +21223,7 @@
           <a:noFill/>
         </p:spPr>
         <p:txBody>
-          <a:bodyPr wrap="square" lIns="0" rIns="0" tIns="0" bIns="0" anchor="t">
+          <a:bodyPr wrap="square" lIns="0" tIns="0" rIns="0" bIns="0" anchor="t">
             <a:noAutofit/>
           </a:bodyPr>
           <a:lstStyle/>
@@ -21116,7 +21281,7 @@
           <a:noFill/>
         </p:spPr>
         <p:txBody>
-          <a:bodyPr wrap="square" lIns="0" rIns="0" tIns="0" bIns="0" anchor="t">
+          <a:bodyPr wrap="square" lIns="0" tIns="0" rIns="0" bIns="0" anchor="t">
             <a:noAutofit/>
           </a:bodyPr>
           <a:lstStyle/>
@@ -21163,7 +21328,7 @@
           <a:noFill/>
         </p:spPr>
         <p:txBody>
-          <a:bodyPr wrap="square" lIns="0" rIns="0" tIns="0" bIns="0" anchor="t">
+          <a:bodyPr wrap="square" lIns="0" tIns="0" rIns="0" bIns="0" anchor="t">
             <a:noAutofit/>
           </a:bodyPr>
           <a:lstStyle/>
@@ -21210,7 +21375,7 @@
           <a:noFill/>
         </p:spPr>
         <p:txBody>
-          <a:bodyPr wrap="square" lIns="0" rIns="0" tIns="0" bIns="0" anchor="t">
+          <a:bodyPr wrap="square" lIns="0" tIns="0" rIns="0" bIns="0" anchor="t">
             <a:noAutofit/>
           </a:bodyPr>
           <a:lstStyle/>
@@ -21257,7 +21422,7 @@
           <a:noFill/>
         </p:spPr>
         <p:txBody>
-          <a:bodyPr wrap="square" lIns="0" rIns="0" tIns="0" bIns="0" anchor="t">
+          <a:bodyPr wrap="square" lIns="0" tIns="0" rIns="0" bIns="0" anchor="t">
             <a:noAutofit/>
           </a:bodyPr>
           <a:lstStyle/>
@@ -21304,7 +21469,7 @@
           <a:noFill/>
         </p:spPr>
         <p:txBody>
-          <a:bodyPr wrap="square" lIns="0" rIns="0" tIns="0" bIns="0" anchor="t">
+          <a:bodyPr wrap="square" lIns="0" tIns="0" rIns="0" bIns="0" anchor="t">
             <a:noAutofit/>
           </a:bodyPr>
           <a:lstStyle/>
@@ -21351,7 +21516,7 @@
           <a:noFill/>
         </p:spPr>
         <p:txBody>
-          <a:bodyPr wrap="square" lIns="0" rIns="0" tIns="0" bIns="0" anchor="t">
+          <a:bodyPr wrap="square" lIns="0" tIns="0" rIns="0" bIns="0" anchor="t">
             <a:noAutofit/>
           </a:bodyPr>
           <a:lstStyle/>
@@ -21418,12 +21583,13 @@
           </a:fontRef>
         </p:style>
         <p:txBody>
-          <a:bodyPr rtlCol="0" anchor="ctr" wrap="square">
+          <a:bodyPr wrap="square" rtlCol="0" anchor="ctr">
             <a:noAutofit/>
           </a:bodyPr>
           <a:lstStyle/>
           <a:p>
             <a:pPr algn="ctr"/>
+            <a:endParaRPr/>
           </a:p>
         </p:txBody>
       </p:sp>
@@ -21444,7 +21610,7 @@
           <a:noFill/>
         </p:spPr>
         <p:txBody>
-          <a:bodyPr wrap="square" lIns="0" rIns="0" tIns="0" bIns="0" anchor="t">
+          <a:bodyPr wrap="square" lIns="0" tIns="0" rIns="0" bIns="0" anchor="t">
             <a:noAutofit/>
           </a:bodyPr>
           <a:lstStyle/>
@@ -21511,12 +21677,13 @@
           </a:fontRef>
         </p:style>
         <p:txBody>
-          <a:bodyPr rtlCol="0" anchor="ctr" wrap="square">
+          <a:bodyPr wrap="square" rtlCol="0" anchor="ctr">
             <a:noAutofit/>
           </a:bodyPr>
           <a:lstStyle/>
           <a:p>
             <a:pPr algn="ctr"/>
+            <a:endParaRPr/>
           </a:p>
         </p:txBody>
       </p:sp>
@@ -21537,7 +21704,7 @@
           <a:noFill/>
         </p:spPr>
         <p:txBody>
-          <a:bodyPr wrap="square" lIns="0" rIns="0" tIns="0" bIns="0" anchor="t">
+          <a:bodyPr wrap="square" lIns="0" tIns="0" rIns="0" bIns="0" anchor="t">
             <a:noAutofit/>
           </a:bodyPr>
           <a:lstStyle/>
@@ -21619,7 +21786,7 @@
           <a:noFill/>
         </p:spPr>
         <p:txBody>
-          <a:bodyPr wrap="square" lIns="0" rIns="0" tIns="0" bIns="0" anchor="t">
+          <a:bodyPr wrap="square" lIns="0" tIns="0" rIns="0" bIns="0" anchor="t">
             <a:noAutofit/>
           </a:bodyPr>
           <a:lstStyle/>
@@ -21666,7 +21833,7 @@
           <a:noFill/>
         </p:spPr>
         <p:txBody>
-          <a:bodyPr wrap="square" lIns="0" rIns="0" tIns="0" bIns="0" anchor="t">
+          <a:bodyPr wrap="square" lIns="0" tIns="0" rIns="0" bIns="0" anchor="t">
             <a:noAutofit/>
           </a:bodyPr>
           <a:lstStyle/>
@@ -21733,12 +21900,13 @@
           </a:fontRef>
         </p:style>
         <p:txBody>
-          <a:bodyPr rtlCol="0" anchor="ctr" wrap="square">
+          <a:bodyPr wrap="square" rtlCol="0" anchor="ctr">
             <a:noAutofit/>
           </a:bodyPr>
           <a:lstStyle/>
           <a:p>
             <a:pPr algn="ctr"/>
+            <a:endParaRPr/>
           </a:p>
         </p:txBody>
       </p:sp>
@@ -21759,7 +21927,7 @@
           <a:noFill/>
         </p:spPr>
         <p:txBody>
-          <a:bodyPr wrap="square" lIns="0" rIns="0" tIns="0" bIns="0" anchor="t">
+          <a:bodyPr wrap="square" lIns="0" tIns="0" rIns="0" bIns="0" anchor="t">
             <a:noAutofit/>
           </a:bodyPr>
           <a:lstStyle/>
@@ -21826,12 +21994,13 @@
           </a:fontRef>
         </p:style>
         <p:txBody>
-          <a:bodyPr rtlCol="0" anchor="ctr" wrap="square">
+          <a:bodyPr wrap="square" rtlCol="0" anchor="ctr">
             <a:noAutofit/>
           </a:bodyPr>
           <a:lstStyle/>
           <a:p>
             <a:pPr algn="ctr"/>
+            <a:endParaRPr/>
           </a:p>
         </p:txBody>
       </p:sp>
@@ -21852,7 +22021,7 @@
           <a:noFill/>
         </p:spPr>
         <p:txBody>
-          <a:bodyPr wrap="square" lIns="0" rIns="0" tIns="0" bIns="0" anchor="t">
+          <a:bodyPr wrap="square" lIns="0" tIns="0" rIns="0" bIns="0" anchor="t">
             <a:noAutofit/>
           </a:bodyPr>
           <a:lstStyle/>
@@ -21919,12 +22088,13 @@
           </a:fontRef>
         </p:style>
         <p:txBody>
-          <a:bodyPr rtlCol="0" anchor="ctr" wrap="square">
+          <a:bodyPr wrap="square" rtlCol="0" anchor="ctr">
             <a:noAutofit/>
           </a:bodyPr>
           <a:lstStyle/>
           <a:p>
             <a:pPr algn="ctr"/>
+            <a:endParaRPr/>
           </a:p>
         </p:txBody>
       </p:sp>
@@ -21945,7 +22115,7 @@
           <a:noFill/>
         </p:spPr>
         <p:txBody>
-          <a:bodyPr wrap="square" lIns="0" rIns="0" tIns="0" bIns="0" anchor="t">
+          <a:bodyPr wrap="square" lIns="0" tIns="0" rIns="0" bIns="0" anchor="t">
             <a:noAutofit/>
           </a:bodyPr>
           <a:lstStyle/>
@@ -22027,7 +22197,7 @@
           <a:noFill/>
         </p:spPr>
         <p:txBody>
-          <a:bodyPr wrap="square" lIns="0" rIns="0" tIns="0" bIns="0" anchor="t">
+          <a:bodyPr wrap="square" lIns="0" tIns="0" rIns="0" bIns="0" anchor="t">
             <a:noAutofit/>
           </a:bodyPr>
           <a:lstStyle/>
@@ -22085,7 +22255,7 @@
           <a:noFill/>
         </p:spPr>
         <p:txBody>
-          <a:bodyPr wrap="square" lIns="0" rIns="0" tIns="0" bIns="0" anchor="t">
+          <a:bodyPr wrap="square" lIns="0" tIns="0" rIns="0" bIns="0" anchor="t">
             <a:noAutofit/>
           </a:bodyPr>
           <a:lstStyle/>
@@ -22135,7 +22305,7 @@
 </file>
 
 <file path=ppt/slides/slide2.xml><?xml version="1.0" encoding="utf-8"?>
-<p:sld xmlns:a="http://schemas.openxmlformats.org/drawingml/2006/main" xmlns:p="http://schemas.openxmlformats.org/presentationml/2006/main" xmlns:r="http://schemas.openxmlformats.org/officeDocument/2006/relationships">
+<p:sld xmlns:a="http://schemas.openxmlformats.org/drawingml/2006/main" xmlns:r="http://schemas.openxmlformats.org/officeDocument/2006/relationships" xmlns:p="http://schemas.openxmlformats.org/presentationml/2006/main">
   <p:cSld>
     <p:spTree>
       <p:nvGrpSpPr>
@@ -22143,7 +22313,14 @@
         <p:cNvGrpSpPr/>
         <p:nvPr/>
       </p:nvGrpSpPr>
-      <p:grpSpPr/>
+      <p:grpSpPr>
+        <a:xfrm>
+          <a:off x="0" y="0"/>
+          <a:ext cx="0" cy="0"/>
+          <a:chOff x="0" y="0"/>
+          <a:chExt cx="0" cy="0"/>
+        </a:xfrm>
+      </p:grpSpPr>
       <p:cxnSp>
         <p:nvCxnSpPr>
           <p:cNvPr id="2" name="Connector 1"/>
@@ -22216,12 +22393,13 @@
           </a:fontRef>
         </p:style>
         <p:txBody>
-          <a:bodyPr rtlCol="0" anchor="ctr" wrap="square">
+          <a:bodyPr wrap="square" rtlCol="0" anchor="ctr">
             <a:noAutofit/>
           </a:bodyPr>
           <a:lstStyle/>
           <a:p>
             <a:pPr algn="ctr"/>
+            <a:endParaRPr/>
           </a:p>
         </p:txBody>
       </p:sp>
@@ -22242,7 +22420,7 @@
           <a:noFill/>
         </p:spPr>
         <p:txBody>
-          <a:bodyPr wrap="square" lIns="0" rIns="0" tIns="0" bIns="0" anchor="t">
+          <a:bodyPr wrap="square" lIns="0" tIns="0" rIns="0" bIns="0" anchor="t">
             <a:noAutofit/>
           </a:bodyPr>
           <a:lstStyle/>
@@ -22300,7 +22478,7 @@
           <a:noFill/>
         </p:spPr>
         <p:txBody>
-          <a:bodyPr wrap="square" lIns="0" rIns="0" tIns="0" bIns="0" anchor="t">
+          <a:bodyPr wrap="square" lIns="0" tIns="0" rIns="0" bIns="0" anchor="t">
             <a:noAutofit/>
           </a:bodyPr>
           <a:lstStyle/>
@@ -22347,7 +22525,7 @@
           <a:noFill/>
         </p:spPr>
         <p:txBody>
-          <a:bodyPr wrap="square" lIns="0" rIns="0" tIns="0" bIns="0" anchor="t">
+          <a:bodyPr wrap="square" lIns="0" tIns="0" rIns="0" bIns="0" anchor="t">
             <a:noAutofit/>
           </a:bodyPr>
           <a:lstStyle/>
@@ -22394,7 +22572,7 @@
           <a:noFill/>
         </p:spPr>
         <p:txBody>
-          <a:bodyPr wrap="square" lIns="0" rIns="0" tIns="0" bIns="0" anchor="t">
+          <a:bodyPr wrap="square" lIns="0" tIns="0" rIns="0" bIns="0" anchor="t">
             <a:noAutofit/>
           </a:bodyPr>
           <a:lstStyle/>
@@ -22441,7 +22619,7 @@
           <a:noFill/>
         </p:spPr>
         <p:txBody>
-          <a:bodyPr wrap="square" lIns="0" rIns="0" tIns="0" bIns="0" anchor="t">
+          <a:bodyPr wrap="square" lIns="0" tIns="0" rIns="0" bIns="0" anchor="t">
             <a:noAutofit/>
           </a:bodyPr>
           <a:lstStyle/>
@@ -22488,7 +22666,7 @@
           <a:noFill/>
         </p:spPr>
         <p:txBody>
-          <a:bodyPr wrap="square" lIns="0" rIns="0" tIns="0" bIns="0" anchor="t">
+          <a:bodyPr wrap="square" lIns="0" tIns="0" rIns="0" bIns="0" anchor="t">
             <a:noAutofit/>
           </a:bodyPr>
           <a:lstStyle/>
@@ -22535,7 +22713,7 @@
           <a:noFill/>
         </p:spPr>
         <p:txBody>
-          <a:bodyPr wrap="square" lIns="0" rIns="0" tIns="0" bIns="0" anchor="t">
+          <a:bodyPr wrap="square" lIns="0" tIns="0" rIns="0" bIns="0" anchor="t">
             <a:noAutofit/>
           </a:bodyPr>
           <a:lstStyle/>
@@ -22582,7 +22760,7 @@
           <a:noFill/>
         </p:spPr>
         <p:txBody>
-          <a:bodyPr wrap="square" lIns="0" rIns="0" tIns="0" bIns="0" anchor="t">
+          <a:bodyPr wrap="square" lIns="0" tIns="0" rIns="0" bIns="0" anchor="t">
             <a:noAutofit/>
           </a:bodyPr>
           <a:lstStyle/>
@@ -22664,7 +22842,7 @@
           <a:noFill/>
         </p:spPr>
         <p:txBody>
-          <a:bodyPr wrap="square" lIns="0" rIns="0" tIns="0" bIns="0" anchor="t">
+          <a:bodyPr wrap="square" lIns="0" tIns="0" rIns="0" bIns="0" anchor="t">
             <a:noAutofit/>
           </a:bodyPr>
           <a:lstStyle/>
@@ -22711,7 +22889,7 @@
           <a:noFill/>
         </p:spPr>
         <p:txBody>
-          <a:bodyPr wrap="square" lIns="0" rIns="0" tIns="0" bIns="0" anchor="t">
+          <a:bodyPr wrap="square" lIns="0" tIns="0" rIns="0" bIns="0" anchor="t">
             <a:noAutofit/>
           </a:bodyPr>
           <a:lstStyle/>
@@ -22758,7 +22936,7 @@
           <a:noFill/>
         </p:spPr>
         <p:txBody>
-          <a:bodyPr wrap="square" lIns="0" rIns="0" tIns="0" bIns="0" anchor="t">
+          <a:bodyPr wrap="square" lIns="0" tIns="0" rIns="0" bIns="0" anchor="t">
             <a:noAutofit/>
           </a:bodyPr>
           <a:lstStyle/>
@@ -22840,7 +23018,7 @@
           <a:noFill/>
         </p:spPr>
         <p:txBody>
-          <a:bodyPr wrap="square" lIns="0" rIns="0" tIns="0" bIns="0" anchor="t">
+          <a:bodyPr wrap="square" lIns="0" tIns="0" rIns="0" bIns="0" anchor="t">
             <a:noAutofit/>
           </a:bodyPr>
           <a:lstStyle/>
@@ -22887,7 +23065,7 @@
           <a:noFill/>
         </p:spPr>
         <p:txBody>
-          <a:bodyPr wrap="square" lIns="0" rIns="0" tIns="0" bIns="0" anchor="t">
+          <a:bodyPr wrap="square" lIns="0" tIns="0" rIns="0" bIns="0" anchor="t">
             <a:noAutofit/>
           </a:bodyPr>
           <a:lstStyle/>
@@ -22934,7 +23112,7 @@
           <a:noFill/>
         </p:spPr>
         <p:txBody>
-          <a:bodyPr wrap="square" lIns="0" rIns="0" tIns="0" bIns="0" anchor="t">
+          <a:bodyPr wrap="square" lIns="0" tIns="0" rIns="0" bIns="0" anchor="t">
             <a:noAutofit/>
           </a:bodyPr>
           <a:lstStyle/>
@@ -23016,7 +23194,7 @@
           <a:noFill/>
         </p:spPr>
         <p:txBody>
-          <a:bodyPr wrap="square" lIns="0" rIns="0" tIns="0" bIns="0" anchor="t">
+          <a:bodyPr wrap="square" lIns="0" tIns="0" rIns="0" bIns="0" anchor="t">
             <a:noAutofit/>
           </a:bodyPr>
           <a:lstStyle/>
@@ -23063,7 +23241,7 @@
           <a:noFill/>
         </p:spPr>
         <p:txBody>
-          <a:bodyPr wrap="square" lIns="0" rIns="0" tIns="0" bIns="0" anchor="t">
+          <a:bodyPr wrap="square" lIns="0" tIns="0" rIns="0" bIns="0" anchor="t">
             <a:noAutofit/>
           </a:bodyPr>
           <a:lstStyle/>
@@ -23110,7 +23288,7 @@
           <a:noFill/>
         </p:spPr>
         <p:txBody>
-          <a:bodyPr wrap="square" lIns="0" rIns="0" tIns="0" bIns="0" anchor="t">
+          <a:bodyPr wrap="square" lIns="0" tIns="0" rIns="0" bIns="0" anchor="t">
             <a:noAutofit/>
           </a:bodyPr>
           <a:lstStyle/>
@@ -23184,7 +23362,7 @@
 </file>
 
 <file path=ppt/slides/slide20.xml><?xml version="1.0" encoding="utf-8"?>
-<p:sld xmlns:a="http://schemas.openxmlformats.org/drawingml/2006/main" xmlns:p="http://schemas.openxmlformats.org/presentationml/2006/main" xmlns:r="http://schemas.openxmlformats.org/officeDocument/2006/relationships">
+<p:sld xmlns:a="http://schemas.openxmlformats.org/drawingml/2006/main" xmlns:r="http://schemas.openxmlformats.org/officeDocument/2006/relationships" xmlns:p="http://schemas.openxmlformats.org/presentationml/2006/main">
   <p:cSld>
     <p:spTree>
       <p:nvGrpSpPr>
@@ -23192,7 +23370,14 @@
         <p:cNvGrpSpPr/>
         <p:nvPr/>
       </p:nvGrpSpPr>
-      <p:grpSpPr/>
+      <p:grpSpPr>
+        <a:xfrm>
+          <a:off x="0" y="0"/>
+          <a:ext cx="0" cy="0"/>
+          <a:chOff x="0" y="0"/>
+          <a:chExt cx="0" cy="0"/>
+        </a:xfrm>
+      </p:grpSpPr>
       <p:sp>
         <p:nvSpPr>
           <p:cNvPr id="2" name="Rectangle 1"/>
@@ -23230,12 +23415,13 @@
           </a:fontRef>
         </p:style>
         <p:txBody>
-          <a:bodyPr rtlCol="0" anchor="ctr" wrap="square">
+          <a:bodyPr wrap="square" rtlCol="0" anchor="ctr">
             <a:noAutofit/>
           </a:bodyPr>
           <a:lstStyle/>
           <a:p>
             <a:pPr algn="ctr"/>
+            <a:endParaRPr/>
           </a:p>
         </p:txBody>
       </p:sp>
@@ -23276,12 +23462,13 @@
           </a:fontRef>
         </p:style>
         <p:txBody>
-          <a:bodyPr rtlCol="0" anchor="ctr" wrap="square">
+          <a:bodyPr wrap="square" rtlCol="0" anchor="ctr">
             <a:noAutofit/>
           </a:bodyPr>
           <a:lstStyle/>
           <a:p>
             <a:pPr algn="ctr"/>
+            <a:endParaRPr/>
           </a:p>
         </p:txBody>
       </p:sp>
@@ -23302,7 +23489,7 @@
           <a:noFill/>
         </p:spPr>
         <p:txBody>
-          <a:bodyPr wrap="square" lIns="0" rIns="0" tIns="0" bIns="0" anchor="ctr">
+          <a:bodyPr wrap="square" lIns="0" tIns="0" rIns="0" bIns="0" anchor="ctr">
             <a:noAutofit/>
           </a:bodyPr>
           <a:lstStyle/>
@@ -23349,7 +23536,7 @@
           <a:noFill/>
         </p:spPr>
         <p:txBody>
-          <a:bodyPr wrap="square" lIns="0" rIns="0" tIns="0" bIns="0" anchor="ctr">
+          <a:bodyPr wrap="square" lIns="0" tIns="0" rIns="0" bIns="0" anchor="ctr">
             <a:noAutofit/>
           </a:bodyPr>
           <a:lstStyle/>
@@ -23420,7 +23607,7 @@
           <a:noFill/>
         </p:spPr>
         <p:txBody>
-          <a:bodyPr wrap="square" lIns="0" rIns="0" tIns="0" bIns="0" anchor="t">
+          <a:bodyPr wrap="square" lIns="0" tIns="0" rIns="0" bIns="0" anchor="t">
             <a:noAutofit/>
           </a:bodyPr>
           <a:lstStyle/>
@@ -23467,7 +23654,7 @@
           <a:noFill/>
         </p:spPr>
         <p:txBody>
-          <a:bodyPr wrap="square" lIns="0" rIns="0" tIns="0" bIns="0" anchor="t">
+          <a:bodyPr wrap="square" lIns="0" tIns="0" rIns="0" bIns="0" anchor="t">
             <a:noAutofit/>
           </a:bodyPr>
           <a:lstStyle/>
@@ -23573,7 +23760,7 @@
           <a:noFill/>
         </p:spPr>
         <p:txBody>
-          <a:bodyPr wrap="square" lIns="0" rIns="0" tIns="0" bIns="0" anchor="t">
+          <a:bodyPr wrap="square" lIns="0" tIns="0" rIns="0" bIns="0" anchor="t">
             <a:noAutofit/>
           </a:bodyPr>
           <a:lstStyle/>
@@ -23620,7 +23807,7 @@
           <a:noFill/>
         </p:spPr>
         <p:txBody>
-          <a:bodyPr wrap="square" lIns="0" rIns="0" tIns="0" bIns="0" anchor="t">
+          <a:bodyPr wrap="square" lIns="0" tIns="0" rIns="0" bIns="0" anchor="t">
             <a:noAutofit/>
           </a:bodyPr>
           <a:lstStyle/>
@@ -23667,7 +23854,7 @@
           <a:noFill/>
         </p:spPr>
         <p:txBody>
-          <a:bodyPr wrap="square" lIns="0" rIns="0" tIns="0" bIns="0" anchor="t">
+          <a:bodyPr wrap="square" lIns="0" tIns="0" rIns="0" bIns="0" anchor="t">
             <a:noAutofit/>
           </a:bodyPr>
           <a:lstStyle/>
@@ -23714,7 +23901,7 @@
           <a:noFill/>
         </p:spPr>
         <p:txBody>
-          <a:bodyPr wrap="square" lIns="0" rIns="0" tIns="0" bIns="0" anchor="t">
+          <a:bodyPr wrap="square" lIns="0" tIns="0" rIns="0" bIns="0" anchor="t">
             <a:noAutofit/>
           </a:bodyPr>
           <a:lstStyle/>
@@ -23761,7 +23948,7 @@
           <a:noFill/>
         </p:spPr>
         <p:txBody>
-          <a:bodyPr wrap="square" lIns="0" rIns="0" tIns="0" bIns="0" anchor="t">
+          <a:bodyPr wrap="square" lIns="0" tIns="0" rIns="0" bIns="0" anchor="t">
             <a:noAutofit/>
           </a:bodyPr>
           <a:lstStyle/>
@@ -23808,7 +23995,7 @@
           <a:noFill/>
         </p:spPr>
         <p:txBody>
-          <a:bodyPr wrap="square" lIns="0" rIns="0" tIns="0" bIns="0" anchor="t">
+          <a:bodyPr wrap="square" lIns="0" tIns="0" rIns="0" bIns="0" anchor="t">
             <a:noAutofit/>
           </a:bodyPr>
           <a:lstStyle/>
@@ -23855,7 +24042,7 @@
           <a:noFill/>
         </p:spPr>
         <p:txBody>
-          <a:bodyPr wrap="square" lIns="0" rIns="0" tIns="0" bIns="0" anchor="t">
+          <a:bodyPr wrap="square" lIns="0" tIns="0" rIns="0" bIns="0" anchor="t">
             <a:noAutofit/>
           </a:bodyPr>
           <a:lstStyle/>
@@ -23894,7 +24081,7 @@
 </file>
 
 <file path=ppt/slides/slide3.xml><?xml version="1.0" encoding="utf-8"?>
-<p:sld xmlns:a="http://schemas.openxmlformats.org/drawingml/2006/main" xmlns:p="http://schemas.openxmlformats.org/presentationml/2006/main" xmlns:r="http://schemas.openxmlformats.org/officeDocument/2006/relationships">
+<p:sld xmlns:a="http://schemas.openxmlformats.org/drawingml/2006/main" xmlns:r="http://schemas.openxmlformats.org/officeDocument/2006/relationships" xmlns:p="http://schemas.openxmlformats.org/presentationml/2006/main">
   <p:cSld>
     <p:spTree>
       <p:nvGrpSpPr>
@@ -23902,7 +24089,14 @@
         <p:cNvGrpSpPr/>
         <p:nvPr/>
       </p:nvGrpSpPr>
-      <p:grpSpPr/>
+      <p:grpSpPr>
+        <a:xfrm>
+          <a:off x="0" y="0"/>
+          <a:ext cx="0" cy="0"/>
+          <a:chOff x="0" y="0"/>
+          <a:chExt cx="0" cy="0"/>
+        </a:xfrm>
+      </p:grpSpPr>
       <p:sp>
         <p:nvSpPr>
           <p:cNvPr id="2" name="Rectangle 1"/>
@@ -23940,12 +24134,13 @@
           </a:fontRef>
         </p:style>
         <p:txBody>
-          <a:bodyPr rtlCol="0" anchor="ctr" wrap="square">
+          <a:bodyPr wrap="square" rtlCol="0" anchor="ctr">
             <a:noAutofit/>
           </a:bodyPr>
           <a:lstStyle/>
           <a:p>
             <a:pPr algn="ctr"/>
+            <a:endParaRPr/>
           </a:p>
         </p:txBody>
       </p:sp>
@@ -23986,12 +24181,13 @@
           </a:fontRef>
         </p:style>
         <p:txBody>
-          <a:bodyPr rtlCol="0" anchor="ctr" wrap="square">
+          <a:bodyPr wrap="square" rtlCol="0" anchor="ctr">
             <a:noAutofit/>
           </a:bodyPr>
           <a:lstStyle/>
           <a:p>
             <a:pPr algn="ctr"/>
+            <a:endParaRPr/>
           </a:p>
         </p:txBody>
       </p:sp>
@@ -24012,7 +24208,7 @@
           <a:noFill/>
         </p:spPr>
         <p:txBody>
-          <a:bodyPr wrap="square" lIns="0" rIns="0" tIns="0" bIns="0" anchor="ctr">
+          <a:bodyPr wrap="square" lIns="0" tIns="0" rIns="0" bIns="0" anchor="ctr">
             <a:noAutofit/>
           </a:bodyPr>
           <a:lstStyle/>
@@ -24059,7 +24255,7 @@
           <a:noFill/>
         </p:spPr>
         <p:txBody>
-          <a:bodyPr wrap="square" lIns="0" rIns="0" tIns="0" bIns="0" anchor="ctr">
+          <a:bodyPr wrap="square" lIns="0" tIns="0" rIns="0" bIns="0" anchor="ctr">
             <a:noAutofit/>
           </a:bodyPr>
           <a:lstStyle/>
@@ -24130,7 +24326,7 @@
           <a:noFill/>
         </p:spPr>
         <p:txBody>
-          <a:bodyPr wrap="square" lIns="0" rIns="0" tIns="0" bIns="0" anchor="t">
+          <a:bodyPr wrap="square" lIns="0" tIns="0" rIns="0" bIns="0" anchor="t">
             <a:noAutofit/>
           </a:bodyPr>
           <a:lstStyle/>
@@ -24177,7 +24373,7 @@
           <a:noFill/>
         </p:spPr>
         <p:txBody>
-          <a:bodyPr wrap="square" lIns="0" rIns="0" tIns="0" bIns="0" anchor="t">
+          <a:bodyPr wrap="square" lIns="0" tIns="0" rIns="0" bIns="0" anchor="t">
             <a:noAutofit/>
           </a:bodyPr>
           <a:lstStyle/>
@@ -24283,7 +24479,7 @@
           <a:noFill/>
         </p:spPr>
         <p:txBody>
-          <a:bodyPr wrap="square" lIns="0" rIns="0" tIns="0" bIns="0" anchor="t">
+          <a:bodyPr wrap="square" lIns="0" tIns="0" rIns="0" bIns="0" anchor="t">
             <a:noAutofit/>
           </a:bodyPr>
           <a:lstStyle/>
@@ -24322,7 +24518,7 @@
 </file>
 
 <file path=ppt/slides/slide4.xml><?xml version="1.0" encoding="utf-8"?>
-<p:sld xmlns:a="http://schemas.openxmlformats.org/drawingml/2006/main" xmlns:p="http://schemas.openxmlformats.org/presentationml/2006/main" xmlns:r="http://schemas.openxmlformats.org/officeDocument/2006/relationships">
+<p:sld xmlns:a="http://schemas.openxmlformats.org/drawingml/2006/main" xmlns:r="http://schemas.openxmlformats.org/officeDocument/2006/relationships" xmlns:p="http://schemas.openxmlformats.org/presentationml/2006/main">
   <p:cSld>
     <p:spTree>
       <p:nvGrpSpPr>
@@ -24330,7 +24526,14 @@
         <p:cNvGrpSpPr/>
         <p:nvPr/>
       </p:nvGrpSpPr>
-      <p:grpSpPr/>
+      <p:grpSpPr>
+        <a:xfrm>
+          <a:off x="0" y="0"/>
+          <a:ext cx="0" cy="0"/>
+          <a:chOff x="0" y="0"/>
+          <a:chExt cx="0" cy="0"/>
+        </a:xfrm>
+      </p:grpSpPr>
       <p:cxnSp>
         <p:nvCxnSpPr>
           <p:cNvPr id="2" name="Connector 1"/>
@@ -24403,12 +24606,13 @@
           </a:fontRef>
         </p:style>
         <p:txBody>
-          <a:bodyPr rtlCol="0" anchor="ctr" wrap="square">
+          <a:bodyPr wrap="square" rtlCol="0" anchor="ctr">
             <a:noAutofit/>
           </a:bodyPr>
           <a:lstStyle/>
           <a:p>
             <a:pPr algn="ctr"/>
+            <a:endParaRPr/>
           </a:p>
         </p:txBody>
       </p:sp>
@@ -24429,7 +24633,7 @@
           <a:noFill/>
         </p:spPr>
         <p:txBody>
-          <a:bodyPr wrap="square" lIns="0" rIns="0" tIns="0" bIns="0" anchor="t">
+          <a:bodyPr wrap="square" lIns="0" tIns="0" rIns="0" bIns="0" anchor="t">
             <a:noAutofit/>
           </a:bodyPr>
           <a:lstStyle/>
@@ -24487,7 +24691,7 @@
           <a:noFill/>
         </p:spPr>
         <p:txBody>
-          <a:bodyPr wrap="square" lIns="0" rIns="0" tIns="0" bIns="0" anchor="t">
+          <a:bodyPr wrap="square" lIns="0" tIns="0" rIns="0" bIns="0" anchor="t">
             <a:noAutofit/>
           </a:bodyPr>
           <a:lstStyle/>
@@ -24534,7 +24738,7 @@
           <a:noFill/>
         </p:spPr>
         <p:txBody>
-          <a:bodyPr wrap="square" lIns="0" rIns="0" tIns="0" bIns="0" anchor="t">
+          <a:bodyPr wrap="square" lIns="0" tIns="0" rIns="0" bIns="0" anchor="t">
             <a:noAutofit/>
           </a:bodyPr>
           <a:lstStyle/>
@@ -24581,7 +24785,7 @@
           <a:noFill/>
         </p:spPr>
         <p:txBody>
-          <a:bodyPr wrap="square" lIns="0" rIns="0" tIns="0" bIns="0" anchor="t">
+          <a:bodyPr wrap="square" lIns="0" tIns="0" rIns="0" bIns="0" anchor="t">
             <a:noAutofit/>
           </a:bodyPr>
           <a:lstStyle/>
@@ -24628,7 +24832,7 @@
           <a:noFill/>
         </p:spPr>
         <p:txBody>
-          <a:bodyPr wrap="square" lIns="0" rIns="0" tIns="0" bIns="0" anchor="t">
+          <a:bodyPr wrap="square" lIns="0" tIns="0" rIns="0" bIns="0" anchor="t">
             <a:noAutofit/>
           </a:bodyPr>
           <a:lstStyle/>
@@ -24710,7 +24914,7 @@
           <a:noFill/>
         </p:spPr>
         <p:txBody>
-          <a:bodyPr wrap="square" lIns="0" rIns="0" tIns="0" bIns="0" anchor="t">
+          <a:bodyPr wrap="square" lIns="0" tIns="0" rIns="0" bIns="0" anchor="t">
             <a:noAutofit/>
           </a:bodyPr>
           <a:lstStyle/>
@@ -24757,7 +24961,7 @@
           <a:noFill/>
         </p:spPr>
         <p:txBody>
-          <a:bodyPr wrap="square" lIns="0" rIns="0" tIns="0" bIns="0" anchor="t">
+          <a:bodyPr wrap="square" lIns="0" tIns="0" rIns="0" bIns="0" anchor="t">
             <a:noAutofit/>
           </a:bodyPr>
           <a:lstStyle/>
@@ -24839,7 +25043,7 @@
           <a:noFill/>
         </p:spPr>
         <p:txBody>
-          <a:bodyPr wrap="square" lIns="0" rIns="0" tIns="0" bIns="0" anchor="t">
+          <a:bodyPr wrap="square" lIns="0" tIns="0" rIns="0" bIns="0" anchor="t">
             <a:noAutofit/>
           </a:bodyPr>
           <a:lstStyle/>
@@ -24886,7 +25090,7 @@
           <a:noFill/>
         </p:spPr>
         <p:txBody>
-          <a:bodyPr wrap="square" lIns="0" rIns="0" tIns="0" bIns="0" anchor="t">
+          <a:bodyPr wrap="square" lIns="0" tIns="0" rIns="0" bIns="0" anchor="t">
             <a:noAutofit/>
           </a:bodyPr>
           <a:lstStyle/>
@@ -24968,7 +25172,7 @@
           <a:noFill/>
         </p:spPr>
         <p:txBody>
-          <a:bodyPr wrap="square" lIns="0" rIns="0" tIns="0" bIns="0" anchor="t">
+          <a:bodyPr wrap="square" lIns="0" tIns="0" rIns="0" bIns="0" anchor="t">
             <a:noAutofit/>
           </a:bodyPr>
           <a:lstStyle/>
@@ -25015,7 +25219,7 @@
           <a:noFill/>
         </p:spPr>
         <p:txBody>
-          <a:bodyPr wrap="square" lIns="0" rIns="0" tIns="0" bIns="0" anchor="t">
+          <a:bodyPr wrap="square" lIns="0" tIns="0" rIns="0" bIns="0" anchor="t">
             <a:noAutofit/>
           </a:bodyPr>
           <a:lstStyle/>
@@ -25097,7 +25301,7 @@
           <a:noFill/>
         </p:spPr>
         <p:txBody>
-          <a:bodyPr wrap="square" lIns="0" rIns="0" tIns="0" bIns="0" anchor="t">
+          <a:bodyPr wrap="square" lIns="0" tIns="0" rIns="0" bIns="0" anchor="t">
             <a:noAutofit/>
           </a:bodyPr>
           <a:lstStyle/>
@@ -25144,7 +25348,7 @@
           <a:noFill/>
         </p:spPr>
         <p:txBody>
-          <a:bodyPr wrap="square" lIns="0" rIns="0" tIns="0" bIns="0" anchor="t">
+          <a:bodyPr wrap="square" lIns="0" tIns="0" rIns="0" bIns="0" anchor="t">
             <a:noAutofit/>
           </a:bodyPr>
           <a:lstStyle/>
@@ -25226,7 +25430,7 @@
           <a:noFill/>
         </p:spPr>
         <p:txBody>
-          <a:bodyPr wrap="square" lIns="0" rIns="0" tIns="0" bIns="0" anchor="t">
+          <a:bodyPr wrap="square" lIns="0" tIns="0" rIns="0" bIns="0" anchor="t">
             <a:noAutofit/>
           </a:bodyPr>
           <a:lstStyle/>
@@ -25293,7 +25497,7 @@
           </a:fontRef>
         </p:style>
         <p:txBody>
-          <a:bodyPr rtlCol="0" anchor="ctr" wrap="square" lIns="64008" rIns="64008" tIns="0" bIns="0">
+          <a:bodyPr wrap="square" lIns="64008" tIns="0" rIns="64008" bIns="0" rtlCol="0" anchor="ctr">
             <a:noAutofit/>
           </a:bodyPr>
           <a:lstStyle/>
@@ -25340,7 +25544,7 @@
           <a:noFill/>
         </p:spPr>
         <p:txBody>
-          <a:bodyPr wrap="square" lIns="0" rIns="0" tIns="0" bIns="0" anchor="ctr">
+          <a:bodyPr wrap="square" lIns="0" tIns="0" rIns="0" bIns="0" anchor="ctr">
             <a:noAutofit/>
           </a:bodyPr>
           <a:lstStyle/>
@@ -25442,7 +25646,7 @@
           </a:fontRef>
         </p:style>
         <p:txBody>
-          <a:bodyPr rtlCol="0" anchor="ctr" wrap="square" lIns="64008" rIns="64008" tIns="0" bIns="0">
+          <a:bodyPr wrap="square" lIns="64008" tIns="0" rIns="64008" bIns="0" rtlCol="0" anchor="ctr">
             <a:noAutofit/>
           </a:bodyPr>
           <a:lstStyle/>
@@ -25489,7 +25693,7 @@
           <a:noFill/>
         </p:spPr>
         <p:txBody>
-          <a:bodyPr wrap="square" lIns="0" rIns="0" tIns="0" bIns="0" anchor="ctr">
+          <a:bodyPr wrap="square" lIns="0" tIns="0" rIns="0" bIns="0" anchor="ctr">
             <a:noAutofit/>
           </a:bodyPr>
           <a:lstStyle/>
@@ -25591,7 +25795,7 @@
           </a:fontRef>
         </p:style>
         <p:txBody>
-          <a:bodyPr rtlCol="0" anchor="ctr" wrap="square" lIns="64008" rIns="64008" tIns="0" bIns="0">
+          <a:bodyPr wrap="square" lIns="64008" tIns="0" rIns="64008" bIns="0" rtlCol="0" anchor="ctr">
             <a:noAutofit/>
           </a:bodyPr>
           <a:lstStyle/>
@@ -25638,7 +25842,7 @@
           <a:noFill/>
         </p:spPr>
         <p:txBody>
-          <a:bodyPr wrap="square" lIns="0" rIns="0" tIns="0" bIns="0" anchor="ctr">
+          <a:bodyPr wrap="square" lIns="0" tIns="0" rIns="0" bIns="0" anchor="ctr">
             <a:noAutofit/>
           </a:bodyPr>
           <a:lstStyle/>
@@ -25740,7 +25944,7 @@
           </a:fontRef>
         </p:style>
         <p:txBody>
-          <a:bodyPr rtlCol="0" anchor="ctr" wrap="square" lIns="64008" rIns="64008" tIns="0" bIns="0">
+          <a:bodyPr wrap="square" lIns="64008" tIns="0" rIns="64008" bIns="0" rtlCol="0" anchor="ctr">
             <a:noAutofit/>
           </a:bodyPr>
           <a:lstStyle/>
@@ -25787,7 +25991,7 @@
           <a:noFill/>
         </p:spPr>
         <p:txBody>
-          <a:bodyPr wrap="square" lIns="0" rIns="0" tIns="0" bIns="0" anchor="ctr">
+          <a:bodyPr wrap="square" lIns="0" tIns="0" rIns="0" bIns="0" anchor="ctr">
             <a:noAutofit/>
           </a:bodyPr>
           <a:lstStyle/>
@@ -25869,7 +26073,7 @@
           <a:noFill/>
         </p:spPr>
         <p:txBody>
-          <a:bodyPr wrap="square" lIns="0" rIns="0" tIns="0" bIns="0" anchor="t">
+          <a:bodyPr wrap="square" lIns="0" tIns="0" rIns="0" bIns="0" anchor="t">
             <a:noAutofit/>
           </a:bodyPr>
           <a:lstStyle/>
@@ -25919,7 +26123,7 @@
 </file>
 
 <file path=ppt/slides/slide5.xml><?xml version="1.0" encoding="utf-8"?>
-<p:sld xmlns:a="http://schemas.openxmlformats.org/drawingml/2006/main" xmlns:p="http://schemas.openxmlformats.org/presentationml/2006/main" xmlns:r="http://schemas.openxmlformats.org/officeDocument/2006/relationships">
+<p:sld xmlns:a="http://schemas.openxmlformats.org/drawingml/2006/main" xmlns:r="http://schemas.openxmlformats.org/officeDocument/2006/relationships" xmlns:p="http://schemas.openxmlformats.org/presentationml/2006/main">
   <p:cSld>
     <p:spTree>
       <p:nvGrpSpPr>
@@ -25927,7 +26131,14 @@
         <p:cNvGrpSpPr/>
         <p:nvPr/>
       </p:nvGrpSpPr>
-      <p:grpSpPr/>
+      <p:grpSpPr>
+        <a:xfrm>
+          <a:off x="0" y="0"/>
+          <a:ext cx="0" cy="0"/>
+          <a:chOff x="0" y="0"/>
+          <a:chExt cx="0" cy="0"/>
+        </a:xfrm>
+      </p:grpSpPr>
       <p:cxnSp>
         <p:nvCxnSpPr>
           <p:cNvPr id="2" name="Connector 1"/>
@@ -26000,12 +26211,13 @@
           </a:fontRef>
         </p:style>
         <p:txBody>
-          <a:bodyPr rtlCol="0" anchor="ctr" wrap="square">
+          <a:bodyPr wrap="square" rtlCol="0" anchor="ctr">
             <a:noAutofit/>
           </a:bodyPr>
           <a:lstStyle/>
           <a:p>
             <a:pPr algn="ctr"/>
+            <a:endParaRPr/>
           </a:p>
         </p:txBody>
       </p:sp>
@@ -26026,7 +26238,7 @@
           <a:noFill/>
         </p:spPr>
         <p:txBody>
-          <a:bodyPr wrap="square" lIns="0" rIns="0" tIns="0" bIns="0" anchor="t">
+          <a:bodyPr wrap="square" lIns="0" tIns="0" rIns="0" bIns="0" anchor="t">
             <a:noAutofit/>
           </a:bodyPr>
           <a:lstStyle/>
@@ -26084,7 +26296,7 @@
           <a:noFill/>
         </p:spPr>
         <p:txBody>
-          <a:bodyPr wrap="square" lIns="0" rIns="0" tIns="0" bIns="0" anchor="t">
+          <a:bodyPr wrap="square" lIns="0" tIns="0" rIns="0" bIns="0" anchor="t">
             <a:noAutofit/>
           </a:bodyPr>
           <a:lstStyle/>
@@ -26131,7 +26343,7 @@
           <a:noFill/>
         </p:spPr>
         <p:txBody>
-          <a:bodyPr wrap="square" lIns="0" rIns="0" tIns="0" bIns="0" anchor="t">
+          <a:bodyPr wrap="square" lIns="0" tIns="0" rIns="0" bIns="0" anchor="t">
             <a:noAutofit/>
           </a:bodyPr>
           <a:lstStyle/>
@@ -26178,7 +26390,7 @@
           <a:noFill/>
         </p:spPr>
         <p:txBody>
-          <a:bodyPr wrap="square" lIns="0" rIns="0" tIns="0" bIns="0" anchor="t">
+          <a:bodyPr wrap="square" lIns="0" tIns="0" rIns="0" bIns="0" anchor="t">
             <a:noAutofit/>
           </a:bodyPr>
           <a:lstStyle/>
@@ -26225,7 +26437,7 @@
           <a:noFill/>
         </p:spPr>
         <p:txBody>
-          <a:bodyPr wrap="square" lIns="0" rIns="0" tIns="0" bIns="0" anchor="t">
+          <a:bodyPr wrap="square" lIns="0" tIns="0" rIns="0" bIns="0" anchor="t">
             <a:noAutofit/>
           </a:bodyPr>
           <a:lstStyle/>
@@ -26292,7 +26504,7 @@
           </a:fontRef>
         </p:style>
         <p:txBody>
-          <a:bodyPr rtlCol="0" anchor="ctr" wrap="square" lIns="64008" rIns="64008" tIns="0" bIns="0">
+          <a:bodyPr wrap="square" lIns="64008" tIns="0" rIns="64008" bIns="0" rtlCol="0" anchor="ctr">
             <a:noAutofit/>
           </a:bodyPr>
           <a:lstStyle/>
@@ -26339,7 +26551,7 @@
           <a:noFill/>
         </p:spPr>
         <p:txBody>
-          <a:bodyPr wrap="square" lIns="0" rIns="0" tIns="0" bIns="0" anchor="ctr">
+          <a:bodyPr wrap="square" lIns="0" tIns="0" rIns="0" bIns="0" anchor="ctr">
             <a:noAutofit/>
           </a:bodyPr>
           <a:lstStyle/>
@@ -26441,7 +26653,7 @@
           </a:fontRef>
         </p:style>
         <p:txBody>
-          <a:bodyPr rtlCol="0" anchor="ctr" wrap="square" lIns="64008" rIns="64008" tIns="0" bIns="0">
+          <a:bodyPr wrap="square" lIns="64008" tIns="0" rIns="64008" bIns="0" rtlCol="0" anchor="ctr">
             <a:noAutofit/>
           </a:bodyPr>
           <a:lstStyle/>
@@ -26488,7 +26700,7 @@
           <a:noFill/>
         </p:spPr>
         <p:txBody>
-          <a:bodyPr wrap="square" lIns="0" rIns="0" tIns="0" bIns="0" anchor="ctr">
+          <a:bodyPr wrap="square" lIns="0" tIns="0" rIns="0" bIns="0" anchor="ctr">
             <a:noAutofit/>
           </a:bodyPr>
           <a:lstStyle/>
@@ -26590,7 +26802,7 @@
           </a:fontRef>
         </p:style>
         <p:txBody>
-          <a:bodyPr rtlCol="0" anchor="ctr" wrap="square" lIns="64008" rIns="64008" tIns="0" bIns="0">
+          <a:bodyPr wrap="square" lIns="64008" tIns="0" rIns="64008" bIns="0" rtlCol="0" anchor="ctr">
             <a:noAutofit/>
           </a:bodyPr>
           <a:lstStyle/>
@@ -26637,7 +26849,7 @@
           <a:noFill/>
         </p:spPr>
         <p:txBody>
-          <a:bodyPr wrap="square" lIns="0" rIns="0" tIns="0" bIns="0" anchor="ctr">
+          <a:bodyPr wrap="square" lIns="0" tIns="0" rIns="0" bIns="0" anchor="ctr">
             <a:noAutofit/>
           </a:bodyPr>
           <a:lstStyle/>
@@ -26739,7 +26951,7 @@
           </a:fontRef>
         </p:style>
         <p:txBody>
-          <a:bodyPr rtlCol="0" anchor="ctr" wrap="square" lIns="64008" rIns="64008" tIns="0" bIns="0">
+          <a:bodyPr wrap="square" lIns="64008" tIns="0" rIns="64008" bIns="0" rtlCol="0" anchor="ctr">
             <a:noAutofit/>
           </a:bodyPr>
           <a:lstStyle/>
@@ -26786,7 +26998,7 @@
           <a:noFill/>
         </p:spPr>
         <p:txBody>
-          <a:bodyPr wrap="square" lIns="0" rIns="0" tIns="0" bIns="0" anchor="ctr">
+          <a:bodyPr wrap="square" lIns="0" tIns="0" rIns="0" bIns="0" anchor="ctr">
             <a:noAutofit/>
           </a:bodyPr>
           <a:lstStyle/>
@@ -26888,7 +27100,7 @@
           </a:fontRef>
         </p:style>
         <p:txBody>
-          <a:bodyPr rtlCol="0" anchor="ctr" wrap="square" lIns="64008" rIns="64008" tIns="0" bIns="0">
+          <a:bodyPr wrap="square" lIns="64008" tIns="0" rIns="64008" bIns="0" rtlCol="0" anchor="ctr">
             <a:noAutofit/>
           </a:bodyPr>
           <a:lstStyle/>
@@ -26935,7 +27147,7 @@
           <a:noFill/>
         </p:spPr>
         <p:txBody>
-          <a:bodyPr wrap="square" lIns="0" rIns="0" tIns="0" bIns="0" anchor="ctr">
+          <a:bodyPr wrap="square" lIns="0" tIns="0" rIns="0" bIns="0" anchor="ctr">
             <a:noAutofit/>
           </a:bodyPr>
           <a:lstStyle/>
@@ -27037,7 +27249,7 @@
           </a:fontRef>
         </p:style>
         <p:txBody>
-          <a:bodyPr rtlCol="0" anchor="ctr" wrap="square" lIns="64008" rIns="64008" tIns="0" bIns="0">
+          <a:bodyPr wrap="square" lIns="64008" tIns="0" rIns="64008" bIns="0" rtlCol="0" anchor="ctr">
             <a:noAutofit/>
           </a:bodyPr>
           <a:lstStyle/>
@@ -27084,7 +27296,7 @@
           <a:noFill/>
         </p:spPr>
         <p:txBody>
-          <a:bodyPr wrap="square" lIns="0" rIns="0" tIns="0" bIns="0" anchor="ctr">
+          <a:bodyPr wrap="square" lIns="0" tIns="0" rIns="0" bIns="0" anchor="ctr">
             <a:noAutofit/>
           </a:bodyPr>
           <a:lstStyle/>
@@ -27166,7 +27378,7 @@
           <a:noFill/>
         </p:spPr>
         <p:txBody>
-          <a:bodyPr wrap="square" lIns="0" rIns="0" tIns="0" bIns="0" anchor="t">
+          <a:bodyPr wrap="square" lIns="0" tIns="0" rIns="0" bIns="0" anchor="t">
             <a:noAutofit/>
           </a:bodyPr>
           <a:lstStyle/>
@@ -27224,7 +27436,7 @@
           <a:noFill/>
         </p:spPr>
         <p:txBody>
-          <a:bodyPr wrap="square" lIns="0" rIns="0" tIns="0" bIns="0" anchor="t">
+          <a:bodyPr wrap="square" lIns="0" tIns="0" rIns="0" bIns="0" anchor="t">
             <a:noAutofit/>
           </a:bodyPr>
           <a:lstStyle/>
@@ -27274,7 +27486,7 @@
 </file>
 
 <file path=ppt/slides/slide6.xml><?xml version="1.0" encoding="utf-8"?>
-<p:sld xmlns:a="http://schemas.openxmlformats.org/drawingml/2006/main" xmlns:p="http://schemas.openxmlformats.org/presentationml/2006/main" xmlns:r="http://schemas.openxmlformats.org/officeDocument/2006/relationships">
+<p:sld xmlns:a="http://schemas.openxmlformats.org/drawingml/2006/main" xmlns:r="http://schemas.openxmlformats.org/officeDocument/2006/relationships" xmlns:p="http://schemas.openxmlformats.org/presentationml/2006/main">
   <p:cSld>
     <p:spTree>
       <p:nvGrpSpPr>
@@ -27282,7 +27494,14 @@
         <p:cNvGrpSpPr/>
         <p:nvPr/>
       </p:nvGrpSpPr>
-      <p:grpSpPr/>
+      <p:grpSpPr>
+        <a:xfrm>
+          <a:off x="0" y="0"/>
+          <a:ext cx="0" cy="0"/>
+          <a:chOff x="0" y="0"/>
+          <a:chExt cx="0" cy="0"/>
+        </a:xfrm>
+      </p:grpSpPr>
       <p:sp>
         <p:nvSpPr>
           <p:cNvPr id="2" name="Rectangle 1"/>
@@ -27320,12 +27539,13 @@
           </a:fontRef>
         </p:style>
         <p:txBody>
-          <a:bodyPr rtlCol="0" anchor="ctr" wrap="square">
+          <a:bodyPr wrap="square" rtlCol="0" anchor="ctr">
             <a:noAutofit/>
           </a:bodyPr>
           <a:lstStyle/>
           <a:p>
             <a:pPr algn="ctr"/>
+            <a:endParaRPr/>
           </a:p>
         </p:txBody>
       </p:sp>
@@ -27366,12 +27586,13 @@
           </a:fontRef>
         </p:style>
         <p:txBody>
-          <a:bodyPr rtlCol="0" anchor="ctr" wrap="square">
+          <a:bodyPr wrap="square" rtlCol="0" anchor="ctr">
             <a:noAutofit/>
           </a:bodyPr>
           <a:lstStyle/>
           <a:p>
             <a:pPr algn="ctr"/>
+            <a:endParaRPr/>
           </a:p>
         </p:txBody>
       </p:sp>
@@ -27392,7 +27613,7 @@
           <a:noFill/>
         </p:spPr>
         <p:txBody>
-          <a:bodyPr wrap="square" lIns="0" rIns="0" tIns="0" bIns="0" anchor="ctr">
+          <a:bodyPr wrap="square" lIns="0" tIns="0" rIns="0" bIns="0" anchor="ctr">
             <a:noAutofit/>
           </a:bodyPr>
           <a:lstStyle/>
@@ -27439,7 +27660,7 @@
           <a:noFill/>
         </p:spPr>
         <p:txBody>
-          <a:bodyPr wrap="square" lIns="0" rIns="0" tIns="0" bIns="0" anchor="ctr">
+          <a:bodyPr wrap="square" lIns="0" tIns="0" rIns="0" bIns="0" anchor="ctr">
             <a:noAutofit/>
           </a:bodyPr>
           <a:lstStyle/>
@@ -27510,7 +27731,7 @@
           <a:noFill/>
         </p:spPr>
         <p:txBody>
-          <a:bodyPr wrap="square" lIns="0" rIns="0" tIns="0" bIns="0" anchor="t">
+          <a:bodyPr wrap="square" lIns="0" tIns="0" rIns="0" bIns="0" anchor="t">
             <a:noAutofit/>
           </a:bodyPr>
           <a:lstStyle/>
@@ -27557,7 +27778,7 @@
           <a:noFill/>
         </p:spPr>
         <p:txBody>
-          <a:bodyPr wrap="square" lIns="0" rIns="0" tIns="0" bIns="0" anchor="t">
+          <a:bodyPr wrap="square" lIns="0" tIns="0" rIns="0" bIns="0" anchor="t">
             <a:noAutofit/>
           </a:bodyPr>
           <a:lstStyle/>
@@ -27663,7 +27884,7 @@
           <a:noFill/>
         </p:spPr>
         <p:txBody>
-          <a:bodyPr wrap="square" lIns="0" rIns="0" tIns="0" bIns="0" anchor="t">
+          <a:bodyPr wrap="square" lIns="0" tIns="0" rIns="0" bIns="0" anchor="t">
             <a:noAutofit/>
           </a:bodyPr>
           <a:lstStyle/>
@@ -27702,7 +27923,7 @@
 </file>
 
 <file path=ppt/slides/slide7.xml><?xml version="1.0" encoding="utf-8"?>
-<p:sld xmlns:a="http://schemas.openxmlformats.org/drawingml/2006/main" xmlns:p="http://schemas.openxmlformats.org/presentationml/2006/main" xmlns:r="http://schemas.openxmlformats.org/officeDocument/2006/relationships">
+<p:sld xmlns:a="http://schemas.openxmlformats.org/drawingml/2006/main" xmlns:r="http://schemas.openxmlformats.org/officeDocument/2006/relationships" xmlns:p="http://schemas.openxmlformats.org/presentationml/2006/main">
   <p:cSld>
     <p:spTree>
       <p:nvGrpSpPr>
@@ -27710,7 +27931,14 @@
         <p:cNvGrpSpPr/>
         <p:nvPr/>
       </p:nvGrpSpPr>
-      <p:grpSpPr/>
+      <p:grpSpPr>
+        <a:xfrm>
+          <a:off x="0" y="0"/>
+          <a:ext cx="0" cy="0"/>
+          <a:chOff x="0" y="0"/>
+          <a:chExt cx="0" cy="0"/>
+        </a:xfrm>
+      </p:grpSpPr>
       <p:cxnSp>
         <p:nvCxnSpPr>
           <p:cNvPr id="2" name="Connector 1"/>
@@ -27783,12 +28011,13 @@
           </a:fontRef>
         </p:style>
         <p:txBody>
-          <a:bodyPr rtlCol="0" anchor="ctr" wrap="square">
+          <a:bodyPr wrap="square" rtlCol="0" anchor="ctr">
             <a:noAutofit/>
           </a:bodyPr>
           <a:lstStyle/>
           <a:p>
             <a:pPr algn="ctr"/>
+            <a:endParaRPr/>
           </a:p>
         </p:txBody>
       </p:sp>
@@ -27809,7 +28038,7 @@
           <a:noFill/>
         </p:spPr>
         <p:txBody>
-          <a:bodyPr wrap="square" lIns="0" rIns="0" tIns="0" bIns="0" anchor="t">
+          <a:bodyPr wrap="square" lIns="0" tIns="0" rIns="0" bIns="0" anchor="t">
             <a:noAutofit/>
           </a:bodyPr>
           <a:lstStyle/>
@@ -27867,7 +28096,7 @@
           <a:noFill/>
         </p:spPr>
         <p:txBody>
-          <a:bodyPr wrap="square" lIns="0" rIns="0" tIns="0" bIns="0" anchor="t">
+          <a:bodyPr wrap="square" lIns="0" tIns="0" rIns="0" bIns="0" anchor="t">
             <a:noAutofit/>
           </a:bodyPr>
           <a:lstStyle/>
@@ -27914,7 +28143,7 @@
           <a:noFill/>
         </p:spPr>
         <p:txBody>
-          <a:bodyPr wrap="square" lIns="0" rIns="0" tIns="0" bIns="0" anchor="t">
+          <a:bodyPr wrap="square" lIns="0" tIns="0" rIns="0" bIns="0" anchor="t">
             <a:noAutofit/>
           </a:bodyPr>
           <a:lstStyle/>
@@ -27961,7 +28190,7 @@
           <a:noFill/>
         </p:spPr>
         <p:txBody>
-          <a:bodyPr wrap="square" lIns="0" rIns="0" tIns="0" bIns="0" anchor="t">
+          <a:bodyPr wrap="square" lIns="0" tIns="0" rIns="0" bIns="0" anchor="t">
             <a:noAutofit/>
           </a:bodyPr>
           <a:lstStyle/>
@@ -28008,7 +28237,7 @@
           <a:noFill/>
         </p:spPr>
         <p:txBody>
-          <a:bodyPr wrap="square" lIns="0" rIns="0" tIns="0" bIns="0" anchor="t">
+          <a:bodyPr wrap="square" lIns="0" tIns="0" rIns="0" bIns="0" anchor="t">
             <a:noAutofit/>
           </a:bodyPr>
           <a:lstStyle/>
@@ -28077,12 +28306,13 @@
           </a:fontRef>
         </p:style>
         <p:txBody>
-          <a:bodyPr rtlCol="0" anchor="ctr" wrap="square">
+          <a:bodyPr wrap="square" rtlCol="0" anchor="ctr">
             <a:noAutofit/>
           </a:bodyPr>
           <a:lstStyle/>
           <a:p>
             <a:pPr algn="ctr"/>
+            <a:endParaRPr/>
           </a:p>
         </p:txBody>
       </p:sp>
@@ -28123,7 +28353,7 @@
           </a:fontRef>
         </p:style>
         <p:txBody>
-          <a:bodyPr rtlCol="0" anchor="ctr" wrap="square" lIns="73152" rIns="73152" tIns="0" bIns="0">
+          <a:bodyPr wrap="square" lIns="73152" tIns="0" rIns="73152" bIns="0" rtlCol="0" anchor="ctr">
             <a:noAutofit/>
           </a:bodyPr>
           <a:lstStyle/>
@@ -28170,7 +28400,7 @@
           <a:noFill/>
         </p:spPr>
         <p:txBody>
-          <a:bodyPr wrap="square" lIns="0" rIns="0" tIns="0" bIns="0" anchor="t">
+          <a:bodyPr wrap="square" lIns="0" tIns="0" rIns="0" bIns="0" anchor="t">
             <a:noAutofit/>
           </a:bodyPr>
           <a:lstStyle/>
@@ -28311,12 +28541,13 @@
           </a:fontRef>
         </p:style>
         <p:txBody>
-          <a:bodyPr rtlCol="0" anchor="ctr" wrap="square">
+          <a:bodyPr wrap="square" rtlCol="0" anchor="ctr">
             <a:noAutofit/>
           </a:bodyPr>
           <a:lstStyle/>
           <a:p>
             <a:pPr algn="ctr"/>
+            <a:endParaRPr/>
           </a:p>
         </p:txBody>
       </p:sp>
@@ -28357,7 +28588,7 @@
           </a:fontRef>
         </p:style>
         <p:txBody>
-          <a:bodyPr rtlCol="0" anchor="ctr" wrap="square" lIns="73152" rIns="73152" tIns="0" bIns="0">
+          <a:bodyPr wrap="square" lIns="73152" tIns="0" rIns="73152" bIns="0" rtlCol="0" anchor="ctr">
             <a:noAutofit/>
           </a:bodyPr>
           <a:lstStyle/>
@@ -28404,7 +28635,7 @@
           <a:noFill/>
         </p:spPr>
         <p:txBody>
-          <a:bodyPr wrap="square" lIns="0" rIns="0" tIns="0" bIns="0" anchor="t">
+          <a:bodyPr wrap="square" lIns="0" tIns="0" rIns="0" bIns="0" anchor="t">
             <a:noAutofit/>
           </a:bodyPr>
           <a:lstStyle/>
@@ -28543,12 +28774,13 @@
           </a:fontRef>
         </p:style>
         <p:txBody>
-          <a:bodyPr rtlCol="0" anchor="ctr" wrap="square">
+          <a:bodyPr wrap="square" rtlCol="0" anchor="ctr">
             <a:noAutofit/>
           </a:bodyPr>
           <a:lstStyle/>
           <a:p>
             <a:pPr algn="ctr"/>
+            <a:endParaRPr/>
           </a:p>
         </p:txBody>
       </p:sp>
@@ -28589,12 +28821,13 @@
           </a:fontRef>
         </p:style>
         <p:txBody>
-          <a:bodyPr rtlCol="0" anchor="ctr" wrap="square">
+          <a:bodyPr wrap="square" rtlCol="0" anchor="ctr">
             <a:noAutofit/>
           </a:bodyPr>
           <a:lstStyle/>
           <a:p>
             <a:pPr algn="ctr"/>
+            <a:endParaRPr/>
           </a:p>
         </p:txBody>
       </p:sp>
@@ -28615,7 +28848,7 @@
           <a:noFill/>
         </p:spPr>
         <p:txBody>
-          <a:bodyPr wrap="square" lIns="0" rIns="0" tIns="0" bIns="0" anchor="t">
+          <a:bodyPr wrap="square" lIns="0" tIns="0" rIns="0" bIns="0" anchor="t">
             <a:noAutofit/>
           </a:bodyPr>
           <a:lstStyle/>
@@ -28697,7 +28930,7 @@
           <a:noFill/>
         </p:spPr>
         <p:txBody>
-          <a:bodyPr wrap="square" lIns="0" rIns="0" tIns="0" bIns="0" anchor="t">
+          <a:bodyPr wrap="square" lIns="0" tIns="0" rIns="0" bIns="0" anchor="t">
             <a:noAutofit/>
           </a:bodyPr>
           <a:lstStyle/>
@@ -28923,7 +29156,7 @@
           <a:noFill/>
         </p:spPr>
         <p:txBody>
-          <a:bodyPr wrap="square" lIns="0" rIns="0" tIns="0" bIns="0" anchor="t">
+          <a:bodyPr wrap="square" lIns="0" tIns="0" rIns="0" bIns="0" anchor="t">
             <a:noAutofit/>
           </a:bodyPr>
           <a:lstStyle/>
@@ -28973,7 +29206,7 @@
 </file>
 
 <file path=ppt/slides/slide8.xml><?xml version="1.0" encoding="utf-8"?>
-<p:sld xmlns:a="http://schemas.openxmlformats.org/drawingml/2006/main" xmlns:p="http://schemas.openxmlformats.org/presentationml/2006/main" xmlns:r="http://schemas.openxmlformats.org/officeDocument/2006/relationships">
+<p:sld xmlns:a="http://schemas.openxmlformats.org/drawingml/2006/main" xmlns:r="http://schemas.openxmlformats.org/officeDocument/2006/relationships" xmlns:p="http://schemas.openxmlformats.org/presentationml/2006/main">
   <p:cSld>
     <p:spTree>
       <p:nvGrpSpPr>
@@ -28981,7 +29214,14 @@
         <p:cNvGrpSpPr/>
         <p:nvPr/>
       </p:nvGrpSpPr>
-      <p:grpSpPr/>
+      <p:grpSpPr>
+        <a:xfrm>
+          <a:off x="0" y="0"/>
+          <a:ext cx="0" cy="0"/>
+          <a:chOff x="0" y="0"/>
+          <a:chExt cx="0" cy="0"/>
+        </a:xfrm>
+      </p:grpSpPr>
       <p:cxnSp>
         <p:nvCxnSpPr>
           <p:cNvPr id="2" name="Connector 1"/>
@@ -29054,12 +29294,13 @@
           </a:fontRef>
         </p:style>
         <p:txBody>
-          <a:bodyPr rtlCol="0" anchor="ctr" wrap="square">
+          <a:bodyPr wrap="square" rtlCol="0" anchor="ctr">
             <a:noAutofit/>
           </a:bodyPr>
           <a:lstStyle/>
           <a:p>
             <a:pPr algn="ctr"/>
+            <a:endParaRPr/>
           </a:p>
         </p:txBody>
       </p:sp>
@@ -29080,7 +29321,7 @@
           <a:noFill/>
         </p:spPr>
         <p:txBody>
-          <a:bodyPr wrap="square" lIns="0" rIns="0" tIns="0" bIns="0" anchor="t">
+          <a:bodyPr wrap="square" lIns="0" tIns="0" rIns="0" bIns="0" anchor="t">
             <a:noAutofit/>
           </a:bodyPr>
           <a:lstStyle/>
@@ -29138,7 +29379,7 @@
           <a:noFill/>
         </p:spPr>
         <p:txBody>
-          <a:bodyPr wrap="square" lIns="0" rIns="0" tIns="0" bIns="0" anchor="t">
+          <a:bodyPr wrap="square" lIns="0" tIns="0" rIns="0" bIns="0" anchor="t">
             <a:noAutofit/>
           </a:bodyPr>
           <a:lstStyle/>
@@ -29185,7 +29426,7 @@
           <a:noFill/>
         </p:spPr>
         <p:txBody>
-          <a:bodyPr wrap="square" lIns="0" rIns="0" tIns="0" bIns="0" anchor="t">
+          <a:bodyPr wrap="square" lIns="0" tIns="0" rIns="0" bIns="0" anchor="t">
             <a:noAutofit/>
           </a:bodyPr>
           <a:lstStyle/>
@@ -29232,7 +29473,7 @@
           <a:noFill/>
         </p:spPr>
         <p:txBody>
-          <a:bodyPr wrap="square" lIns="0" rIns="0" tIns="0" bIns="0" anchor="t">
+          <a:bodyPr wrap="square" lIns="0" tIns="0" rIns="0" bIns="0" anchor="t">
             <a:noAutofit/>
           </a:bodyPr>
           <a:lstStyle/>
@@ -29279,7 +29520,7 @@
           <a:noFill/>
         </p:spPr>
         <p:txBody>
-          <a:bodyPr wrap="square" lIns="0" rIns="0" tIns="0" bIns="0" anchor="t">
+          <a:bodyPr wrap="square" lIns="0" tIns="0" rIns="0" bIns="0" anchor="t">
             <a:noAutofit/>
           </a:bodyPr>
           <a:lstStyle/>
@@ -29346,7 +29587,7 @@
           </a:fontRef>
         </p:style>
         <p:txBody>
-          <a:bodyPr rtlCol="0" anchor="ctr" wrap="square" lIns="64008" rIns="64008" tIns="0" bIns="0">
+          <a:bodyPr wrap="square" lIns="64008" tIns="0" rIns="64008" bIns="0" rtlCol="0" anchor="ctr">
             <a:noAutofit/>
           </a:bodyPr>
           <a:lstStyle/>
@@ -29393,7 +29634,7 @@
           <a:noFill/>
         </p:spPr>
         <p:txBody>
-          <a:bodyPr wrap="square" lIns="0" rIns="0" tIns="0" bIns="0" anchor="ctr">
+          <a:bodyPr wrap="square" lIns="0" tIns="0" rIns="0" bIns="0" anchor="ctr">
             <a:noAutofit/>
           </a:bodyPr>
           <a:lstStyle/>
@@ -29495,7 +29736,7 @@
           </a:fontRef>
         </p:style>
         <p:txBody>
-          <a:bodyPr rtlCol="0" anchor="ctr" wrap="square" lIns="64008" rIns="64008" tIns="0" bIns="0">
+          <a:bodyPr wrap="square" lIns="64008" tIns="0" rIns="64008" bIns="0" rtlCol="0" anchor="ctr">
             <a:noAutofit/>
           </a:bodyPr>
           <a:lstStyle/>
@@ -29542,7 +29783,7 @@
           <a:noFill/>
         </p:spPr>
         <p:txBody>
-          <a:bodyPr wrap="square" lIns="0" rIns="0" tIns="0" bIns="0" anchor="ctr">
+          <a:bodyPr wrap="square" lIns="0" tIns="0" rIns="0" bIns="0" anchor="ctr">
             <a:noAutofit/>
           </a:bodyPr>
           <a:lstStyle/>
@@ -29644,7 +29885,7 @@
           </a:fontRef>
         </p:style>
         <p:txBody>
-          <a:bodyPr rtlCol="0" anchor="ctr" wrap="square" lIns="64008" rIns="64008" tIns="0" bIns="0">
+          <a:bodyPr wrap="square" lIns="64008" tIns="0" rIns="64008" bIns="0" rtlCol="0" anchor="ctr">
             <a:noAutofit/>
           </a:bodyPr>
           <a:lstStyle/>
@@ -29691,7 +29932,7 @@
           <a:noFill/>
         </p:spPr>
         <p:txBody>
-          <a:bodyPr wrap="square" lIns="0" rIns="0" tIns="0" bIns="0" anchor="ctr">
+          <a:bodyPr wrap="square" lIns="0" tIns="0" rIns="0" bIns="0" anchor="ctr">
             <a:noAutofit/>
           </a:bodyPr>
           <a:lstStyle/>
@@ -29793,7 +30034,7 @@
           </a:fontRef>
         </p:style>
         <p:txBody>
-          <a:bodyPr rtlCol="0" anchor="ctr" wrap="square" lIns="64008" rIns="64008" tIns="0" bIns="0">
+          <a:bodyPr wrap="square" lIns="64008" tIns="0" rIns="64008" bIns="0" rtlCol="0" anchor="ctr">
             <a:noAutofit/>
           </a:bodyPr>
           <a:lstStyle/>
@@ -29840,7 +30081,7 @@
           <a:noFill/>
         </p:spPr>
         <p:txBody>
-          <a:bodyPr wrap="square" lIns="0" rIns="0" tIns="0" bIns="0" anchor="ctr">
+          <a:bodyPr wrap="square" lIns="0" tIns="0" rIns="0" bIns="0" anchor="ctr">
             <a:noAutofit/>
           </a:bodyPr>
           <a:lstStyle/>
@@ -29942,7 +30183,7 @@
           </a:fontRef>
         </p:style>
         <p:txBody>
-          <a:bodyPr rtlCol="0" anchor="ctr" wrap="square" lIns="64008" rIns="64008" tIns="0" bIns="0">
+          <a:bodyPr wrap="square" lIns="64008" tIns="0" rIns="64008" bIns="0" rtlCol="0" anchor="ctr">
             <a:noAutofit/>
           </a:bodyPr>
           <a:lstStyle/>
@@ -29989,7 +30230,7 @@
           <a:noFill/>
         </p:spPr>
         <p:txBody>
-          <a:bodyPr wrap="square" lIns="0" rIns="0" tIns="0" bIns="0" anchor="ctr">
+          <a:bodyPr wrap="square" lIns="0" tIns="0" rIns="0" bIns="0" anchor="ctr">
             <a:noAutofit/>
           </a:bodyPr>
           <a:lstStyle/>
@@ -30071,7 +30312,7 @@
           <a:noFill/>
         </p:spPr>
         <p:txBody>
-          <a:bodyPr wrap="square" lIns="0" rIns="0" tIns="0" bIns="0" anchor="t">
+          <a:bodyPr wrap="square" lIns="0" tIns="0" rIns="0" bIns="0" anchor="t">
             <a:noAutofit/>
           </a:bodyPr>
           <a:lstStyle/>
@@ -30139,7 +30380,7 @@
 </file>
 
 <file path=ppt/slides/slide9.xml><?xml version="1.0" encoding="utf-8"?>
-<p:sld xmlns:a="http://schemas.openxmlformats.org/drawingml/2006/main" xmlns:p="http://schemas.openxmlformats.org/presentationml/2006/main" xmlns:r="http://schemas.openxmlformats.org/officeDocument/2006/relationships">
+<p:sld xmlns:a="http://schemas.openxmlformats.org/drawingml/2006/main" xmlns:r="http://schemas.openxmlformats.org/officeDocument/2006/relationships" xmlns:p="http://schemas.openxmlformats.org/presentationml/2006/main">
   <p:cSld>
     <p:spTree>
       <p:nvGrpSpPr>
@@ -30147,7 +30388,14 @@
         <p:cNvGrpSpPr/>
         <p:nvPr/>
       </p:nvGrpSpPr>
-      <p:grpSpPr/>
+      <p:grpSpPr>
+        <a:xfrm>
+          <a:off x="0" y="0"/>
+          <a:ext cx="0" cy="0"/>
+          <a:chOff x="0" y="0"/>
+          <a:chExt cx="0" cy="0"/>
+        </a:xfrm>
+      </p:grpSpPr>
       <p:cxnSp>
         <p:nvCxnSpPr>
           <p:cNvPr id="2" name="Connector 1"/>
@@ -30220,12 +30468,13 @@
           </a:fontRef>
         </p:style>
         <p:txBody>
-          <a:bodyPr rtlCol="0" anchor="ctr" wrap="square">
+          <a:bodyPr wrap="square" rtlCol="0" anchor="ctr">
             <a:noAutofit/>
           </a:bodyPr>
           <a:lstStyle/>
           <a:p>
             <a:pPr algn="ctr"/>
+            <a:endParaRPr/>
           </a:p>
         </p:txBody>
       </p:sp>
@@ -30246,7 +30495,7 @@
           <a:noFill/>
         </p:spPr>
         <p:txBody>
-          <a:bodyPr wrap="square" lIns="0" rIns="0" tIns="0" bIns="0" anchor="t">
+          <a:bodyPr wrap="square" lIns="0" tIns="0" rIns="0" bIns="0" anchor="t">
             <a:noAutofit/>
           </a:bodyPr>
           <a:lstStyle/>
@@ -30304,7 +30553,7 @@
           <a:noFill/>
         </p:spPr>
         <p:txBody>
-          <a:bodyPr wrap="square" lIns="0" rIns="0" tIns="0" bIns="0" anchor="t">
+          <a:bodyPr wrap="square" lIns="0" tIns="0" rIns="0" bIns="0" anchor="t">
             <a:noAutofit/>
           </a:bodyPr>
           <a:lstStyle/>
@@ -30351,7 +30600,7 @@
           <a:noFill/>
         </p:spPr>
         <p:txBody>
-          <a:bodyPr wrap="square" lIns="0" rIns="0" tIns="0" bIns="0" anchor="t">
+          <a:bodyPr wrap="square" lIns="0" tIns="0" rIns="0" bIns="0" anchor="t">
             <a:noAutofit/>
           </a:bodyPr>
           <a:lstStyle/>
@@ -30398,7 +30647,7 @@
           <a:noFill/>
         </p:spPr>
         <p:txBody>
-          <a:bodyPr wrap="square" lIns="0" rIns="0" tIns="0" bIns="0" anchor="t">
+          <a:bodyPr wrap="square" lIns="0" tIns="0" rIns="0" bIns="0" anchor="t">
             <a:noAutofit/>
           </a:bodyPr>
           <a:lstStyle/>
@@ -30445,7 +30694,7 @@
           <a:noFill/>
         </p:spPr>
         <p:txBody>
-          <a:bodyPr wrap="square" lIns="0" rIns="0" tIns="0" bIns="0" anchor="t">
+          <a:bodyPr wrap="square" lIns="0" tIns="0" rIns="0" bIns="0" anchor="t">
             <a:noAutofit/>
           </a:bodyPr>
           <a:lstStyle/>
@@ -30512,7 +30761,7 @@
           </a:fontRef>
         </p:style>
         <p:txBody>
-          <a:bodyPr rtlCol="0" anchor="ctr" wrap="square" lIns="64008" rIns="64008" tIns="0" bIns="0">
+          <a:bodyPr wrap="square" lIns="64008" tIns="0" rIns="64008" bIns="0" rtlCol="0" anchor="ctr">
             <a:noAutofit/>
           </a:bodyPr>
           <a:lstStyle/>
@@ -30559,7 +30808,7 @@
           <a:noFill/>
         </p:spPr>
         <p:txBody>
-          <a:bodyPr wrap="square" lIns="0" rIns="0" tIns="0" bIns="0" anchor="ctr">
+          <a:bodyPr wrap="square" lIns="0" tIns="0" rIns="0" bIns="0" anchor="ctr">
             <a:noAutofit/>
           </a:bodyPr>
           <a:lstStyle/>
@@ -30661,7 +30910,7 @@
           </a:fontRef>
         </p:style>
         <p:txBody>
-          <a:bodyPr rtlCol="0" anchor="ctr" wrap="square" lIns="64008" rIns="64008" tIns="0" bIns="0">
+          <a:bodyPr wrap="square" lIns="64008" tIns="0" rIns="64008" bIns="0" rtlCol="0" anchor="ctr">
             <a:noAutofit/>
           </a:bodyPr>
           <a:lstStyle/>
@@ -30708,7 +30957,7 @@
           <a:noFill/>
         </p:spPr>
         <p:txBody>
-          <a:bodyPr wrap="square" lIns="0" rIns="0" tIns="0" bIns="0" anchor="ctr">
+          <a:bodyPr wrap="square" lIns="0" tIns="0" rIns="0" bIns="0" anchor="ctr">
             <a:noAutofit/>
           </a:bodyPr>
           <a:lstStyle/>
@@ -30810,7 +31059,7 @@
           </a:fontRef>
         </p:style>
         <p:txBody>
-          <a:bodyPr rtlCol="0" anchor="ctr" wrap="square" lIns="64008" rIns="64008" tIns="0" bIns="0">
+          <a:bodyPr wrap="square" lIns="64008" tIns="0" rIns="64008" bIns="0" rtlCol="0" anchor="ctr">
             <a:noAutofit/>
           </a:bodyPr>
           <a:lstStyle/>
@@ -30857,7 +31106,7 @@
           <a:noFill/>
         </p:spPr>
         <p:txBody>
-          <a:bodyPr wrap="square" lIns="0" rIns="0" tIns="0" bIns="0" anchor="ctr">
+          <a:bodyPr wrap="square" lIns="0" tIns="0" rIns="0" bIns="0" anchor="ctr">
             <a:noAutofit/>
           </a:bodyPr>
           <a:lstStyle/>
@@ -30959,7 +31208,7 @@
           </a:fontRef>
         </p:style>
         <p:txBody>
-          <a:bodyPr rtlCol="0" anchor="ctr" wrap="square" lIns="64008" rIns="64008" tIns="0" bIns="0">
+          <a:bodyPr wrap="square" lIns="64008" tIns="0" rIns="64008" bIns="0" rtlCol="0" anchor="ctr">
             <a:noAutofit/>
           </a:bodyPr>
           <a:lstStyle/>
@@ -31006,7 +31255,7 @@
           <a:noFill/>
         </p:spPr>
         <p:txBody>
-          <a:bodyPr wrap="square" lIns="0" rIns="0" tIns="0" bIns="0" anchor="ctr">
+          <a:bodyPr wrap="square" lIns="0" tIns="0" rIns="0" bIns="0" anchor="ctr">
             <a:noAutofit/>
           </a:bodyPr>
           <a:lstStyle/>
@@ -31108,7 +31357,7 @@
           </a:fontRef>
         </p:style>
         <p:txBody>
-          <a:bodyPr rtlCol="0" anchor="ctr" wrap="square" lIns="64008" rIns="64008" tIns="0" bIns="0">
+          <a:bodyPr wrap="square" lIns="64008" tIns="0" rIns="64008" bIns="0" rtlCol="0" anchor="ctr">
             <a:noAutofit/>
           </a:bodyPr>
           <a:lstStyle/>
@@ -31155,7 +31404,7 @@
           <a:noFill/>
         </p:spPr>
         <p:txBody>
-          <a:bodyPr wrap="square" lIns="0" rIns="0" tIns="0" bIns="0" anchor="ctr">
+          <a:bodyPr wrap="square" lIns="0" tIns="0" rIns="0" bIns="0" anchor="ctr">
             <a:noAutofit/>
           </a:bodyPr>
           <a:lstStyle/>
@@ -31237,7 +31486,7 @@
           <a:noFill/>
         </p:spPr>
         <p:txBody>
-          <a:bodyPr wrap="square" lIns="0" rIns="0" tIns="0" bIns="0" anchor="t">
+          <a:bodyPr wrap="square" lIns="0" tIns="0" rIns="0" bIns="0" anchor="t">
             <a:noAutofit/>
           </a:bodyPr>
           <a:lstStyle/>
@@ -31295,7 +31544,7 @@
           <a:noFill/>
         </p:spPr>
         <p:txBody>
-          <a:bodyPr wrap="square" lIns="0" rIns="0" tIns="0" bIns="0" anchor="t">
+          <a:bodyPr wrap="square" lIns="0" tIns="0" rIns="0" bIns="0" anchor="t">
             <a:noAutofit/>
           </a:bodyPr>
           <a:lstStyle/>
@@ -31391,12 +31640,13 @@
           </a:fontRef>
         </p:style>
         <p:txBody>
-          <a:bodyPr rtlCol="0" anchor="ctr" wrap="square">
+          <a:bodyPr wrap="square" rtlCol="0" anchor="ctr">
             <a:noAutofit/>
           </a:bodyPr>
           <a:lstStyle/>
           <a:p>
             <a:pPr algn="ctr"/>
+            <a:endParaRPr/>
           </a:p>
         </p:txBody>
       </p:sp>
